--- a/reports/slides/ett_oil_temperature_poc.pptx
+++ b/reports/slides/ett_oil_temperature_poc.pptx
@@ -2218,6 +2218,84 @@
         </p:nvSpPr>
         <p:spPr>
           <a:xfrm>
+            <a:off x="11091672" y="6446520"/>
+            <a:ext cx="548640" cy="274320"/>
+          </a:xfrm>
+          <a:prstGeom prst="rect">
+            <a:avLst/>
+          </a:prstGeom>
+          <a:noFill/>
+          <a:ln/>
+        </p:spPr>
+        <p:txBody>
+          <a:bodyPr wrap="square" lIns="0" tIns="0" rIns="0" bIns="0" rtlCol="0" anchor="ctr"/>
+          <a:lstStyle/>
+          <a:p>
+            <a:pPr algn="r" indent="0" marL="0">
+              <a:buNone/>
+            </a:pPr>
+            <a:r>
+              <a:rPr lang="en-US" sz="1000" dirty="0">
+                <a:solidFill>
+                  <a:srgbClr val="9AA6D6"/>
+                </a:solidFill>
+                <a:latin typeface="Arial" pitchFamily="34" charset="0"/>
+                <a:ea typeface="Arial" pitchFamily="34" charset="-122"/>
+                <a:cs typeface="Arial" pitchFamily="34" charset="-120"/>
+              </a:rPr>
+              <a:t>1</a:t>
+            </a:r>
+            <a:endParaRPr lang="en-US" sz="1000" dirty="0"/>
+          </a:p>
+        </p:txBody>
+      </p:sp>
+      <p:sp>
+        <p:nvSpPr>
+          <p:cNvPr id="3" name="Text 1"/>
+          <p:cNvSpPr txBox="1"/>
+          <p:nvPr/>
+        </p:nvSpPr>
+        <p:spPr>
+          <a:xfrm>
+            <a:off x="548640" y="6446520"/>
+            <a:ext cx="3657600" cy="274320"/>
+          </a:xfrm>
+          <a:prstGeom prst="rect">
+            <a:avLst/>
+          </a:prstGeom>
+          <a:noFill/>
+          <a:ln/>
+        </p:spPr>
+        <p:txBody>
+          <a:bodyPr wrap="square" lIns="0" tIns="0" rIns="0" bIns="0" rtlCol="0" anchor="ctr"/>
+          <a:lstStyle/>
+          <a:p>
+            <a:pPr indent="0" marL="0">
+              <a:buNone/>
+            </a:pPr>
+            <a:r>
+              <a:rPr lang="en-US" sz="900" dirty="0">
+                <a:solidFill>
+                  <a:srgbClr val="9AA6D6"/>
+                </a:solidFill>
+                <a:latin typeface="Arial" pitchFamily="34" charset="0"/>
+                <a:ea typeface="Arial" pitchFamily="34" charset="-122"/>
+                <a:cs typeface="Arial" pitchFamily="34" charset="-120"/>
+              </a:rPr>
+              <a:t>ETT 油温予測 PoC</a:t>
+            </a:r>
+            <a:endParaRPr lang="en-US" sz="900" dirty="0"/>
+          </a:p>
+        </p:txBody>
+      </p:sp>
+      <p:sp>
+        <p:nvSpPr>
+          <p:cNvPr id="4" name="Text 2"/>
+          <p:cNvSpPr txBox="1"/>
+          <p:nvPr/>
+        </p:nvSpPr>
+        <p:spPr>
+          <a:xfrm>
             <a:off x="548640" y="2011680"/>
             <a:ext cx="11091672" cy="914400"/>
           </a:xfrm>
@@ -2251,7 +2329,7 @@
       </p:sp>
       <p:sp>
         <p:nvSpPr>
-          <p:cNvPr id="3" name="Text 1"/>
+          <p:cNvPr id="5" name="Text 3"/>
           <p:cNvSpPr txBox="1"/>
           <p:nvPr/>
         </p:nvSpPr>
@@ -2290,7 +2368,7 @@
       </p:sp>
       <p:sp>
         <p:nvSpPr>
-          <p:cNvPr id="4" name="Text 2"/>
+          <p:cNvPr id="6" name="Text 4"/>
           <p:cNvSpPr txBox="1"/>
           <p:nvPr/>
         </p:nvSpPr>
@@ -2329,13 +2407,13 @@
       </p:sp>
       <p:sp>
         <p:nvSpPr>
-          <p:cNvPr id="5" name="Text 3"/>
+          <p:cNvPr id="7" name="Text 5"/>
           <p:cNvSpPr txBox="1"/>
           <p:nvPr/>
         </p:nvSpPr>
         <p:spPr>
           <a:xfrm>
-            <a:off x="548640" y="5577840"/>
+            <a:off x="548640" y="5440680"/>
             <a:ext cx="11091672" cy="640080"/>
           </a:xfrm>
           <a:prstGeom prst="rect">
@@ -4381,10 +4459,10 @@
             <a:tbl>
               <a:tblPr/>
               <a:tblGrid>
-                <a:gridCol w="2194560"/>
-                <a:gridCol w="1280160"/>
-                <a:gridCol w="1280160"/>
-                <a:gridCol w="1280160"/>
+                <a:gridCol w="1737360"/>
+                <a:gridCol w="1371600"/>
+                <a:gridCol w="1463040"/>
+                <a:gridCol w="1463040"/>
               </a:tblGrid>
               <a:tr h="292608">
                 <a:tc>
@@ -5554,7 +5632,7 @@
                 <a:ea typeface="Arial" pitchFamily="34" charset="-122"/>
                 <a:cs typeface="Arial" pitchFamily="34" charset="-120"/>
               </a:rPr>
-              <a:t>的中した通知 9 件と検知した区間 10 件は別の集計単位（1 通知が複数の区間に対応しうる）。誤通知は、通知の間に一度も超えなかったもの</a:t>
+              <a:t>的中した通知 9 件と検知した区間 10 件は別の集計単位（1 通知が複数の区間に対応しうる）。誤通知は、発報した起点の 6 時間後の対象時刻で実測が一度も閾値を超えなかった通知</a:t>
             </a:r>
             <a:endParaRPr lang="en-US" sz="1050" dirty="0"/>
           </a:p>
@@ -5955,7 +6033,7 @@
                 <a:ea typeface="Arial" pitchFamily="34" charset="-122"/>
                 <a:cs typeface="Arial" pitchFamily="34" charset="-120"/>
               </a:rPr>
-              <a:t>14・15 時の 2 時点で超過（実測 46.5・46.9 ℃）。6 時間前の予測は 40.0・42.6 ℃で、どちらも警報を出せなかった</a:t>
+              <a:t>14・15 時の 2 時点で超過（実測 46.5・46.9 ℃）。6 時間前の予測は 40.0・42.5 ℃で、どちらも警報を出せなかった</a:t>
             </a:r>
             <a:endParaRPr lang="en-US" sz="1100" dirty="0"/>
           </a:p>
@@ -6609,7 +6687,7 @@
                 <a:ea typeface="Arial" pitchFamily="34" charset="-122"/>
                 <a:cs typeface="Arial" pitchFamily="34" charset="-120"/>
               </a:rPr>
-              <a:t>短い高温区間を過小予測した例がある（11 枚目）</a:t>
+              <a:t>短い高温区間を過小予測した例がある（12 ページ）</a:t>
             </a:r>
             <a:endParaRPr lang="en-US" sz="1300" dirty="0"/>
           </a:p>
@@ -7766,7 +7844,7 @@
                 <a:ea typeface="Arial" pitchFamily="34" charset="-122"/>
                 <a:cs typeface="Arial" pitchFamily="34" charset="-120"/>
               </a:rPr>
-              <a:t>A1 特徴量（条件 B。すべて予測起点 s を基準）</a:t>
+              <a:t>A1 特徴量（条件 B。油温・負荷の履歴は予測起点 s 基準、カレンダーは対象時刻 T 基準）</a:t>
             </a:r>
             <a:endParaRPr lang="en-US" sz="1100" dirty="0"/>
           </a:p>
@@ -9915,7 +9993,7 @@
                           <a:ea typeface="Arial" pitchFamily="34" charset="-122"/>
                           <a:cs typeface="Arial" pitchFamily="34" charset="-120"/>
                         </a:rPr>
-                        <a:t>−18%（リッジ回帰 2.37 ℃）／持続予測比 −56%（4.43 ℃）</a:t>
+                        <a:t>−18%（リッジ回帰 2.37 ℃）／持続予測比 −56%（4.44 ℃）</a:t>
                       </a:r>
                       <a:endParaRPr lang="en-US" sz="1150" dirty="0">
                         <a:latin typeface="Arial" charset="0"/>
@@ -14297,7 +14375,7 @@
                 <a:ea typeface="Arial" pitchFamily="34" charset="-122"/>
                 <a:cs typeface="Arial" pitchFamily="34" charset="-120"/>
               </a:rPr>
-              <a:t>相関だけでは負荷の追加価値を判断できない → 9 枚目のアブレーションで測る（相関図は付録 B）</a:t>
+              <a:t>相関だけでは負荷の追加価値を判断できない → 10 ページのアブレーションで測る（相関図は付録 B）</a:t>
             </a:r>
             <a:endParaRPr lang="en-US" sz="1150" dirty="0"/>
           </a:p>
@@ -14719,7 +14797,7 @@
                 <a:ea typeface="Arial" pitchFamily="34" charset="-122"/>
                 <a:cs typeface="Arial" pitchFamily="34" charset="-120"/>
               </a:rPr>
-              <a:t>テスト 2017-11-01 〜 2018-06-26（約 8 か月・5,702 時点）</a:t>
+              <a:t>テスト 2017-11-01 〜 2018-06-26（約 8 か月。6 時間先の評価件数 5,702 時点）</a:t>
             </a:r>
             <a:endParaRPr lang="en-US" sz="1100" dirty="0"/>
           </a:p>
@@ -14883,7 +14961,7 @@
                 <a:ea typeface="Arial" pitchFamily="34" charset="-122"/>
                 <a:cs typeface="Arial" pitchFamily="34" charset="-120"/>
               </a:rPr>
-              <a:t>標準化・早期終了・残差／直接の選択は検証期間のみ。テスト期間の結果でモデルを再選択しない（EDA は全期間）</a:t>
+              <a:t>標準化の平均・標準偏差は学習期間だけで推定。早期終了と、油温差／油温そのものの予測方式の選択には検証期間だけを使う。テスト期間の結果でモデルを再選択しない（EDA は全期間）</a:t>
             </a:r>
             <a:endParaRPr lang="en-US" sz="1300" dirty="0"/>
           </a:p>
@@ -15262,7 +15340,7 @@
                 <a:ea typeface="Arial" pitchFamily="34" charset="-122"/>
                 <a:cs typeface="Arial" pitchFamily="34" charset="-120"/>
               </a:rPr>
-              <a:t>6 時間先の MAE は設備 2 で 4.43（持続）→ 2.37（リッジ）→ 1.95 ℃（LightGBM）。設備 1 は 1.15 → 1.11 ℃で、改善は小さい。</a:t>
+              <a:t>6 時間先の MAE は設備 2 で 4.44（持続）→ 2.37（リッジ）→ 1.95 ℃（LightGBM）。設備 1 は 1.15 → 1.11 ℃で、改善は小さい。</a:t>
             </a:r>
             <a:endParaRPr lang="en-US" sz="1900" dirty="0"/>
           </a:p>
@@ -15841,7 +15919,7 @@
                           <a:ea typeface="Arial" pitchFamily="34" charset="-122"/>
                           <a:cs typeface="Arial" pitchFamily="34" charset="-120"/>
                         </a:rPr>
-                        <a:t>4.43 / 2.37 / 1.95</a:t>
+                        <a:t>4.44 / 2.37 / 1.95</a:t>
                       </a:r>
                       <a:endParaRPr lang="en-US" sz="1050" dirty="0">
                         <a:latin typeface="Arial" charset="0"/>
@@ -16316,7 +16394,7 @@
                 <a:ea typeface="Arial" pitchFamily="34" charset="-122"/>
                 <a:cs typeface="Arial" pitchFamily="34" charset="-120"/>
               </a:rPr>
-              <a:t>設備 1: 月によって負ける（2018-01 は持続 0.94 ℃に対し 1.26 ℃）。3.6% の改善を安定した効果とは言わない</a:t>
+              <a:t>設備 1: 月によって負ける（2018-01 は持続 0.94 ℃に対し 1.26 ℃）。3.7% の改善を安定した効果とは言わない</a:t>
             </a:r>
             <a:endParaRPr lang="en-US" sz="1250" dirty="0"/>
           </a:p>
@@ -16340,7 +16418,7 @@
                 <a:ea typeface="Arial" pitchFamily="34" charset="-122"/>
                 <a:cs typeface="Arial" pitchFamily="34" charset="-120"/>
               </a:rPr>
-              <a:t>時刻別: 午前の上昇局面で持続予測の誤差が最も大きく、モデルとの差もそこで開く</a:t>
+              <a:t>対象時刻別: 昼〜午後で持続予測の誤差が大きく 14 時で最大（9.5 ℃）。LightGBM との差も 14 時で最大（3.8 ℃）</a:t>
             </a:r>
             <a:endParaRPr lang="en-US" sz="1250" dirty="0"/>
           </a:p>

--- a/reports/slides/ett_oil_temperature_poc.pptx
+++ b/reports/slides/ett_oil_temperature_poc.pptx
@@ -1266,7 +1266,7 @@
           </c:tx>
           <c:spPr>
             <a:solidFill>
-              <a:srgbClr val="A6A6A6"/>
+              <a:srgbClr val="BFBFBF"/>
             </a:solidFill>
             <a:effectLst/>
           </c:spPr>
@@ -1301,7 +1301,7 @@
             <c:bubble3D val="0"/>
             <c:spPr>
               <a:solidFill>
-                <a:srgbClr val="A6A6A6"/>
+                <a:srgbClr val="BFBFBF"/>
               </a:solidFill>
               <a:effectLst/>
             </c:spPr>
@@ -1312,7 +1312,7 @@
             <c:bubble3D val="0"/>
             <c:spPr>
               <a:solidFill>
-                <a:srgbClr val="A6A6A6"/>
+                <a:srgbClr val="BFBFBF"/>
               </a:solidFill>
               <a:effectLst/>
             </c:spPr>
@@ -1323,7 +1323,7 @@
             <c:bubble3D val="0"/>
             <c:spPr>
               <a:solidFill>
-                <a:srgbClr val="A6A6A6"/>
+                <a:srgbClr val="7F7F7F"/>
               </a:solidFill>
               <a:effectLst/>
             </c:spPr>
@@ -1407,7 +1407,7 @@
           <c:showBubbleSize val="0"/>
           <c:showLeaderLines val="0"/>
         </c:dLbls>
-        <c:gapWidth val="80"/>
+        <c:gapWidth val="110"/>
         <c:overlap val="0"/>
         <c:axId val="2094734554"/>
         <c:axId val="2094734552"/>
@@ -2280,7 +2280,7 @@
           <c:showBubbleSize val="0"/>
           <c:showLeaderLines val="0"/>
         </c:dLbls>
-        <c:gapWidth val="80"/>
+        <c:gapWidth val="110"/>
         <c:overlap val="0"/>
         <c:axId val="2094734554"/>
         <c:axId val="2094734552"/>
@@ -2571,7 +2571,7 @@
           <c:showBubbleSize val="0"/>
           <c:showLeaderLines val="0"/>
         </c:dLbls>
-        <c:gapWidth val="80"/>
+        <c:gapWidth val="110"/>
         <c:overlap val="0"/>
         <c:axId val="2094734554"/>
         <c:axId val="2094734552"/>
@@ -6972,7 +6972,7 @@
             <a:r>
               <a:rPr lang="en-US" sz="1000" dirty="0">
                 <a:solidFill>
-                  <a:srgbClr val="C9D8EA"/>
+                  <a:srgbClr val="D9D9D9"/>
                 </a:solidFill>
                 <a:latin typeface="Arial" pitchFamily="34" charset="0"/>
                 <a:ea typeface="Arial" pitchFamily="34" charset="-122"/>
@@ -7076,7 +7076,7 @@
             <a:r>
               <a:rPr lang="en-US" sz="1600" dirty="0">
                 <a:solidFill>
-                  <a:srgbClr val="C9D8EA"/>
+                  <a:srgbClr val="D9D9D9"/>
                 </a:solidFill>
                 <a:latin typeface="Arial" pitchFamily="34" charset="0"/>
                 <a:ea typeface="Arial" pitchFamily="34" charset="-122"/>
@@ -7090,13 +7090,36 @@
       </p:sp>
       <p:sp>
         <p:nvSpPr>
-          <p:cNvPr id="5" name="Text 3"/>
-          <p:cNvSpPr txBox="1"/>
+          <p:cNvPr id="5" name="Shape 3"/>
+          <p:cNvSpPr/>
           <p:nvPr/>
         </p:nvSpPr>
         <p:spPr>
           <a:xfrm>
-            <a:off x="457200" y="3200400"/>
+            <a:off x="457200" y="3886200"/>
+            <a:ext cx="8229600" cy="0"/>
+          </a:xfrm>
+          <a:prstGeom prst="line">
+            <a:avLst/>
+          </a:prstGeom>
+          <a:noFill/>
+          <a:ln w="9525">
+            <a:solidFill>
+              <a:srgbClr val="D9D9D9"/>
+            </a:solidFill>
+            <a:prstDash val="solid"/>
+          </a:ln>
+        </p:spPr>
+      </p:sp>
+      <p:sp>
+        <p:nvSpPr>
+          <p:cNvPr id="6" name="Text 4"/>
+          <p:cNvSpPr txBox="1"/>
+          <p:nvPr/>
+        </p:nvSpPr>
+        <p:spPr>
+          <a:xfrm>
+            <a:off x="457200" y="4096512"/>
             <a:ext cx="8046720" cy="320040"/>
           </a:xfrm>
           <a:prstGeom prst="rect">
@@ -7118,7 +7141,7 @@
             <a:r>
               <a:rPr lang="en-US" sz="1500" dirty="0">
                 <a:solidFill>
-                  <a:srgbClr val="C9D8EA"/>
+                  <a:srgbClr val="D9D9D9"/>
                 </a:solidFill>
                 <a:latin typeface="Arial" pitchFamily="34" charset="0"/>
                 <a:ea typeface="Arial" pitchFamily="34" charset="-122"/>
@@ -7209,7 +7232,7 @@
         </p:nvSpPr>
         <p:spPr>
           <a:xfrm>
-            <a:off x="457200" y="292608"/>
+            <a:off x="457200" y="310896"/>
             <a:ext cx="8229600" cy="868680"/>
           </a:xfrm>
           <a:prstGeom prst="rect">
@@ -7372,7 +7395,7 @@
         <p:spPr>
           <a:xfrm>
             <a:off x="5760720" y="1371600"/>
-            <a:ext cx="2926080" cy="3108960"/>
+            <a:ext cx="2926080" cy="549656"/>
           </a:xfrm>
           <a:prstGeom prst="rect">
             <a:avLst/>
@@ -7384,17 +7407,16 @@
           <a:bodyPr wrap="square" lIns="0" tIns="0" rIns="0" bIns="0" rtlCol="0" anchor="t"/>
           <a:lstStyle/>
           <a:p>
-            <a:pPr marL="177800" indent="-177800">
+            <a:pPr algn="l" indent="0" marL="0">
               <a:lnSpc>
                 <a:spcPct val="108000"/>
               </a:lnSpc>
-              <a:buSzPct val="100000"/>
-              <a:buChar char="•"/>
-            </a:pPr>
-            <a:r>
-              <a:rPr lang="en-US" sz="1600" dirty="0">
-                <a:solidFill>
-                  <a:srgbClr val="3A3A3A"/>
+              <a:buNone/>
+            </a:pPr>
+            <a:r>
+              <a:rPr lang="en-US" sz="1600" b="1" dirty="0">
+                <a:solidFill>
+                  <a:srgbClr val="1F4E79"/>
                 </a:solidFill>
                 <a:latin typeface="Arial" pitchFamily="34" charset="0"/>
                 <a:ea typeface="Arial" pitchFamily="34" charset="-122"/>
@@ -7405,20 +7427,16 @@
             <a:endParaRPr lang="en-US" sz="1600" dirty="0"/>
           </a:p>
           <a:p>
-            <a:pPr marL="177800" indent="-177800">
+            <a:pPr algn="l" indent="0" marL="0">
               <a:lnSpc>
                 <a:spcPct val="108000"/>
               </a:lnSpc>
-              <a:spcAft>
-                <a:spcPts val="1200"/>
-              </a:spcAft>
-              <a:buSzPct val="100000"/>
-              <a:buChar char=" "/>
-            </a:pPr>
-            <a:r>
-              <a:rPr lang="en-US" sz="1600" dirty="0">
-                <a:solidFill>
-                  <a:srgbClr val="3A3A3A"/>
+              <a:buNone/>
+            </a:pPr>
+            <a:r>
+              <a:rPr lang="en-US" sz="1600" b="1" dirty="0">
+                <a:solidFill>
+                  <a:srgbClr val="1F4E79"/>
                 </a:solidFill>
                 <a:latin typeface="Arial" pitchFamily="34" charset="0"/>
                 <a:ea typeface="Arial" pitchFamily="34" charset="-122"/>
@@ -7428,13 +7446,57 @@
             </a:r>
             <a:endParaRPr lang="en-US" sz="1600" dirty="0"/>
           </a:p>
-          <a:p>
-            <a:pPr marL="177800" indent="-177800">
+        </p:txBody>
+      </p:sp>
+      <p:sp>
+        <p:nvSpPr>
+          <p:cNvPr id="8" name="Shape 5"/>
+          <p:cNvSpPr/>
+          <p:nvPr/>
+        </p:nvSpPr>
+        <p:spPr>
+          <a:xfrm>
+            <a:off x="5760720" y="1961557"/>
+            <a:ext cx="2926080" cy="0"/>
+          </a:xfrm>
+          <a:prstGeom prst="line">
+            <a:avLst/>
+          </a:prstGeom>
+          <a:noFill/>
+          <a:ln w="6350">
+            <a:solidFill>
+              <a:srgbClr val="D9D9D9"/>
+            </a:solidFill>
+            <a:prstDash val="solid"/>
+          </a:ln>
+        </p:spPr>
+      </p:sp>
+      <p:sp>
+        <p:nvSpPr>
+          <p:cNvPr id="9" name="Text 6"/>
+          <p:cNvSpPr txBox="1"/>
+          <p:nvPr/>
+        </p:nvSpPr>
+        <p:spPr>
+          <a:xfrm>
+            <a:off x="5760720" y="2001859"/>
+            <a:ext cx="2926080" cy="801624"/>
+          </a:xfrm>
+          <a:prstGeom prst="rect">
+            <a:avLst/>
+          </a:prstGeom>
+          <a:noFill/>
+          <a:ln/>
+        </p:spPr>
+        <p:txBody>
+          <a:bodyPr wrap="square" lIns="0" tIns="0" rIns="0" bIns="0" rtlCol="0" anchor="t"/>
+          <a:lstStyle/>
+          <a:p>
+            <a:pPr algn="l" indent="0" marL="0">
               <a:lnSpc>
                 <a:spcPct val="108000"/>
               </a:lnSpc>
-              <a:buSzPct val="100000"/>
-              <a:buChar char="•"/>
+              <a:buNone/>
             </a:pPr>
             <a:r>
               <a:rPr lang="en-US" sz="1600" dirty="0">
@@ -7450,12 +7512,11 @@
             <a:endParaRPr lang="en-US" sz="1600" dirty="0"/>
           </a:p>
           <a:p>
-            <a:pPr marL="177800" indent="-177800">
+            <a:pPr algn="l" indent="0" marL="0">
               <a:lnSpc>
                 <a:spcPct val="108000"/>
               </a:lnSpc>
-              <a:buSzPct val="100000"/>
-              <a:buChar char=" "/>
+              <a:buNone/>
             </a:pPr>
             <a:r>
               <a:rPr lang="en-US" sz="1600" dirty="0">
@@ -7471,15 +7532,11 @@
             <a:endParaRPr lang="en-US" sz="1600" dirty="0"/>
           </a:p>
           <a:p>
-            <a:pPr marL="177800" indent="-177800">
+            <a:pPr algn="l" indent="0" marL="0">
               <a:lnSpc>
                 <a:spcPct val="108000"/>
               </a:lnSpc>
-              <a:spcAft>
-                <a:spcPts val="1200"/>
-              </a:spcAft>
-              <a:buSzPct val="100000"/>
-              <a:buChar char=" "/>
+              <a:buNone/>
             </a:pPr>
             <a:r>
               <a:rPr lang="en-US" sz="1600" dirty="0">
@@ -7494,13 +7551,57 @@
             </a:r>
             <a:endParaRPr lang="en-US" sz="1600" dirty="0"/>
           </a:p>
-          <a:p>
-            <a:pPr marL="177800" indent="-177800">
+        </p:txBody>
+      </p:sp>
+      <p:sp>
+        <p:nvSpPr>
+          <p:cNvPr id="10" name="Shape 7"/>
+          <p:cNvSpPr/>
+          <p:nvPr/>
+        </p:nvSpPr>
+        <p:spPr>
+          <a:xfrm>
+            <a:off x="5760720" y="2843784"/>
+            <a:ext cx="2926080" cy="0"/>
+          </a:xfrm>
+          <a:prstGeom prst="line">
+            <a:avLst/>
+          </a:prstGeom>
+          <a:noFill/>
+          <a:ln w="6350">
+            <a:solidFill>
+              <a:srgbClr val="D9D9D9"/>
+            </a:solidFill>
+            <a:prstDash val="solid"/>
+          </a:ln>
+        </p:spPr>
+      </p:sp>
+      <p:sp>
+        <p:nvSpPr>
+          <p:cNvPr id="11" name="Text 8"/>
+          <p:cNvSpPr txBox="1"/>
+          <p:nvPr/>
+        </p:nvSpPr>
+        <p:spPr>
+          <a:xfrm>
+            <a:off x="5760720" y="2884085"/>
+            <a:ext cx="2926080" cy="801624"/>
+          </a:xfrm>
+          <a:prstGeom prst="rect">
+            <a:avLst/>
+          </a:prstGeom>
+          <a:noFill/>
+          <a:ln/>
+        </p:spPr>
+        <p:txBody>
+          <a:bodyPr wrap="square" lIns="0" tIns="0" rIns="0" bIns="0" rtlCol="0" anchor="t"/>
+          <a:lstStyle/>
+          <a:p>
+            <a:pPr algn="l" indent="0" marL="0">
               <a:lnSpc>
                 <a:spcPct val="108000"/>
               </a:lnSpc>
-              <a:buSzPct val="100000"/>
-              <a:buChar char="•"/>
+              <a:buNone/>
             </a:pPr>
             <a:r>
               <a:rPr lang="en-US" sz="1600" dirty="0">
@@ -7516,12 +7617,11 @@
             <a:endParaRPr lang="en-US" sz="1600" dirty="0"/>
           </a:p>
           <a:p>
-            <a:pPr marL="177800" indent="-177800">
+            <a:pPr algn="l" indent="0" marL="0">
               <a:lnSpc>
                 <a:spcPct val="108000"/>
               </a:lnSpc>
-              <a:buSzPct val="100000"/>
-              <a:buChar char=" "/>
+              <a:buNone/>
             </a:pPr>
             <a:r>
               <a:rPr lang="en-US" sz="1600" dirty="0">
@@ -7537,15 +7637,11 @@
             <a:endParaRPr lang="en-US" sz="1600" dirty="0"/>
           </a:p>
           <a:p>
-            <a:pPr marL="177800" indent="-177800">
+            <a:pPr algn="l" indent="0" marL="0">
               <a:lnSpc>
                 <a:spcPct val="108000"/>
               </a:lnSpc>
-              <a:spcAft>
-                <a:spcPts val="1200"/>
-              </a:spcAft>
-              <a:buSzPct val="100000"/>
-              <a:buChar char=" "/>
+              <a:buNone/>
             </a:pPr>
             <a:r>
               <a:rPr lang="en-US" sz="1600" dirty="0">
@@ -7560,13 +7656,57 @@
             </a:r>
             <a:endParaRPr lang="en-US" sz="1600" dirty="0"/>
           </a:p>
-          <a:p>
-            <a:pPr marL="177800" indent="-177800">
+        </p:txBody>
+      </p:sp>
+      <p:sp>
+        <p:nvSpPr>
+          <p:cNvPr id="12" name="Shape 9"/>
+          <p:cNvSpPr/>
+          <p:nvPr/>
+        </p:nvSpPr>
+        <p:spPr>
+          <a:xfrm>
+            <a:off x="5760720" y="3726011"/>
+            <a:ext cx="2926080" cy="0"/>
+          </a:xfrm>
+          <a:prstGeom prst="line">
+            <a:avLst/>
+          </a:prstGeom>
+          <a:noFill/>
+          <a:ln w="6350">
+            <a:solidFill>
+              <a:srgbClr val="D9D9D9"/>
+            </a:solidFill>
+            <a:prstDash val="solid"/>
+          </a:ln>
+        </p:spPr>
+      </p:sp>
+      <p:sp>
+        <p:nvSpPr>
+          <p:cNvPr id="13" name="Text 10"/>
+          <p:cNvSpPr txBox="1"/>
+          <p:nvPr/>
+        </p:nvSpPr>
+        <p:spPr>
+          <a:xfrm>
+            <a:off x="5760720" y="3766312"/>
+            <a:ext cx="2926080" cy="549656"/>
+          </a:xfrm>
+          <a:prstGeom prst="rect">
+            <a:avLst/>
+          </a:prstGeom>
+          <a:noFill/>
+          <a:ln/>
+        </p:spPr>
+        <p:txBody>
+          <a:bodyPr wrap="square" lIns="0" tIns="0" rIns="0" bIns="0" rtlCol="0" anchor="t"/>
+          <a:lstStyle/>
+          <a:p>
+            <a:pPr algn="l" indent="0" marL="0">
               <a:lnSpc>
                 <a:spcPct val="108000"/>
               </a:lnSpc>
-              <a:buSzPct val="100000"/>
-              <a:buChar char="•"/>
+              <a:buNone/>
             </a:pPr>
             <a:r>
               <a:rPr lang="en-US" sz="1600" dirty="0">
@@ -7582,15 +7722,11 @@
             <a:endParaRPr lang="en-US" sz="1600" dirty="0"/>
           </a:p>
           <a:p>
-            <a:pPr marL="177800" indent="-177800">
+            <a:pPr algn="l" indent="0" marL="0">
               <a:lnSpc>
                 <a:spcPct val="108000"/>
               </a:lnSpc>
-              <a:spcAft>
-                <a:spcPts val="1200"/>
-              </a:spcAft>
-              <a:buSzPct val="100000"/>
-              <a:buChar char=" "/>
+              <a:buNone/>
             </a:pPr>
             <a:r>
               <a:rPr lang="en-US" sz="1600" dirty="0">
@@ -7609,7 +7745,7 @@
       </p:sp>
       <p:sp>
         <p:nvSpPr>
-          <p:cNvPr id="8" name="Text 5"/>
+          <p:cNvPr id="14" name="Text 11"/>
           <p:cNvSpPr txBox="1"/>
           <p:nvPr/>
         </p:nvSpPr>
@@ -7728,7 +7864,7 @@
         </p:nvSpPr>
         <p:spPr>
           <a:xfrm>
-            <a:off x="457200" y="292608"/>
+            <a:off x="457200" y="310896"/>
             <a:ext cx="8229600" cy="868680"/>
           </a:xfrm>
           <a:prstGeom prst="rect">
@@ -7914,7 +8050,7 @@
         <p:spPr>
           <a:xfrm>
             <a:off x="5715000" y="1371600"/>
-            <a:ext cx="2971800" cy="3017520"/>
+            <a:ext cx="2971800" cy="549656"/>
           </a:xfrm>
           <a:prstGeom prst="rect">
             <a:avLst/>
@@ -7926,17 +8062,16 @@
           <a:bodyPr wrap="square" lIns="0" tIns="0" rIns="0" bIns="0" rtlCol="0" anchor="t"/>
           <a:lstStyle/>
           <a:p>
-            <a:pPr marL="177800" indent="-177800">
+            <a:pPr algn="l" indent="0" marL="0">
               <a:lnSpc>
                 <a:spcPct val="108000"/>
               </a:lnSpc>
-              <a:buSzPct val="100000"/>
-              <a:buChar char="•"/>
-            </a:pPr>
-            <a:r>
-              <a:rPr lang="en-US" sz="1600" dirty="0">
-                <a:solidFill>
-                  <a:srgbClr val="3A3A3A"/>
+              <a:buNone/>
+            </a:pPr>
+            <a:r>
+              <a:rPr lang="en-US" sz="1600" b="1" dirty="0">
+                <a:solidFill>
+                  <a:srgbClr val="1F4E79"/>
                 </a:solidFill>
                 <a:latin typeface="Arial" pitchFamily="34" charset="0"/>
                 <a:ea typeface="Arial" pitchFamily="34" charset="-122"/>
@@ -7947,20 +8082,16 @@
             <a:endParaRPr lang="en-US" sz="1600" dirty="0"/>
           </a:p>
           <a:p>
-            <a:pPr marL="177800" indent="-177800">
+            <a:pPr algn="l" indent="0" marL="0">
               <a:lnSpc>
                 <a:spcPct val="108000"/>
               </a:lnSpc>
-              <a:spcAft>
-                <a:spcPts val="1400"/>
-              </a:spcAft>
-              <a:buSzPct val="100000"/>
-              <a:buChar char=" "/>
-            </a:pPr>
-            <a:r>
-              <a:rPr lang="en-US" sz="1600" dirty="0">
-                <a:solidFill>
-                  <a:srgbClr val="3A3A3A"/>
+              <a:buNone/>
+            </a:pPr>
+            <a:r>
+              <a:rPr lang="en-US" sz="1600" b="1" dirty="0">
+                <a:solidFill>
+                  <a:srgbClr val="1F4E79"/>
                 </a:solidFill>
                 <a:latin typeface="Arial" pitchFamily="34" charset="0"/>
                 <a:ea typeface="Arial" pitchFamily="34" charset="-122"/>
@@ -7970,18 +8101,62 @@
             </a:r>
             <a:endParaRPr lang="en-US" sz="1600" dirty="0"/>
           </a:p>
-          <a:p>
-            <a:pPr marL="177800" indent="-177800">
+        </p:txBody>
+      </p:sp>
+      <p:sp>
+        <p:nvSpPr>
+          <p:cNvPr id="9" name="Shape 6"/>
+          <p:cNvSpPr/>
+          <p:nvPr/>
+        </p:nvSpPr>
+        <p:spPr>
+          <a:xfrm>
+            <a:off x="5715000" y="2046732"/>
+            <a:ext cx="2971800" cy="0"/>
+          </a:xfrm>
+          <a:prstGeom prst="line">
+            <a:avLst/>
+          </a:prstGeom>
+          <a:noFill/>
+          <a:ln w="6350">
+            <a:solidFill>
+              <a:srgbClr val="D9D9D9"/>
+            </a:solidFill>
+            <a:prstDash val="solid"/>
+          </a:ln>
+        </p:spPr>
+      </p:sp>
+      <p:sp>
+        <p:nvSpPr>
+          <p:cNvPr id="10" name="Text 7"/>
+          <p:cNvSpPr txBox="1"/>
+          <p:nvPr/>
+        </p:nvSpPr>
+        <p:spPr>
+          <a:xfrm>
+            <a:off x="5715000" y="2172208"/>
+            <a:ext cx="2971800" cy="801624"/>
+          </a:xfrm>
+          <a:prstGeom prst="rect">
+            <a:avLst/>
+          </a:prstGeom>
+          <a:noFill/>
+          <a:ln/>
+        </p:spPr>
+        <p:txBody>
+          <a:bodyPr wrap="square" lIns="0" tIns="0" rIns="0" bIns="0" rtlCol="0" anchor="t"/>
+          <a:lstStyle/>
+          <a:p>
+            <a:pPr algn="l" indent="0" marL="0">
               <a:lnSpc>
                 <a:spcPct val="108000"/>
               </a:lnSpc>
-              <a:buSzPct val="100000"/>
-              <a:buChar char="•"/>
-            </a:pPr>
-            <a:r>
-              <a:rPr lang="en-US" sz="1600" dirty="0">
-                <a:solidFill>
-                  <a:srgbClr val="3A3A3A"/>
+              <a:buNone/>
+            </a:pPr>
+            <a:r>
+              <a:rPr lang="en-US" sz="1600" b="1" dirty="0">
+                <a:solidFill>
+                  <a:srgbClr val="1F4E79"/>
                 </a:solidFill>
                 <a:latin typeface="Arial" pitchFamily="34" charset="0"/>
                 <a:ea typeface="Arial" pitchFamily="34" charset="-122"/>
@@ -7992,17 +8167,16 @@
             <a:endParaRPr lang="en-US" sz="1600" dirty="0"/>
           </a:p>
           <a:p>
-            <a:pPr marL="177800" indent="-177800">
+            <a:pPr algn="l" indent="0" marL="0">
               <a:lnSpc>
                 <a:spcPct val="108000"/>
               </a:lnSpc>
-              <a:buSzPct val="100000"/>
-              <a:buChar char=" "/>
-            </a:pPr>
-            <a:r>
-              <a:rPr lang="en-US" sz="1600" dirty="0">
-                <a:solidFill>
-                  <a:srgbClr val="3A3A3A"/>
+              <a:buNone/>
+            </a:pPr>
+            <a:r>
+              <a:rPr lang="en-US" sz="1600" b="1" dirty="0">
+                <a:solidFill>
+                  <a:srgbClr val="1F4E79"/>
                 </a:solidFill>
                 <a:latin typeface="Arial" pitchFamily="34" charset="0"/>
                 <a:ea typeface="Arial" pitchFamily="34" charset="-122"/>
@@ -8013,20 +8187,16 @@
             <a:endParaRPr lang="en-US" sz="1600" dirty="0"/>
           </a:p>
           <a:p>
-            <a:pPr marL="177800" indent="-177800">
+            <a:pPr algn="l" indent="0" marL="0">
               <a:lnSpc>
                 <a:spcPct val="108000"/>
               </a:lnSpc>
-              <a:spcAft>
-                <a:spcPts val="1400"/>
-              </a:spcAft>
-              <a:buSzPct val="100000"/>
-              <a:buChar char=" "/>
-            </a:pPr>
-            <a:r>
-              <a:rPr lang="en-US" sz="1600" dirty="0">
-                <a:solidFill>
-                  <a:srgbClr val="3A3A3A"/>
+              <a:buNone/>
+            </a:pPr>
+            <a:r>
+              <a:rPr lang="en-US" sz="1600" b="1" dirty="0">
+                <a:solidFill>
+                  <a:srgbClr val="1F4E79"/>
                 </a:solidFill>
                 <a:latin typeface="Arial" pitchFamily="34" charset="0"/>
                 <a:ea typeface="Arial" pitchFamily="34" charset="-122"/>
@@ -8036,16 +8206,57 @@
             </a:r>
             <a:endParaRPr lang="en-US" sz="1600" dirty="0"/>
           </a:p>
-          <a:p>
-            <a:pPr marL="177800" indent="-177800">
+        </p:txBody>
+      </p:sp>
+      <p:sp>
+        <p:nvSpPr>
+          <p:cNvPr id="11" name="Shape 8"/>
+          <p:cNvSpPr/>
+          <p:nvPr/>
+        </p:nvSpPr>
+        <p:spPr>
+          <a:xfrm>
+            <a:off x="5715000" y="3099308"/>
+            <a:ext cx="2971800" cy="0"/>
+          </a:xfrm>
+          <a:prstGeom prst="line">
+            <a:avLst/>
+          </a:prstGeom>
+          <a:noFill/>
+          <a:ln w="6350">
+            <a:solidFill>
+              <a:srgbClr val="D9D9D9"/>
+            </a:solidFill>
+            <a:prstDash val="solid"/>
+          </a:ln>
+        </p:spPr>
+      </p:sp>
+      <p:sp>
+        <p:nvSpPr>
+          <p:cNvPr id="12" name="Text 9"/>
+          <p:cNvSpPr txBox="1"/>
+          <p:nvPr/>
+        </p:nvSpPr>
+        <p:spPr>
+          <a:xfrm>
+            <a:off x="5715000" y="3224784"/>
+            <a:ext cx="2971800" cy="297688"/>
+          </a:xfrm>
+          <a:prstGeom prst="rect">
+            <a:avLst/>
+          </a:prstGeom>
+          <a:noFill/>
+          <a:ln/>
+        </p:spPr>
+        <p:txBody>
+          <a:bodyPr wrap="square" lIns="0" tIns="0" rIns="0" bIns="0" rtlCol="0" anchor="t"/>
+          <a:lstStyle/>
+          <a:p>
+            <a:pPr algn="l" indent="0" marL="0">
               <a:lnSpc>
                 <a:spcPct val="108000"/>
               </a:lnSpc>
-              <a:spcAft>
-                <a:spcPts val="1400"/>
-              </a:spcAft>
-              <a:buSzPct val="100000"/>
-              <a:buChar char="•"/>
+              <a:buNone/>
             </a:pPr>
             <a:r>
               <a:rPr lang="en-US" sz="1600" dirty="0">
@@ -8064,7 +8275,7 @@
       </p:sp>
       <p:sp>
         <p:nvSpPr>
-          <p:cNvPr id="9" name="Text 6"/>
+          <p:cNvPr id="13" name="Text 10"/>
           <p:cNvSpPr txBox="1"/>
           <p:nvPr/>
         </p:nvSpPr>
@@ -8183,7 +8394,7 @@
         </p:nvSpPr>
         <p:spPr>
           <a:xfrm>
-            <a:off x="457200" y="292608"/>
+            <a:off x="457200" y="310896"/>
             <a:ext cx="8229600" cy="868680"/>
           </a:xfrm>
           <a:prstGeom prst="rect">
@@ -8869,7 +9080,7 @@
         </p:nvSpPr>
         <p:spPr>
           <a:xfrm>
-            <a:off x="3456432" y="4370832"/>
+            <a:off x="3456432" y="4261104"/>
             <a:ext cx="1280160" cy="201168"/>
           </a:xfrm>
           <a:prstGeom prst="rect">
@@ -9059,7 +9270,7 @@
         <p:spPr>
           <a:xfrm>
             <a:off x="6309360" y="1371600"/>
-            <a:ext cx="2377440" cy="3017520"/>
+            <a:ext cx="2377440" cy="281940"/>
           </a:xfrm>
           <a:prstGeom prst="rect">
             <a:avLst/>
@@ -9071,15 +9282,11 @@
           <a:bodyPr wrap="square" lIns="0" tIns="0" rIns="0" bIns="0" rtlCol="0" anchor="t"/>
           <a:lstStyle/>
           <a:p>
-            <a:pPr marL="177800" indent="-177800">
+            <a:pPr algn="l" indent="0" marL="0">
               <a:lnSpc>
                 <a:spcPct val="108000"/>
               </a:lnSpc>
-              <a:spcAft>
-                <a:spcPts val="1200"/>
-              </a:spcAft>
-              <a:buSzPct val="100000"/>
-              <a:buChar char="•"/>
+              <a:buNone/>
             </a:pPr>
             <a:r>
               <a:rPr lang="en-US" sz="1500" dirty="0">
@@ -9094,21 +9301,62 @@
             </a:r>
             <a:endParaRPr lang="en-US" sz="1500" dirty="0"/>
           </a:p>
-          <a:p>
-            <a:pPr marL="177800" indent="-177800">
+        </p:txBody>
+      </p:sp>
+      <p:sp>
+        <p:nvSpPr>
+          <p:cNvPr id="26" name="Shape 23"/>
+          <p:cNvSpPr/>
+          <p:nvPr/>
+        </p:nvSpPr>
+        <p:spPr>
+          <a:xfrm>
+            <a:off x="6309360" y="1766316"/>
+            <a:ext cx="2377440" cy="0"/>
+          </a:xfrm>
+          <a:prstGeom prst="line">
+            <a:avLst/>
+          </a:prstGeom>
+          <a:noFill/>
+          <a:ln w="6350">
+            <a:solidFill>
+              <a:srgbClr val="D9D9D9"/>
+            </a:solidFill>
+            <a:prstDash val="solid"/>
+          </a:ln>
+        </p:spPr>
+      </p:sp>
+      <p:sp>
+        <p:nvSpPr>
+          <p:cNvPr id="27" name="Text 24"/>
+          <p:cNvSpPr txBox="1"/>
+          <p:nvPr/>
+        </p:nvSpPr>
+        <p:spPr>
+          <a:xfrm>
+            <a:off x="6309360" y="1879092"/>
+            <a:ext cx="2377440" cy="281940"/>
+          </a:xfrm>
+          <a:prstGeom prst="rect">
+            <a:avLst/>
+          </a:prstGeom>
+          <a:noFill/>
+          <a:ln/>
+        </p:spPr>
+        <p:txBody>
+          <a:bodyPr wrap="square" lIns="0" tIns="0" rIns="0" bIns="0" rtlCol="0" anchor="t"/>
+          <a:lstStyle/>
+          <a:p>
+            <a:pPr algn="l" indent="0" marL="0">
               <a:lnSpc>
                 <a:spcPct val="108000"/>
               </a:lnSpc>
-              <a:spcAft>
-                <a:spcPts val="1200"/>
-              </a:spcAft>
-              <a:buSzPct val="100000"/>
-              <a:buChar char="•"/>
-            </a:pPr>
-            <a:r>
-              <a:rPr lang="en-US" sz="1500" dirty="0">
-                <a:solidFill>
-                  <a:srgbClr val="3A3A3A"/>
+              <a:buNone/>
+            </a:pPr>
+            <a:r>
+              <a:rPr lang="en-US" sz="1500" b="1" dirty="0">
+                <a:solidFill>
+                  <a:srgbClr val="1F4E79"/>
                 </a:solidFill>
                 <a:latin typeface="Arial" pitchFamily="34" charset="0"/>
                 <a:ea typeface="Arial" pitchFamily="34" charset="-122"/>
@@ -9118,18 +9366,62 @@
             </a:r>
             <a:endParaRPr lang="en-US" sz="1500" dirty="0"/>
           </a:p>
-          <a:p>
-            <a:pPr marL="177800" indent="-177800">
+        </p:txBody>
+      </p:sp>
+      <p:sp>
+        <p:nvSpPr>
+          <p:cNvPr id="28" name="Shape 25"/>
+          <p:cNvSpPr/>
+          <p:nvPr/>
+        </p:nvSpPr>
+        <p:spPr>
+          <a:xfrm>
+            <a:off x="6309360" y="2273808"/>
+            <a:ext cx="2377440" cy="0"/>
+          </a:xfrm>
+          <a:prstGeom prst="line">
+            <a:avLst/>
+          </a:prstGeom>
+          <a:noFill/>
+          <a:ln w="6350">
+            <a:solidFill>
+              <a:srgbClr val="D9D9D9"/>
+            </a:solidFill>
+            <a:prstDash val="solid"/>
+          </a:ln>
+        </p:spPr>
+      </p:sp>
+      <p:sp>
+        <p:nvSpPr>
+          <p:cNvPr id="29" name="Text 26"/>
+          <p:cNvSpPr txBox="1"/>
+          <p:nvPr/>
+        </p:nvSpPr>
+        <p:spPr>
+          <a:xfrm>
+            <a:off x="6309360" y="2386584"/>
+            <a:ext cx="2377440" cy="518160"/>
+          </a:xfrm>
+          <a:prstGeom prst="rect">
+            <a:avLst/>
+          </a:prstGeom>
+          <a:noFill/>
+          <a:ln/>
+        </p:spPr>
+        <p:txBody>
+          <a:bodyPr wrap="square" lIns="0" tIns="0" rIns="0" bIns="0" rtlCol="0" anchor="t"/>
+          <a:lstStyle/>
+          <a:p>
+            <a:pPr algn="l" indent="0" marL="0">
               <a:lnSpc>
                 <a:spcPct val="108000"/>
               </a:lnSpc>
-              <a:buSzPct val="100000"/>
-              <a:buChar char="•"/>
-            </a:pPr>
-            <a:r>
-              <a:rPr lang="en-US" sz="1500" dirty="0">
-                <a:solidFill>
-                  <a:srgbClr val="3A3A3A"/>
+              <a:buNone/>
+            </a:pPr>
+            <a:r>
+              <a:rPr lang="en-US" sz="1500" b="1" dirty="0">
+                <a:solidFill>
+                  <a:srgbClr val="1F4E79"/>
                 </a:solidFill>
                 <a:latin typeface="Arial" pitchFamily="34" charset="0"/>
                 <a:ea typeface="Arial" pitchFamily="34" charset="-122"/>
@@ -9140,20 +9432,16 @@
             <a:endParaRPr lang="en-US" sz="1500" dirty="0"/>
           </a:p>
           <a:p>
-            <a:pPr marL="177800" indent="-177800">
+            <a:pPr algn="l" indent="0" marL="0">
               <a:lnSpc>
                 <a:spcPct val="108000"/>
               </a:lnSpc>
-              <a:spcAft>
-                <a:spcPts val="1200"/>
-              </a:spcAft>
-              <a:buSzPct val="100000"/>
-              <a:buChar char=" "/>
-            </a:pPr>
-            <a:r>
-              <a:rPr lang="en-US" sz="1500" dirty="0">
-                <a:solidFill>
-                  <a:srgbClr val="3A3A3A"/>
+              <a:buNone/>
+            </a:pPr>
+            <a:r>
+              <a:rPr lang="en-US" sz="1500" b="1" dirty="0">
+                <a:solidFill>
+                  <a:srgbClr val="1F4E79"/>
                 </a:solidFill>
                 <a:latin typeface="Arial" pitchFamily="34" charset="0"/>
                 <a:ea typeface="Arial" pitchFamily="34" charset="-122"/>
@@ -9167,7 +9455,7 @@
       </p:sp>
       <p:sp>
         <p:nvSpPr>
-          <p:cNvPr id="26" name="Text 23"/>
+          <p:cNvPr id="30" name="Text 27"/>
           <p:cNvSpPr txBox="1"/>
           <p:nvPr/>
         </p:nvSpPr>
@@ -9286,7 +9574,7 @@
         </p:nvSpPr>
         <p:spPr>
           <a:xfrm>
-            <a:off x="457200" y="292608"/>
+            <a:off x="457200" y="310896"/>
             <a:ext cx="8229600" cy="868680"/>
           </a:xfrm>
           <a:prstGeom prst="rect">
@@ -9363,8 +9651,8 @@
             <a:tbl>
               <a:tblPr/>
               <a:tblGrid>
-                <a:gridCol w="3749040"/>
-                <a:gridCol w="4480560"/>
+                <a:gridCol w="4297680"/>
+                <a:gridCol w="3931920"/>
               </a:tblGrid>
               <a:tr h="566928">
                 <a:tc>
@@ -9376,9 +9664,9 @@
                         <a:buNone/>
                       </a:pPr>
                       <a:r>
-                        <a:rPr lang="en-US" sz="1400" dirty="0">
+                        <a:rPr lang="en-US" sz="1400" b="1" dirty="0">
                           <a:solidFill>
-                            <a:srgbClr val="6E6E6E"/>
+                            <a:srgbClr val="1F4E79"/>
                           </a:solidFill>
                           <a:latin typeface="Arial" pitchFamily="34" charset="0"/>
                           <a:ea typeface="Arial" pitchFamily="34" charset="-122"/>
@@ -9393,7 +9681,7 @@
                       </a:endParaRPr>
                     </a:p>
                   </a:txBody>
-                  <a:tcPr marL="0" marR="76200" marT="50800" marB="50800" anchor="ctr">
+                  <a:tcPr marL="76200" marR="101600" marT="88900" marB="88900" anchor="ctr">
                     <a:lnL w="0" cap="flat" cmpd="sng" algn="ctr">
                       <a:noFill/>
                     </a:lnL>
@@ -9403,15 +9691,18 @@
                     <a:lnT w="0" cap="flat" cmpd="sng" algn="ctr">
                       <a:noFill/>
                     </a:lnT>
-                    <a:lnB w="9525" cap="flat" cmpd="sng" algn="ctr">
+                    <a:lnB w="12700" cap="flat" cmpd="sng" algn="ctr">
                       <a:solidFill>
-                        <a:srgbClr val="D9D9D9"/>
+                        <a:srgbClr val="1F4E79"/>
                       </a:solidFill>
                       <a:prstDash val="solid"/>
                       <a:round/>
                       <a:headEnd type="none" w="med" len="med"/>
                       <a:tailEnd type="none" w="med" len="med"/>
                     </a:lnB>
+                    <a:solidFill>
+                      <a:srgbClr val="F2F2F2"/>
+                    </a:solidFill>
                   </a:tcPr>
                 </a:tc>
                 <a:tc>
@@ -9423,9 +9714,9 @@
                         <a:buNone/>
                       </a:pPr>
                       <a:r>
-                        <a:rPr lang="en-US" sz="1400" dirty="0">
+                        <a:rPr lang="en-US" sz="1400" b="1" dirty="0">
                           <a:solidFill>
-                            <a:srgbClr val="6E6E6E"/>
+                            <a:srgbClr val="1F4E79"/>
                           </a:solidFill>
                           <a:latin typeface="Arial" pitchFamily="34" charset="0"/>
                           <a:ea typeface="Arial" pitchFamily="34" charset="-122"/>
@@ -9440,7 +9731,7 @@
                       </a:endParaRPr>
                     </a:p>
                   </a:txBody>
-                  <a:tcPr marL="0" marR="76200" marT="50800" marB="50800" anchor="ctr">
+                  <a:tcPr marL="76200" marR="101600" marT="88900" marB="88900" anchor="ctr">
                     <a:lnL w="0" cap="flat" cmpd="sng" algn="ctr">
                       <a:noFill/>
                     </a:lnL>
@@ -9450,15 +9741,18 @@
                     <a:lnT w="0" cap="flat" cmpd="sng" algn="ctr">
                       <a:noFill/>
                     </a:lnT>
-                    <a:lnB w="9525" cap="flat" cmpd="sng" algn="ctr">
+                    <a:lnB w="12700" cap="flat" cmpd="sng" algn="ctr">
                       <a:solidFill>
-                        <a:srgbClr val="D9D9D9"/>
+                        <a:srgbClr val="1F4E79"/>
                       </a:solidFill>
                       <a:prstDash val="solid"/>
                       <a:round/>
                       <a:headEnd type="none" w="med" len="med"/>
                       <a:tailEnd type="none" w="med" len="med"/>
                     </a:lnB>
+                    <a:solidFill>
+                      <a:srgbClr val="F2F2F2"/>
+                    </a:solidFill>
                   </a:tcPr>
                 </a:tc>
               </a:tr>
@@ -9472,7 +9766,7 @@
                         <a:buNone/>
                       </a:pPr>
                       <a:r>
-                        <a:rPr lang="en-US" sz="1700" b="1" dirty="0">
+                        <a:rPr lang="en-US" sz="1600" b="1" dirty="0">
                           <a:solidFill>
                             <a:srgbClr val="1F4E79"/>
                           </a:solidFill>
@@ -9482,14 +9776,14 @@
                         </a:rPr>
                         <a:t>現在から予測先までの油温差を予測</a:t>
                       </a:r>
-                      <a:endParaRPr lang="en-US" sz="1700" dirty="0">
+                      <a:endParaRPr lang="en-US" sz="1600" dirty="0">
                         <a:latin typeface="Arial" charset="0"/>
                         <a:ea typeface="Arial" charset="0"/>
                         <a:cs typeface="Arial" charset="0"/>
                       </a:endParaRPr>
                     </a:p>
                   </a:txBody>
-                  <a:tcPr marL="0" marR="76200" marT="50800" marB="50800" anchor="ctr">
+                  <a:tcPr marL="76200" marR="101600" marT="88900" marB="88900" anchor="ctr">
                     <a:lnL w="0" cap="flat" cmpd="sng" algn="ctr">
                       <a:noFill/>
                     </a:lnL>
@@ -9499,7 +9793,7 @@
                     <a:lnT w="0" cap="flat" cmpd="sng" algn="ctr">
                       <a:noFill/>
                     </a:lnT>
-                    <a:lnB w="9525" cap="flat" cmpd="sng" algn="ctr">
+                    <a:lnB w="6350" cap="flat" cmpd="sng" algn="ctr">
                       <a:solidFill>
                         <a:srgbClr val="D9D9D9"/>
                       </a:solidFill>
@@ -9508,6 +9802,9 @@
                       <a:headEnd type="none" w="med" len="med"/>
                       <a:tailEnd type="none" w="med" len="med"/>
                     </a:lnB>
+                    <a:solidFill>
+                      <a:srgbClr val="FFFFFF"/>
+                    </a:solidFill>
                   </a:tcPr>
                 </a:tc>
                 <a:tc>
@@ -9519,7 +9816,7 @@
                         <a:buNone/>
                       </a:pPr>
                       <a:r>
-                        <a:rPr lang="en-US" sz="1700" dirty="0">
+                        <a:rPr lang="en-US" sz="1600" dirty="0">
                           <a:solidFill>
                             <a:srgbClr val="3A3A3A"/>
                           </a:solidFill>
@@ -9529,14 +9826,14 @@
                         </a:rPr>
                         <a:t>油温の直接予測より検証誤差が小さい</a:t>
                       </a:r>
-                      <a:endParaRPr lang="en-US" sz="1700" dirty="0">
+                      <a:endParaRPr lang="en-US" sz="1600" dirty="0">
                         <a:latin typeface="Arial" charset="0"/>
                         <a:ea typeface="Arial" charset="0"/>
                         <a:cs typeface="Arial" charset="0"/>
                       </a:endParaRPr>
                     </a:p>
                   </a:txBody>
-                  <a:tcPr marL="0" marR="76200" marT="50800" marB="50800" anchor="ctr">
+                  <a:tcPr marL="76200" marR="101600" marT="88900" marB="88900" anchor="ctr">
                     <a:lnL w="0" cap="flat" cmpd="sng" algn="ctr">
                       <a:noFill/>
                     </a:lnL>
@@ -9546,7 +9843,7 @@
                     <a:lnT w="0" cap="flat" cmpd="sng" algn="ctr">
                       <a:noFill/>
                     </a:lnT>
-                    <a:lnB w="9525" cap="flat" cmpd="sng" algn="ctr">
+                    <a:lnB w="6350" cap="flat" cmpd="sng" algn="ctr">
                       <a:solidFill>
                         <a:srgbClr val="D9D9D9"/>
                       </a:solidFill>
@@ -9555,6 +9852,9 @@
                       <a:headEnd type="none" w="med" len="med"/>
                       <a:tailEnd type="none" w="med" len="med"/>
                     </a:lnB>
+                    <a:solidFill>
+                      <a:srgbClr val="FFFFFF"/>
+                    </a:solidFill>
                   </a:tcPr>
                 </a:tc>
               </a:tr>
@@ -9568,7 +9868,7 @@
                         <a:buNone/>
                       </a:pPr>
                       <a:r>
-                        <a:rPr lang="en-US" sz="1700" b="1" dirty="0">
+                        <a:rPr lang="en-US" sz="1600" b="1" dirty="0">
                           <a:solidFill>
                             <a:srgbClr val="1F4E79"/>
                           </a:solidFill>
@@ -9578,14 +9878,14 @@
                         </a:rPr>
                         <a:t>1・6・24時間先で別々のモデル</a:t>
                       </a:r>
-                      <a:endParaRPr lang="en-US" sz="1700" dirty="0">
+                      <a:endParaRPr lang="en-US" sz="1600" dirty="0">
                         <a:latin typeface="Arial" charset="0"/>
                         <a:ea typeface="Arial" charset="0"/>
                         <a:cs typeface="Arial" charset="0"/>
                       </a:endParaRPr>
                     </a:p>
                   </a:txBody>
-                  <a:tcPr marL="0" marR="76200" marT="50800" marB="50800" anchor="ctr">
+                  <a:tcPr marL="76200" marR="101600" marT="88900" marB="88900" anchor="ctr">
                     <a:lnL w="0" cap="flat" cmpd="sng" algn="ctr">
                       <a:noFill/>
                     </a:lnL>
@@ -9595,7 +9895,7 @@
                     <a:lnT w="0" cap="flat" cmpd="sng" algn="ctr">
                       <a:noFill/>
                     </a:lnT>
-                    <a:lnB w="9525" cap="flat" cmpd="sng" algn="ctr">
+                    <a:lnB w="6350" cap="flat" cmpd="sng" algn="ctr">
                       <a:solidFill>
                         <a:srgbClr val="D9D9D9"/>
                       </a:solidFill>
@@ -9604,6 +9904,9 @@
                       <a:headEnd type="none" w="med" len="med"/>
                       <a:tailEnd type="none" w="med" len="med"/>
                     </a:lnB>
+                    <a:solidFill>
+                      <a:srgbClr val="FFFFFF"/>
+                    </a:solidFill>
                   </a:tcPr>
                 </a:tc>
                 <a:tc>
@@ -9615,7 +9918,7 @@
                         <a:buNone/>
                       </a:pPr>
                       <a:r>
-                        <a:rPr lang="en-US" sz="1700" dirty="0">
+                        <a:rPr lang="en-US" sz="1600" dirty="0">
                           <a:solidFill>
                             <a:srgbClr val="3A3A3A"/>
                           </a:solidFill>
@@ -9623,16 +9926,37 @@
                           <a:ea typeface="Arial" pitchFamily="34" charset="-122"/>
                           <a:cs typeface="Arial" pitchFamily="34" charset="-120"/>
                         </a:rPr>
-                        <a:t>予測値の再入力による誤差の蓄積を避ける</a:t>
+                        <a:t>予測値の再入力による</a:t>
                       </a:r>
-                      <a:endParaRPr lang="en-US" sz="1700" dirty="0">
+                      <a:endParaRPr lang="en-US" sz="1600" dirty="0">
+                        <a:latin typeface="Arial" charset="0"/>
+                        <a:ea typeface="Arial" charset="0"/>
+                        <a:cs typeface="Arial" charset="0"/>
+                      </a:endParaRPr>
+                    </a:p>
+                    <a:p>
+                      <a:pPr algn="l" indent="0" marL="0">
+                        <a:buNone/>
+                      </a:pPr>
+                      <a:r>
+                        <a:rPr lang="en-US" sz="1600" dirty="0">
+                          <a:solidFill>
+                            <a:srgbClr val="3A3A3A"/>
+                          </a:solidFill>
+                          <a:latin typeface="Arial" pitchFamily="34" charset="0"/>
+                          <a:ea typeface="Arial" pitchFamily="34" charset="-122"/>
+                          <a:cs typeface="Arial" pitchFamily="34" charset="-120"/>
+                        </a:rPr>
+                        <a:t>誤差の蓄積を避ける</a:t>
+                      </a:r>
+                      <a:endParaRPr lang="en-US" sz="1600" dirty="0">
                         <a:latin typeface="Arial" charset="0"/>
                         <a:ea typeface="Arial" charset="0"/>
                         <a:cs typeface="Arial" charset="0"/>
                       </a:endParaRPr>
                     </a:p>
                   </a:txBody>
-                  <a:tcPr marL="0" marR="76200" marT="50800" marB="50800" anchor="ctr">
+                  <a:tcPr marL="76200" marR="101600" marT="88900" marB="88900" anchor="ctr">
                     <a:lnL w="0" cap="flat" cmpd="sng" algn="ctr">
                       <a:noFill/>
                     </a:lnL>
@@ -9642,7 +9966,7 @@
                     <a:lnT w="0" cap="flat" cmpd="sng" algn="ctr">
                       <a:noFill/>
                     </a:lnT>
-                    <a:lnB w="9525" cap="flat" cmpd="sng" algn="ctr">
+                    <a:lnB w="6350" cap="flat" cmpd="sng" algn="ctr">
                       <a:solidFill>
                         <a:srgbClr val="D9D9D9"/>
                       </a:solidFill>
@@ -9651,6 +9975,9 @@
                       <a:headEnd type="none" w="med" len="med"/>
                       <a:tailEnd type="none" w="med" len="med"/>
                     </a:lnB>
+                    <a:solidFill>
+                      <a:srgbClr val="FFFFFF"/>
+                    </a:solidFill>
                   </a:tcPr>
                 </a:tc>
               </a:tr>
@@ -9664,7 +9991,7 @@
                         <a:buNone/>
                       </a:pPr>
                       <a:r>
-                        <a:rPr lang="en-US" sz="1700" b="1" dirty="0">
+                        <a:rPr lang="en-US" sz="1600" b="1" dirty="0">
                           <a:solidFill>
                             <a:srgbClr val="1F4E79"/>
                           </a:solidFill>
@@ -9674,14 +10001,14 @@
                         </a:rPr>
                         <a:t>絶対誤差で学習</a:t>
                       </a:r>
-                      <a:endParaRPr lang="en-US" sz="1700" dirty="0">
+                      <a:endParaRPr lang="en-US" sz="1600" dirty="0">
                         <a:latin typeface="Arial" charset="0"/>
                         <a:ea typeface="Arial" charset="0"/>
                         <a:cs typeface="Arial" charset="0"/>
                       </a:endParaRPr>
                     </a:p>
                   </a:txBody>
-                  <a:tcPr marL="0" marR="76200" marT="50800" marB="50800" anchor="ctr">
+                  <a:tcPr marL="76200" marR="101600" marT="88900" marB="88900" anchor="ctr">
                     <a:lnL w="0" cap="flat" cmpd="sng" algn="ctr">
                       <a:noFill/>
                     </a:lnL>
@@ -9691,7 +10018,7 @@
                     <a:lnT w="0" cap="flat" cmpd="sng" algn="ctr">
                       <a:noFill/>
                     </a:lnT>
-                    <a:lnB w="9525" cap="flat" cmpd="sng" algn="ctr">
+                    <a:lnB w="6350" cap="flat" cmpd="sng" algn="ctr">
                       <a:solidFill>
                         <a:srgbClr val="D9D9D9"/>
                       </a:solidFill>
@@ -9700,6 +10027,9 @@
                       <a:headEnd type="none" w="med" len="med"/>
                       <a:tailEnd type="none" w="med" len="med"/>
                     </a:lnB>
+                    <a:solidFill>
+                      <a:srgbClr val="FFFFFF"/>
+                    </a:solidFill>
                   </a:tcPr>
                 </a:tc>
                 <a:tc>
@@ -9711,7 +10041,7 @@
                         <a:buNone/>
                       </a:pPr>
                       <a:r>
-                        <a:rPr lang="en-US" sz="1700" dirty="0">
+                        <a:rPr lang="en-US" sz="1600" dirty="0">
                           <a:solidFill>
                             <a:srgbClr val="3A3A3A"/>
                           </a:solidFill>
@@ -9721,14 +10051,14 @@
                         </a:rPr>
                         <a:t>評価指標のMAEに合わせる</a:t>
                       </a:r>
-                      <a:endParaRPr lang="en-US" sz="1700" dirty="0">
+                      <a:endParaRPr lang="en-US" sz="1600" dirty="0">
                         <a:latin typeface="Arial" charset="0"/>
                         <a:ea typeface="Arial" charset="0"/>
                         <a:cs typeface="Arial" charset="0"/>
                       </a:endParaRPr>
                     </a:p>
                   </a:txBody>
-                  <a:tcPr marL="0" marR="76200" marT="50800" marB="50800" anchor="ctr">
+                  <a:tcPr marL="76200" marR="101600" marT="88900" marB="88900" anchor="ctr">
                     <a:lnL w="0" cap="flat" cmpd="sng" algn="ctr">
                       <a:noFill/>
                     </a:lnL>
@@ -9738,7 +10068,7 @@
                     <a:lnT w="0" cap="flat" cmpd="sng" algn="ctr">
                       <a:noFill/>
                     </a:lnT>
-                    <a:lnB w="9525" cap="flat" cmpd="sng" algn="ctr">
+                    <a:lnB w="6350" cap="flat" cmpd="sng" algn="ctr">
                       <a:solidFill>
                         <a:srgbClr val="D9D9D9"/>
                       </a:solidFill>
@@ -9747,6 +10077,9 @@
                       <a:headEnd type="none" w="med" len="med"/>
                       <a:tailEnd type="none" w="med" len="med"/>
                     </a:lnB>
+                    <a:solidFill>
+                      <a:srgbClr val="FFFFFF"/>
+                    </a:solidFill>
                   </a:tcPr>
                 </a:tc>
               </a:tr>
@@ -9760,7 +10093,7 @@
                         <a:buNone/>
                       </a:pPr>
                       <a:r>
-                        <a:rPr lang="en-US" sz="1700" b="1" dirty="0">
+                        <a:rPr lang="en-US" sz="1600" b="1" dirty="0">
                           <a:solidFill>
                             <a:srgbClr val="1F4E79"/>
                           </a:solidFill>
@@ -9770,14 +10103,14 @@
                         </a:rPr>
                         <a:t>特徴量と閾値はテスト前に固定</a:t>
                       </a:r>
-                      <a:endParaRPr lang="en-US" sz="1700" dirty="0">
+                      <a:endParaRPr lang="en-US" sz="1600" dirty="0">
                         <a:latin typeface="Arial" charset="0"/>
                         <a:ea typeface="Arial" charset="0"/>
                         <a:cs typeface="Arial" charset="0"/>
                       </a:endParaRPr>
                     </a:p>
                   </a:txBody>
-                  <a:tcPr marL="0" marR="76200" marT="50800" marB="50800" anchor="ctr">
+                  <a:tcPr marL="76200" marR="101600" marT="88900" marB="88900" anchor="ctr">
                     <a:lnL w="0" cap="flat" cmpd="sng" algn="ctr">
                       <a:noFill/>
                     </a:lnL>
@@ -9787,7 +10120,7 @@
                     <a:lnT w="0" cap="flat" cmpd="sng" algn="ctr">
                       <a:noFill/>
                     </a:lnT>
-                    <a:lnB w="9525" cap="flat" cmpd="sng" algn="ctr">
+                    <a:lnB w="6350" cap="flat" cmpd="sng" algn="ctr">
                       <a:solidFill>
                         <a:srgbClr val="D9D9D9"/>
                       </a:solidFill>
@@ -9796,6 +10129,9 @@
                       <a:headEnd type="none" w="med" len="med"/>
                       <a:tailEnd type="none" w="med" len="med"/>
                     </a:lnB>
+                    <a:solidFill>
+                      <a:srgbClr val="FFFFFF"/>
+                    </a:solidFill>
                   </a:tcPr>
                 </a:tc>
                 <a:tc>
@@ -9807,7 +10143,7 @@
                         <a:buNone/>
                       </a:pPr>
                       <a:r>
-                        <a:rPr lang="en-US" sz="1700" dirty="0">
+                        <a:rPr lang="en-US" sz="1600" dirty="0">
                           <a:solidFill>
                             <a:srgbClr val="3A3A3A"/>
                           </a:solidFill>
@@ -9817,14 +10153,14 @@
                         </a:rPr>
                         <a:t>テスト結果を見た選び直しを防ぐ</a:t>
                       </a:r>
-                      <a:endParaRPr lang="en-US" sz="1700" dirty="0">
+                      <a:endParaRPr lang="en-US" sz="1600" dirty="0">
                         <a:latin typeface="Arial" charset="0"/>
                         <a:ea typeface="Arial" charset="0"/>
                         <a:cs typeface="Arial" charset="0"/>
                       </a:endParaRPr>
                     </a:p>
                   </a:txBody>
-                  <a:tcPr marL="0" marR="76200" marT="50800" marB="50800" anchor="ctr">
+                  <a:tcPr marL="76200" marR="101600" marT="88900" marB="88900" anchor="ctr">
                     <a:lnL w="0" cap="flat" cmpd="sng" algn="ctr">
                       <a:noFill/>
                     </a:lnL>
@@ -9834,7 +10170,7 @@
                     <a:lnT w="0" cap="flat" cmpd="sng" algn="ctr">
                       <a:noFill/>
                     </a:lnT>
-                    <a:lnB w="9525" cap="flat" cmpd="sng" algn="ctr">
+                    <a:lnB w="6350" cap="flat" cmpd="sng" algn="ctr">
                       <a:solidFill>
                         <a:srgbClr val="D9D9D9"/>
                       </a:solidFill>
@@ -9843,6 +10179,9 @@
                       <a:headEnd type="none" w="med" len="med"/>
                       <a:tailEnd type="none" w="med" len="med"/>
                     </a:lnB>
+                    <a:solidFill>
+                      <a:srgbClr val="FFFFFF"/>
+                    </a:solidFill>
                   </a:tcPr>
                 </a:tc>
               </a:tr>
@@ -9850,6 +10189,29 @@
           </a:graphicData>
         </a:graphic>
       </p:graphicFrame>
+      <p:sp>
+        <p:nvSpPr>
+          <p:cNvPr id="5" name="Shape 2"/>
+          <p:cNvSpPr/>
+          <p:nvPr/>
+        </p:nvSpPr>
+        <p:spPr>
+          <a:xfrm>
+            <a:off x="457200" y="1371600"/>
+            <a:ext cx="8229600" cy="0"/>
+          </a:xfrm>
+          <a:prstGeom prst="line">
+            <a:avLst/>
+          </a:prstGeom>
+          <a:noFill/>
+          <a:ln w="12700">
+            <a:solidFill>
+              <a:srgbClr val="1F4E79"/>
+            </a:solidFill>
+            <a:prstDash val="solid"/>
+          </a:ln>
+        </p:spPr>
+      </p:sp>
     </p:spTree>
   </p:cSld>
   <p:clrMapOvr>
@@ -9929,7 +10291,7 @@
         </p:nvSpPr>
         <p:spPr>
           <a:xfrm>
-            <a:off x="457200" y="292608"/>
+            <a:off x="457200" y="310896"/>
             <a:ext cx="8229600" cy="868680"/>
           </a:xfrm>
           <a:prstGeom prst="rect">
@@ -9992,7 +10354,7 @@
         <p:spPr>
           <a:xfrm>
             <a:off x="457200" y="1417320"/>
-            <a:ext cx="7680960" cy="3017520"/>
+            <a:ext cx="7680960" cy="360680"/>
           </a:xfrm>
           <a:prstGeom prst="rect">
             <a:avLst/>
@@ -10004,20 +10366,16 @@
           <a:bodyPr wrap="square" lIns="0" tIns="0" rIns="0" bIns="0" rtlCol="0" anchor="t"/>
           <a:lstStyle/>
           <a:p>
-            <a:pPr marL="228600" indent="-228600">
+            <a:pPr algn="l" indent="0" marL="0">
               <a:lnSpc>
                 <a:spcPct val="108000"/>
               </a:lnSpc>
-              <a:spcAft>
-                <a:spcPts val="1200"/>
-              </a:spcAft>
-              <a:buSzPct val="100000"/>
-              <a:buChar char="•"/>
-            </a:pPr>
-            <a:r>
-              <a:rPr lang="en-US" sz="2000" dirty="0">
-                <a:solidFill>
-                  <a:srgbClr val="3A3A3A"/>
+              <a:buNone/>
+            </a:pPr>
+            <a:r>
+              <a:rPr lang="en-US" sz="2000" b="1" dirty="0">
+                <a:solidFill>
+                  <a:srgbClr val="1F4E79"/>
                 </a:solidFill>
                 <a:latin typeface="Arial" pitchFamily="34" charset="0"/>
                 <a:ea typeface="Arial" pitchFamily="34" charset="-122"/>
@@ -10027,16 +10385,57 @@
             </a:r>
             <a:endParaRPr lang="en-US" sz="2000" dirty="0"/>
           </a:p>
-          <a:p>
-            <a:pPr marL="228600" indent="-228600">
+        </p:txBody>
+      </p:sp>
+      <p:sp>
+        <p:nvSpPr>
+          <p:cNvPr id="5" name="Shape 3"/>
+          <p:cNvSpPr/>
+          <p:nvPr/>
+        </p:nvSpPr>
+        <p:spPr>
+          <a:xfrm>
+            <a:off x="457200" y="1890776"/>
+            <a:ext cx="7680960" cy="0"/>
+          </a:xfrm>
+          <a:prstGeom prst="line">
+            <a:avLst/>
+          </a:prstGeom>
+          <a:noFill/>
+          <a:ln w="6350">
+            <a:solidFill>
+              <a:srgbClr val="D9D9D9"/>
+            </a:solidFill>
+            <a:prstDash val="solid"/>
+          </a:ln>
+        </p:spPr>
+      </p:sp>
+      <p:sp>
+        <p:nvSpPr>
+          <p:cNvPr id="6" name="Text 4"/>
+          <p:cNvSpPr txBox="1"/>
+          <p:nvPr/>
+        </p:nvSpPr>
+        <p:spPr>
+          <a:xfrm>
+            <a:off x="457200" y="2003552"/>
+            <a:ext cx="7680960" cy="360680"/>
+          </a:xfrm>
+          <a:prstGeom prst="rect">
+            <a:avLst/>
+          </a:prstGeom>
+          <a:noFill/>
+          <a:ln/>
+        </p:spPr>
+        <p:txBody>
+          <a:bodyPr wrap="square" lIns="0" tIns="0" rIns="0" bIns="0" rtlCol="0" anchor="t"/>
+          <a:lstStyle/>
+          <a:p>
+            <a:pPr algn="l" indent="0" marL="0">
               <a:lnSpc>
                 <a:spcPct val="108000"/>
               </a:lnSpc>
-              <a:spcAft>
-                <a:spcPts val="1200"/>
-              </a:spcAft>
-              <a:buSzPct val="100000"/>
-              <a:buChar char="•"/>
+              <a:buNone/>
             </a:pPr>
             <a:r>
               <a:rPr lang="en-US" sz="2000" dirty="0">
@@ -10051,16 +10450,57 @@
             </a:r>
             <a:endParaRPr lang="en-US" sz="2000" dirty="0"/>
           </a:p>
-          <a:p>
-            <a:pPr marL="228600" indent="-228600">
+        </p:txBody>
+      </p:sp>
+      <p:sp>
+        <p:nvSpPr>
+          <p:cNvPr id="7" name="Shape 5"/>
+          <p:cNvSpPr/>
+          <p:nvPr/>
+        </p:nvSpPr>
+        <p:spPr>
+          <a:xfrm>
+            <a:off x="457200" y="2477008"/>
+            <a:ext cx="7680960" cy="0"/>
+          </a:xfrm>
+          <a:prstGeom prst="line">
+            <a:avLst/>
+          </a:prstGeom>
+          <a:noFill/>
+          <a:ln w="6350">
+            <a:solidFill>
+              <a:srgbClr val="D9D9D9"/>
+            </a:solidFill>
+            <a:prstDash val="solid"/>
+          </a:ln>
+        </p:spPr>
+      </p:sp>
+      <p:sp>
+        <p:nvSpPr>
+          <p:cNvPr id="8" name="Text 6"/>
+          <p:cNvSpPr txBox="1"/>
+          <p:nvPr/>
+        </p:nvSpPr>
+        <p:spPr>
+          <a:xfrm>
+            <a:off x="457200" y="2589784"/>
+            <a:ext cx="7680960" cy="360680"/>
+          </a:xfrm>
+          <a:prstGeom prst="rect">
+            <a:avLst/>
+          </a:prstGeom>
+          <a:noFill/>
+          <a:ln/>
+        </p:spPr>
+        <p:txBody>
+          <a:bodyPr wrap="square" lIns="0" tIns="0" rIns="0" bIns="0" rtlCol="0" anchor="t"/>
+          <a:lstStyle/>
+          <a:p>
+            <a:pPr algn="l" indent="0" marL="0">
               <a:lnSpc>
                 <a:spcPct val="108000"/>
               </a:lnSpc>
-              <a:spcAft>
-                <a:spcPts val="1200"/>
-              </a:spcAft>
-              <a:buSzPct val="100000"/>
-              <a:buChar char="•"/>
+              <a:buNone/>
             </a:pPr>
             <a:r>
               <a:rPr lang="en-US" sz="2000" dirty="0">
@@ -10075,16 +10515,57 @@
             </a:r>
             <a:endParaRPr lang="en-US" sz="2000" dirty="0"/>
           </a:p>
-          <a:p>
-            <a:pPr marL="228600" indent="-228600">
+        </p:txBody>
+      </p:sp>
+      <p:sp>
+        <p:nvSpPr>
+          <p:cNvPr id="9" name="Shape 7"/>
+          <p:cNvSpPr/>
+          <p:nvPr/>
+        </p:nvSpPr>
+        <p:spPr>
+          <a:xfrm>
+            <a:off x="457200" y="3063240"/>
+            <a:ext cx="7680960" cy="0"/>
+          </a:xfrm>
+          <a:prstGeom prst="line">
+            <a:avLst/>
+          </a:prstGeom>
+          <a:noFill/>
+          <a:ln w="6350">
+            <a:solidFill>
+              <a:srgbClr val="D9D9D9"/>
+            </a:solidFill>
+            <a:prstDash val="solid"/>
+          </a:ln>
+        </p:spPr>
+      </p:sp>
+      <p:sp>
+        <p:nvSpPr>
+          <p:cNvPr id="10" name="Text 8"/>
+          <p:cNvSpPr txBox="1"/>
+          <p:nvPr/>
+        </p:nvSpPr>
+        <p:spPr>
+          <a:xfrm>
+            <a:off x="457200" y="3176016"/>
+            <a:ext cx="7680960" cy="360680"/>
+          </a:xfrm>
+          <a:prstGeom prst="rect">
+            <a:avLst/>
+          </a:prstGeom>
+          <a:noFill/>
+          <a:ln/>
+        </p:spPr>
+        <p:txBody>
+          <a:bodyPr wrap="square" lIns="0" tIns="0" rIns="0" bIns="0" rtlCol="0" anchor="t"/>
+          <a:lstStyle/>
+          <a:p>
+            <a:pPr algn="l" indent="0" marL="0">
               <a:lnSpc>
                 <a:spcPct val="108000"/>
               </a:lnSpc>
-              <a:spcAft>
-                <a:spcPts val="1200"/>
-              </a:spcAft>
-              <a:buSzPct val="100000"/>
-              <a:buChar char="•"/>
+              <a:buNone/>
             </a:pPr>
             <a:r>
               <a:rPr lang="en-US" sz="2000" dirty="0">
@@ -10099,16 +10580,57 @@
             </a:r>
             <a:endParaRPr lang="en-US" sz="2000" dirty="0"/>
           </a:p>
-          <a:p>
-            <a:pPr marL="228600" indent="-228600">
+        </p:txBody>
+      </p:sp>
+      <p:sp>
+        <p:nvSpPr>
+          <p:cNvPr id="11" name="Shape 9"/>
+          <p:cNvSpPr/>
+          <p:nvPr/>
+        </p:nvSpPr>
+        <p:spPr>
+          <a:xfrm>
+            <a:off x="457200" y="3649472"/>
+            <a:ext cx="7680960" cy="0"/>
+          </a:xfrm>
+          <a:prstGeom prst="line">
+            <a:avLst/>
+          </a:prstGeom>
+          <a:noFill/>
+          <a:ln w="6350">
+            <a:solidFill>
+              <a:srgbClr val="D9D9D9"/>
+            </a:solidFill>
+            <a:prstDash val="solid"/>
+          </a:ln>
+        </p:spPr>
+      </p:sp>
+      <p:sp>
+        <p:nvSpPr>
+          <p:cNvPr id="12" name="Text 10"/>
+          <p:cNvSpPr txBox="1"/>
+          <p:nvPr/>
+        </p:nvSpPr>
+        <p:spPr>
+          <a:xfrm>
+            <a:off x="457200" y="3762248"/>
+            <a:ext cx="7680960" cy="360680"/>
+          </a:xfrm>
+          <a:prstGeom prst="rect">
+            <a:avLst/>
+          </a:prstGeom>
+          <a:noFill/>
+          <a:ln/>
+        </p:spPr>
+        <p:txBody>
+          <a:bodyPr wrap="square" lIns="0" tIns="0" rIns="0" bIns="0" rtlCol="0" anchor="t"/>
+          <a:lstStyle/>
+          <a:p>
+            <a:pPr algn="l" indent="0" marL="0">
               <a:lnSpc>
                 <a:spcPct val="108000"/>
               </a:lnSpc>
-              <a:spcAft>
-                <a:spcPts val="1200"/>
-              </a:spcAft>
-              <a:buSzPct val="100000"/>
-              <a:buChar char="•"/>
+              <a:buNone/>
             </a:pPr>
             <a:r>
               <a:rPr lang="en-US" sz="2000" dirty="0">
@@ -10184,7 +10706,7 @@
             <a:r>
               <a:rPr lang="en-US" sz="1000" dirty="0">
                 <a:solidFill>
-                  <a:srgbClr val="C9D8EA"/>
+                  <a:srgbClr val="D9D9D9"/>
                 </a:solidFill>
                 <a:latin typeface="Arial" pitchFamily="34" charset="0"/>
                 <a:ea typeface="Arial" pitchFamily="34" charset="-122"/>
@@ -10204,7 +10726,7 @@
         </p:nvSpPr>
         <p:spPr>
           <a:xfrm>
-            <a:off x="457200" y="292608"/>
+            <a:off x="457200" y="310896"/>
             <a:ext cx="8229600" cy="868680"/>
           </a:xfrm>
           <a:prstGeom prst="rect">
@@ -10266,8 +10788,8 @@
         </p:nvSpPr>
         <p:spPr>
           <a:xfrm>
-            <a:off x="457200" y="1371600"/>
-            <a:ext cx="8229600" cy="1188720"/>
+            <a:off x="457200" y="1508760"/>
+            <a:ext cx="8229600" cy="685800"/>
           </a:xfrm>
           <a:prstGeom prst="rect">
             <a:avLst/>
@@ -10279,18 +10801,14 @@
           <a:bodyPr wrap="square" lIns="0" tIns="0" rIns="0" bIns="0" rtlCol="0" anchor="t"/>
           <a:lstStyle/>
           <a:p>
-            <a:pPr marL="203200" indent="-203200">
+            <a:pPr algn="l" indent="0" marL="0">
               <a:lnSpc>
                 <a:spcPct val="108000"/>
               </a:lnSpc>
-              <a:spcAft>
-                <a:spcPts val="1200"/>
-              </a:spcAft>
-              <a:buSzPct val="100000"/>
-              <a:buChar char="•"/>
-            </a:pPr>
-            <a:r>
-              <a:rPr lang="en-US" sz="1800" dirty="0">
+              <a:buNone/>
+            </a:pPr>
+            <a:r>
+              <a:rPr lang="en-US" sz="2200" b="1" dirty="0">
                 <a:solidFill>
                   <a:srgbClr val="FFFFFF"/>
                 </a:solidFill>
@@ -10298,23 +10816,19 @@
                 <a:ea typeface="Arial" pitchFamily="34" charset="-122"/>
                 <a:cs typeface="Arial" pitchFamily="34" charset="-120"/>
               </a:rPr>
-              <a:t>設備2は6時間先の誤差を18%減らし、高温13区間中10区間を事前に検知</a:t>
-            </a:r>
-            <a:endParaRPr lang="en-US" sz="1800" dirty="0"/>
-          </a:p>
-          <a:p>
-            <a:pPr marL="203200" indent="-203200">
+              <a:t>設備2は6時間先の誤差を18%減らし、</a:t>
+            </a:r>
+            <a:endParaRPr lang="en-US" sz="2200" dirty="0"/>
+          </a:p>
+          <a:p>
+            <a:pPr algn="l" indent="0" marL="0">
               <a:lnSpc>
                 <a:spcPct val="108000"/>
               </a:lnSpc>
-              <a:spcAft>
-                <a:spcPts val="1200"/>
-              </a:spcAft>
-              <a:buSzPct val="100000"/>
-              <a:buChar char="•"/>
-            </a:pPr>
-            <a:r>
-              <a:rPr lang="en-US" sz="1800" dirty="0">
+              <a:buNone/>
+            </a:pPr>
+            <a:r>
+              <a:rPr lang="en-US" sz="2200" b="1" dirty="0">
                 <a:solidFill>
                   <a:srgbClr val="FFFFFF"/>
                 </a:solidFill>
@@ -10322,9 +10836,9 @@
                 <a:ea typeface="Arial" pitchFamily="34" charset="-122"/>
                 <a:cs typeface="Arial" pitchFamily="34" charset="-120"/>
               </a:rPr>
-              <a:t>保全効果と、評価していない設備での有効性は未検証</a:t>
-            </a:r>
-            <a:endParaRPr lang="en-US" sz="1800" dirty="0"/>
+              <a:t>高温13区間中10区間を事前に検知</a:t>
+            </a:r>
+            <a:endParaRPr lang="en-US" sz="2200" dirty="0"/>
           </a:p>
         </p:txBody>
       </p:sp>
@@ -10336,8 +10850,8 @@
         </p:nvSpPr>
         <p:spPr>
           <a:xfrm>
-            <a:off x="457200" y="2743200"/>
-            <a:ext cx="8229600" cy="640080"/>
+            <a:off x="457200" y="2331720"/>
+            <a:ext cx="8229600" cy="347472"/>
           </a:xfrm>
           <a:prstGeom prst="rect">
             <a:avLst/>
@@ -10356,18 +10870,63 @@
               <a:buNone/>
             </a:pPr>
             <a:r>
-              <a:rPr lang="en-US" sz="1600" dirty="0">
-                <a:solidFill>
-                  <a:srgbClr val="C9D8EA"/>
-                </a:solidFill>
-                <a:latin typeface="Arial" pitchFamily="34" charset="0"/>
-                <a:ea typeface="Arial" pitchFamily="34" charset="-122"/>
-                <a:cs typeface="Arial" pitchFamily="34" charset="-120"/>
-              </a:rPr>
-              <a:t>試行では、通知候補の数・先行時間・見逃しを記録する</a:t>
-            </a:r>
-            <a:endParaRPr lang="en-US" sz="1600" dirty="0"/>
-          </a:p>
+              <a:rPr lang="en-US" sz="1800" dirty="0">
+                <a:solidFill>
+                  <a:srgbClr val="D9D9D9"/>
+                </a:solidFill>
+                <a:latin typeface="Arial" pitchFamily="34" charset="0"/>
+                <a:ea typeface="Arial" pitchFamily="34" charset="-122"/>
+                <a:cs typeface="Arial" pitchFamily="34" charset="-120"/>
+              </a:rPr>
+              <a:t>保全効果と、評価していない設備での有効性は未検証</a:t>
+            </a:r>
+            <a:endParaRPr lang="en-US" sz="1800" dirty="0"/>
+          </a:p>
+        </p:txBody>
+      </p:sp>
+      <p:sp>
+        <p:nvSpPr>
+          <p:cNvPr id="6" name="Shape 4"/>
+          <p:cNvSpPr/>
+          <p:nvPr/>
+        </p:nvSpPr>
+        <p:spPr>
+          <a:xfrm>
+            <a:off x="457200" y="2852928"/>
+            <a:ext cx="8229600" cy="0"/>
+          </a:xfrm>
+          <a:prstGeom prst="line">
+            <a:avLst/>
+          </a:prstGeom>
+          <a:noFill/>
+          <a:ln w="9525">
+            <a:solidFill>
+              <a:srgbClr val="D9D9D9"/>
+            </a:solidFill>
+            <a:prstDash val="solid"/>
+          </a:ln>
+        </p:spPr>
+      </p:sp>
+      <p:sp>
+        <p:nvSpPr>
+          <p:cNvPr id="7" name="Text 5"/>
+          <p:cNvSpPr txBox="1"/>
+          <p:nvPr/>
+        </p:nvSpPr>
+        <p:spPr>
+          <a:xfrm>
+            <a:off x="457200" y="3108960"/>
+            <a:ext cx="8229600" cy="685800"/>
+          </a:xfrm>
+          <a:prstGeom prst="rect">
+            <a:avLst/>
+          </a:prstGeom>
+          <a:noFill/>
+          <a:ln/>
+        </p:spPr>
+        <p:txBody>
+          <a:bodyPr wrap="square" lIns="0" tIns="0" rIns="0" bIns="0" rtlCol="0" anchor="t"/>
+          <a:lstStyle/>
           <a:p>
             <a:pPr algn="l" indent="0" marL="0">
               <a:lnSpc>
@@ -10376,9 +10935,29 @@
               <a:buNone/>
             </a:pPr>
             <a:r>
-              <a:rPr lang="en-US" sz="1600" dirty="0">
-                <a:solidFill>
-                  <a:srgbClr val="C9D8EA"/>
+              <a:rPr lang="en-US" sz="1800" dirty="0">
+                <a:solidFill>
+                  <a:srgbClr val="FFFFFF"/>
+                </a:solidFill>
+                <a:latin typeface="Arial" pitchFamily="34" charset="0"/>
+                <a:ea typeface="Arial" pitchFamily="34" charset="-122"/>
+                <a:cs typeface="Arial" pitchFamily="34" charset="-120"/>
+              </a:rPr>
+              <a:t>試行では、通知候補の数・先行時間・見逃しを記録する</a:t>
+            </a:r>
+            <a:endParaRPr lang="en-US" sz="1800" dirty="0"/>
+          </a:p>
+          <a:p>
+            <a:pPr algn="l" indent="0" marL="0">
+              <a:lnSpc>
+                <a:spcPct val="108000"/>
+              </a:lnSpc>
+              <a:buNone/>
+            </a:pPr>
+            <a:r>
+              <a:rPr lang="en-US" sz="1800" dirty="0">
+                <a:solidFill>
+                  <a:srgbClr val="FFFFFF"/>
                 </a:solidFill>
                 <a:latin typeface="Arial" pitchFamily="34" charset="0"/>
                 <a:ea typeface="Arial" pitchFamily="34" charset="-122"/>
@@ -10386,13 +10965,13 @@
               </a:rPr>
               <a:t>許容できる誤通知の数は、現場と決める</a:t>
             </a:r>
-            <a:endParaRPr lang="en-US" sz="1600" dirty="0"/>
+            <a:endParaRPr lang="en-US" sz="1800" dirty="0"/>
           </a:p>
         </p:txBody>
       </p:sp>
       <p:sp>
         <p:nvSpPr>
-          <p:cNvPr id="6" name="Text 4"/>
+          <p:cNvPr id="8" name="Text 6"/>
           <p:cNvSpPr txBox="1"/>
           <p:nvPr/>
         </p:nvSpPr>
@@ -10420,7 +10999,7 @@
             <a:r>
               <a:rPr lang="en-US" sz="1200" dirty="0">
                 <a:solidFill>
-                  <a:srgbClr val="C9D8EA"/>
+                  <a:srgbClr val="D9D9D9"/>
                 </a:solidFill>
                 <a:latin typeface="Arial" pitchFamily="34" charset="0"/>
                 <a:ea typeface="Arial" pitchFamily="34" charset="-122"/>
@@ -10511,7 +11090,7 @@
         </p:nvSpPr>
         <p:spPr>
           <a:xfrm>
-            <a:off x="457200" y="292608"/>
+            <a:off x="457200" y="310896"/>
             <a:ext cx="8229600" cy="868680"/>
           </a:xfrm>
           <a:prstGeom prst="rect">
@@ -10598,7 +11177,7 @@
                       </a:endParaRPr>
                     </a:p>
                   </a:txBody>
-                  <a:tcPr marL="0" marR="76200" marT="50800" marB="50800" anchor="ctr">
+                  <a:tcPr marL="76200" marR="101600" marT="88900" marB="88900" anchor="ctr">
                     <a:lnL w="0" cap="flat" cmpd="sng" algn="ctr">
                       <a:noFill/>
                     </a:lnL>
@@ -10608,7 +11187,7 @@
                     <a:lnT w="0" cap="flat" cmpd="sng" algn="ctr">
                       <a:noFill/>
                     </a:lnT>
-                    <a:lnB w="9525" cap="flat" cmpd="sng" algn="ctr">
+                    <a:lnB w="6350" cap="flat" cmpd="sng" algn="ctr">
                       <a:solidFill>
                         <a:srgbClr val="D9D9D9"/>
                       </a:solidFill>
@@ -10617,6 +11196,9 @@
                       <a:headEnd type="none" w="med" len="med"/>
                       <a:tailEnd type="none" w="med" len="med"/>
                     </a:lnB>
+                    <a:solidFill>
+                      <a:srgbClr val="FFFFFF"/>
+                    </a:solidFill>
                   </a:tcPr>
                 </a:tc>
                 <a:tc>
@@ -10645,7 +11227,7 @@
                       </a:endParaRPr>
                     </a:p>
                   </a:txBody>
-                  <a:tcPr marL="0" marR="76200" marT="50800" marB="50800" anchor="ctr">
+                  <a:tcPr marL="76200" marR="101600" marT="88900" marB="88900" anchor="ctr">
                     <a:lnL w="0" cap="flat" cmpd="sng" algn="ctr">
                       <a:noFill/>
                     </a:lnL>
@@ -10655,7 +11237,7 @@
                     <a:lnT w="0" cap="flat" cmpd="sng" algn="ctr">
                       <a:noFill/>
                     </a:lnT>
-                    <a:lnB w="9525" cap="flat" cmpd="sng" algn="ctr">
+                    <a:lnB w="6350" cap="flat" cmpd="sng" algn="ctr">
                       <a:solidFill>
                         <a:srgbClr val="D9D9D9"/>
                       </a:solidFill>
@@ -10664,6 +11246,9 @@
                       <a:headEnd type="none" w="med" len="med"/>
                       <a:tailEnd type="none" w="med" len="med"/>
                     </a:lnB>
+                    <a:solidFill>
+                      <a:srgbClr val="FFFFFF"/>
+                    </a:solidFill>
                   </a:tcPr>
                 </a:tc>
               </a:tr>
@@ -10694,7 +11279,7 @@
                       </a:endParaRPr>
                     </a:p>
                   </a:txBody>
-                  <a:tcPr marL="0" marR="76200" marT="50800" marB="50800" anchor="ctr">
+                  <a:tcPr marL="76200" marR="101600" marT="88900" marB="88900" anchor="ctr">
                     <a:lnL w="0" cap="flat" cmpd="sng" algn="ctr">
                       <a:noFill/>
                     </a:lnL>
@@ -10704,7 +11289,7 @@
                     <a:lnT w="0" cap="flat" cmpd="sng" algn="ctr">
                       <a:noFill/>
                     </a:lnT>
-                    <a:lnB w="9525" cap="flat" cmpd="sng" algn="ctr">
+                    <a:lnB w="6350" cap="flat" cmpd="sng" algn="ctr">
                       <a:solidFill>
                         <a:srgbClr val="D9D9D9"/>
                       </a:solidFill>
@@ -10713,6 +11298,9 @@
                       <a:headEnd type="none" w="med" len="med"/>
                       <a:tailEnd type="none" w="med" len="med"/>
                     </a:lnB>
+                    <a:solidFill>
+                      <a:srgbClr val="FFFFFF"/>
+                    </a:solidFill>
                   </a:tcPr>
                 </a:tc>
                 <a:tc>
@@ -10741,7 +11329,7 @@
                       </a:endParaRPr>
                     </a:p>
                   </a:txBody>
-                  <a:tcPr marL="0" marR="76200" marT="50800" marB="50800" anchor="ctr">
+                  <a:tcPr marL="76200" marR="101600" marT="88900" marB="88900" anchor="ctr">
                     <a:lnL w="0" cap="flat" cmpd="sng" algn="ctr">
                       <a:noFill/>
                     </a:lnL>
@@ -10751,7 +11339,7 @@
                     <a:lnT w="0" cap="flat" cmpd="sng" algn="ctr">
                       <a:noFill/>
                     </a:lnT>
-                    <a:lnB w="9525" cap="flat" cmpd="sng" algn="ctr">
+                    <a:lnB w="6350" cap="flat" cmpd="sng" algn="ctr">
                       <a:solidFill>
                         <a:srgbClr val="D9D9D9"/>
                       </a:solidFill>
@@ -10760,6 +11348,9 @@
                       <a:headEnd type="none" w="med" len="med"/>
                       <a:tailEnd type="none" w="med" len="med"/>
                     </a:lnB>
+                    <a:solidFill>
+                      <a:srgbClr val="FFFFFF"/>
+                    </a:solidFill>
                   </a:tcPr>
                 </a:tc>
               </a:tr>
@@ -10790,7 +11381,7 @@
                       </a:endParaRPr>
                     </a:p>
                   </a:txBody>
-                  <a:tcPr marL="0" marR="76200" marT="50800" marB="50800" anchor="ctr">
+                  <a:tcPr marL="76200" marR="101600" marT="88900" marB="88900" anchor="ctr">
                     <a:lnL w="0" cap="flat" cmpd="sng" algn="ctr">
                       <a:noFill/>
                     </a:lnL>
@@ -10800,7 +11391,7 @@
                     <a:lnT w="0" cap="flat" cmpd="sng" algn="ctr">
                       <a:noFill/>
                     </a:lnT>
-                    <a:lnB w="9525" cap="flat" cmpd="sng" algn="ctr">
+                    <a:lnB w="6350" cap="flat" cmpd="sng" algn="ctr">
                       <a:solidFill>
                         <a:srgbClr val="D9D9D9"/>
                       </a:solidFill>
@@ -10809,6 +11400,9 @@
                       <a:headEnd type="none" w="med" len="med"/>
                       <a:tailEnd type="none" w="med" len="med"/>
                     </a:lnB>
+                    <a:solidFill>
+                      <a:srgbClr val="FFFFFF"/>
+                    </a:solidFill>
                   </a:tcPr>
                 </a:tc>
                 <a:tc>
@@ -10837,7 +11431,7 @@
                       </a:endParaRPr>
                     </a:p>
                   </a:txBody>
-                  <a:tcPr marL="0" marR="76200" marT="50800" marB="50800" anchor="ctr">
+                  <a:tcPr marL="76200" marR="101600" marT="88900" marB="88900" anchor="ctr">
                     <a:lnL w="0" cap="flat" cmpd="sng" algn="ctr">
                       <a:noFill/>
                     </a:lnL>
@@ -10847,7 +11441,7 @@
                     <a:lnT w="0" cap="flat" cmpd="sng" algn="ctr">
                       <a:noFill/>
                     </a:lnT>
-                    <a:lnB w="9525" cap="flat" cmpd="sng" algn="ctr">
+                    <a:lnB w="6350" cap="flat" cmpd="sng" algn="ctr">
                       <a:solidFill>
                         <a:srgbClr val="D9D9D9"/>
                       </a:solidFill>
@@ -10856,6 +11450,9 @@
                       <a:headEnd type="none" w="med" len="med"/>
                       <a:tailEnd type="none" w="med" len="med"/>
                     </a:lnB>
+                    <a:solidFill>
+                      <a:srgbClr val="FFFFFF"/>
+                    </a:solidFill>
                   </a:tcPr>
                 </a:tc>
               </a:tr>
@@ -10886,7 +11483,7 @@
                       </a:endParaRPr>
                     </a:p>
                   </a:txBody>
-                  <a:tcPr marL="0" marR="76200" marT="50800" marB="50800" anchor="ctr">
+                  <a:tcPr marL="76200" marR="101600" marT="88900" marB="88900" anchor="ctr">
                     <a:lnL w="0" cap="flat" cmpd="sng" algn="ctr">
                       <a:noFill/>
                     </a:lnL>
@@ -10896,7 +11493,7 @@
                     <a:lnT w="0" cap="flat" cmpd="sng" algn="ctr">
                       <a:noFill/>
                     </a:lnT>
-                    <a:lnB w="9525" cap="flat" cmpd="sng" algn="ctr">
+                    <a:lnB w="6350" cap="flat" cmpd="sng" algn="ctr">
                       <a:solidFill>
                         <a:srgbClr val="D9D9D9"/>
                       </a:solidFill>
@@ -10905,6 +11502,9 @@
                       <a:headEnd type="none" w="med" len="med"/>
                       <a:tailEnd type="none" w="med" len="med"/>
                     </a:lnB>
+                    <a:solidFill>
+                      <a:srgbClr val="FFFFFF"/>
+                    </a:solidFill>
                   </a:tcPr>
                 </a:tc>
                 <a:tc>
@@ -10933,7 +11533,7 @@
                       </a:endParaRPr>
                     </a:p>
                   </a:txBody>
-                  <a:tcPr marL="0" marR="76200" marT="50800" marB="50800" anchor="ctr">
+                  <a:tcPr marL="76200" marR="101600" marT="88900" marB="88900" anchor="ctr">
                     <a:lnL w="0" cap="flat" cmpd="sng" algn="ctr">
                       <a:noFill/>
                     </a:lnL>
@@ -10943,7 +11543,7 @@
                     <a:lnT w="0" cap="flat" cmpd="sng" algn="ctr">
                       <a:noFill/>
                     </a:lnT>
-                    <a:lnB w="9525" cap="flat" cmpd="sng" algn="ctr">
+                    <a:lnB w="6350" cap="flat" cmpd="sng" algn="ctr">
                       <a:solidFill>
                         <a:srgbClr val="D9D9D9"/>
                       </a:solidFill>
@@ -10952,6 +11552,9 @@
                       <a:headEnd type="none" w="med" len="med"/>
                       <a:tailEnd type="none" w="med" len="med"/>
                     </a:lnB>
+                    <a:solidFill>
+                      <a:srgbClr val="FFFFFF"/>
+                    </a:solidFill>
                   </a:tcPr>
                 </a:tc>
               </a:tr>
@@ -10959,6 +11562,29 @@
           </a:graphicData>
         </a:graphic>
       </p:graphicFrame>
+      <p:sp>
+        <p:nvSpPr>
+          <p:cNvPr id="5" name="Shape 2"/>
+          <p:cNvSpPr/>
+          <p:nvPr/>
+        </p:nvSpPr>
+        <p:spPr>
+          <a:xfrm>
+            <a:off x="457200" y="1097280"/>
+            <a:ext cx="8229600" cy="0"/>
+          </a:xfrm>
+          <a:prstGeom prst="line">
+            <a:avLst/>
+          </a:prstGeom>
+          <a:noFill/>
+          <a:ln w="9525">
+            <a:solidFill>
+              <a:srgbClr val="A6A6A6"/>
+            </a:solidFill>
+            <a:prstDash val="solid"/>
+          </a:ln>
+        </p:spPr>
+      </p:sp>
     </p:spTree>
   </p:cSld>
   <p:clrMapOvr>
@@ -11055,7 +11681,7 @@
               <a:buNone/>
             </a:pPr>
             <a:r>
-              <a:rPr lang="en-US" sz="1200" i="1" dirty="0">
+              <a:rPr lang="en-US" sz="1100" b="1" dirty="0">
                 <a:solidFill>
                   <a:srgbClr val="6E6E6E"/>
                 </a:solidFill>
@@ -11065,7 +11691,7 @@
               </a:rPr>
               <a:t>付録A　特徴量とモデル設定</a:t>
             </a:r>
-            <a:endParaRPr lang="en-US" sz="1200" dirty="0"/>
+            <a:endParaRPr lang="en-US" sz="1100" dirty="0"/>
           </a:p>
         </p:txBody>
       </p:sp>
@@ -11167,7 +11793,7 @@
                         <a:buNone/>
                       </a:pPr>
                       <a:r>
-                        <a:rPr lang="en-US" sz="1300" b="1" dirty="0">
+                        <a:rPr lang="en-US" sz="1400" b="1" dirty="0">
                           <a:solidFill>
                             <a:srgbClr val="1F4E79"/>
                           </a:solidFill>
@@ -11177,14 +11803,14 @@
                         </a:rPr>
                         <a:t>油温の履歴</a:t>
                       </a:r>
-                      <a:endParaRPr lang="en-US" sz="1300" dirty="0">
+                      <a:endParaRPr lang="en-US" sz="1400" dirty="0">
                         <a:latin typeface="Arial" charset="0"/>
                         <a:ea typeface="Arial" charset="0"/>
                         <a:cs typeface="Arial" charset="0"/>
                       </a:endParaRPr>
                     </a:p>
                   </a:txBody>
-                  <a:tcPr marL="0" marR="76200" marT="50800" marB="50800" anchor="ctr">
+                  <a:tcPr marL="76200" marR="101600" marT="88900" marB="88900" anchor="ctr">
                     <a:lnL w="0" cap="flat" cmpd="sng" algn="ctr">
                       <a:noFill/>
                     </a:lnL>
@@ -11194,7 +11820,7 @@
                     <a:lnT w="0" cap="flat" cmpd="sng" algn="ctr">
                       <a:noFill/>
                     </a:lnT>
-                    <a:lnB w="9525" cap="flat" cmpd="sng" algn="ctr">
+                    <a:lnB w="6350" cap="flat" cmpd="sng" algn="ctr">
                       <a:solidFill>
                         <a:srgbClr val="D9D9D9"/>
                       </a:solidFill>
@@ -11203,6 +11829,9 @@
                       <a:headEnd type="none" w="med" len="med"/>
                       <a:tailEnd type="none" w="med" len="med"/>
                     </a:lnB>
+                    <a:solidFill>
+                      <a:srgbClr val="FFFFFF"/>
+                    </a:solidFill>
                   </a:tcPr>
                 </a:tc>
                 <a:tc>
@@ -11214,7 +11843,7 @@
                         <a:buNone/>
                       </a:pPr>
                       <a:r>
-                        <a:rPr lang="en-US" sz="1300" dirty="0">
+                        <a:rPr lang="en-US" sz="1400" dirty="0">
                           <a:solidFill>
                             <a:srgbClr val="3A3A3A"/>
                           </a:solidFill>
@@ -11222,16 +11851,58 @@
                           <a:ea typeface="Arial" pitchFamily="34" charset="-122"/>
                           <a:cs typeface="Arial" pitchFamily="34" charset="-120"/>
                         </a:rPr>
-                        <a:t>現在値、1・2・3・6・12・24・48・168時間前の値、現在値と1時間前・24時間前との差、6・24・168時間の移動平均・標準偏差・最大・最小</a:t>
+                        <a:t>現在値、1・2・3・6・12・24・48・168時間前の値、</a:t>
                       </a:r>
-                      <a:endParaRPr lang="en-US" sz="1300" dirty="0">
+                      <a:endParaRPr lang="en-US" sz="1400" dirty="0">
+                        <a:latin typeface="Arial" charset="0"/>
+                        <a:ea typeface="Arial" charset="0"/>
+                        <a:cs typeface="Arial" charset="0"/>
+                      </a:endParaRPr>
+                    </a:p>
+                    <a:p>
+                      <a:pPr algn="l" indent="0" marL="0">
+                        <a:buNone/>
+                      </a:pPr>
+                      <a:r>
+                        <a:rPr lang="en-US" sz="1400" dirty="0">
+                          <a:solidFill>
+                            <a:srgbClr val="3A3A3A"/>
+                          </a:solidFill>
+                          <a:latin typeface="Arial" pitchFamily="34" charset="0"/>
+                          <a:ea typeface="Arial" pitchFamily="34" charset="-122"/>
+                          <a:cs typeface="Arial" pitchFamily="34" charset="-120"/>
+                        </a:rPr>
+                        <a:t>現在値と1時間前・24時間前との差、</a:t>
+                      </a:r>
+                      <a:endParaRPr lang="en-US" sz="1400" dirty="0">
+                        <a:latin typeface="Arial" charset="0"/>
+                        <a:ea typeface="Arial" charset="0"/>
+                        <a:cs typeface="Arial" charset="0"/>
+                      </a:endParaRPr>
+                    </a:p>
+                    <a:p>
+                      <a:pPr algn="l" indent="0" marL="0">
+                        <a:buNone/>
+                      </a:pPr>
+                      <a:r>
+                        <a:rPr lang="en-US" sz="1400" dirty="0">
+                          <a:solidFill>
+                            <a:srgbClr val="3A3A3A"/>
+                          </a:solidFill>
+                          <a:latin typeface="Arial" pitchFamily="34" charset="0"/>
+                          <a:ea typeface="Arial" pitchFamily="34" charset="-122"/>
+                          <a:cs typeface="Arial" pitchFamily="34" charset="-120"/>
+                        </a:rPr>
+                        <a:t>6・24・168時間の移動平均・標準偏差・最大・最小</a:t>
+                      </a:r>
+                      <a:endParaRPr lang="en-US" sz="1400" dirty="0">
                         <a:latin typeface="Arial" charset="0"/>
                         <a:ea typeface="Arial" charset="0"/>
                         <a:cs typeface="Arial" charset="0"/>
                       </a:endParaRPr>
                     </a:p>
                   </a:txBody>
-                  <a:tcPr marL="0" marR="76200" marT="50800" marB="50800" anchor="ctr">
+                  <a:tcPr marL="76200" marR="101600" marT="88900" marB="88900" anchor="ctr">
                     <a:lnL w="0" cap="flat" cmpd="sng" algn="ctr">
                       <a:noFill/>
                     </a:lnL>
@@ -11241,7 +11912,7 @@
                     <a:lnT w="0" cap="flat" cmpd="sng" algn="ctr">
                       <a:noFill/>
                     </a:lnT>
-                    <a:lnB w="9525" cap="flat" cmpd="sng" algn="ctr">
+                    <a:lnB w="6350" cap="flat" cmpd="sng" algn="ctr">
                       <a:solidFill>
                         <a:srgbClr val="D9D9D9"/>
                       </a:solidFill>
@@ -11250,6 +11921,9 @@
                       <a:headEnd type="none" w="med" len="med"/>
                       <a:tailEnd type="none" w="med" len="med"/>
                     </a:lnB>
+                    <a:solidFill>
+                      <a:srgbClr val="FFFFFF"/>
+                    </a:solidFill>
                   </a:tcPr>
                 </a:tc>
               </a:tr>
@@ -11263,7 +11937,7 @@
                         <a:buNone/>
                       </a:pPr>
                       <a:r>
-                        <a:rPr lang="en-US" sz="1300" b="1" dirty="0">
+                        <a:rPr lang="en-US" sz="1400" b="1" dirty="0">
                           <a:solidFill>
                             <a:srgbClr val="1F4E79"/>
                           </a:solidFill>
@@ -11273,14 +11947,14 @@
                         </a:rPr>
                         <a:t>時刻・季節</a:t>
                       </a:r>
-                      <a:endParaRPr lang="en-US" sz="1300" dirty="0">
+                      <a:endParaRPr lang="en-US" sz="1400" dirty="0">
                         <a:latin typeface="Arial" charset="0"/>
                         <a:ea typeface="Arial" charset="0"/>
                         <a:cs typeface="Arial" charset="0"/>
                       </a:endParaRPr>
                     </a:p>
                   </a:txBody>
-                  <a:tcPr marL="0" marR="76200" marT="50800" marB="50800" anchor="ctr">
+                  <a:tcPr marL="76200" marR="101600" marT="88900" marB="88900" anchor="ctr">
                     <a:lnL w="0" cap="flat" cmpd="sng" algn="ctr">
                       <a:noFill/>
                     </a:lnL>
@@ -11290,7 +11964,7 @@
                     <a:lnT w="0" cap="flat" cmpd="sng" algn="ctr">
                       <a:noFill/>
                     </a:lnT>
-                    <a:lnB w="9525" cap="flat" cmpd="sng" algn="ctr">
+                    <a:lnB w="6350" cap="flat" cmpd="sng" algn="ctr">
                       <a:solidFill>
                         <a:srgbClr val="D9D9D9"/>
                       </a:solidFill>
@@ -11299,6 +11973,9 @@
                       <a:headEnd type="none" w="med" len="med"/>
                       <a:tailEnd type="none" w="med" len="med"/>
                     </a:lnB>
+                    <a:solidFill>
+                      <a:srgbClr val="FFFFFF"/>
+                    </a:solidFill>
                   </a:tcPr>
                 </a:tc>
                 <a:tc>
@@ -11310,7 +11987,7 @@
                         <a:buNone/>
                       </a:pPr>
                       <a:r>
-                        <a:rPr lang="en-US" sz="1300" dirty="0">
+                        <a:rPr lang="en-US" sz="1400" dirty="0">
                           <a:solidFill>
                             <a:srgbClr val="3A3A3A"/>
                           </a:solidFill>
@@ -11320,14 +11997,14 @@
                         </a:rPr>
                         <a:t>予測先の時刻と年内の日（sin・cos）、曜日</a:t>
                       </a:r>
-                      <a:endParaRPr lang="en-US" sz="1300" dirty="0">
+                      <a:endParaRPr lang="en-US" sz="1400" dirty="0">
                         <a:latin typeface="Arial" charset="0"/>
                         <a:ea typeface="Arial" charset="0"/>
                         <a:cs typeface="Arial" charset="0"/>
                       </a:endParaRPr>
                     </a:p>
                   </a:txBody>
-                  <a:tcPr marL="0" marR="76200" marT="50800" marB="50800" anchor="ctr">
+                  <a:tcPr marL="76200" marR="101600" marT="88900" marB="88900" anchor="ctr">
                     <a:lnL w="0" cap="flat" cmpd="sng" algn="ctr">
                       <a:noFill/>
                     </a:lnL>
@@ -11337,7 +12014,7 @@
                     <a:lnT w="0" cap="flat" cmpd="sng" algn="ctr">
                       <a:noFill/>
                     </a:lnT>
-                    <a:lnB w="9525" cap="flat" cmpd="sng" algn="ctr">
+                    <a:lnB w="6350" cap="flat" cmpd="sng" algn="ctr">
                       <a:solidFill>
                         <a:srgbClr val="D9D9D9"/>
                       </a:solidFill>
@@ -11346,6 +12023,9 @@
                       <a:headEnd type="none" w="med" len="med"/>
                       <a:tailEnd type="none" w="med" len="med"/>
                     </a:lnB>
+                    <a:solidFill>
+                      <a:srgbClr val="FFFFFF"/>
+                    </a:solidFill>
                   </a:tcPr>
                 </a:tc>
               </a:tr>
@@ -11359,7 +12039,7 @@
                         <a:buNone/>
                       </a:pPr>
                       <a:r>
-                        <a:rPr lang="en-US" sz="1300" b="1" dirty="0">
+                        <a:rPr lang="en-US" sz="1400" b="1" dirty="0">
                           <a:solidFill>
                             <a:srgbClr val="1F4E79"/>
                           </a:solidFill>
@@ -11369,14 +12049,14 @@
                         </a:rPr>
                         <a:t>負荷6種</a:t>
                       </a:r>
-                      <a:endParaRPr lang="en-US" sz="1300" dirty="0">
+                      <a:endParaRPr lang="en-US" sz="1400" dirty="0">
                         <a:latin typeface="Arial" charset="0"/>
                         <a:ea typeface="Arial" charset="0"/>
                         <a:cs typeface="Arial" charset="0"/>
                       </a:endParaRPr>
                     </a:p>
                   </a:txBody>
-                  <a:tcPr marL="0" marR="76200" marT="50800" marB="50800" anchor="ctr">
+                  <a:tcPr marL="76200" marR="101600" marT="88900" marB="88900" anchor="ctr">
                     <a:lnL w="0" cap="flat" cmpd="sng" algn="ctr">
                       <a:noFill/>
                     </a:lnL>
@@ -11386,7 +12066,7 @@
                     <a:lnT w="0" cap="flat" cmpd="sng" algn="ctr">
                       <a:noFill/>
                     </a:lnT>
-                    <a:lnB w="9525" cap="flat" cmpd="sng" algn="ctr">
+                    <a:lnB w="6350" cap="flat" cmpd="sng" algn="ctr">
                       <a:solidFill>
                         <a:srgbClr val="D9D9D9"/>
                       </a:solidFill>
@@ -11395,6 +12075,9 @@
                       <a:headEnd type="none" w="med" len="med"/>
                       <a:tailEnd type="none" w="med" len="med"/>
                     </a:lnB>
+                    <a:solidFill>
+                      <a:srgbClr val="FFFFFF"/>
+                    </a:solidFill>
                   </a:tcPr>
                 </a:tc>
                 <a:tc>
@@ -11406,7 +12089,7 @@
                         <a:buNone/>
                       </a:pPr>
                       <a:r>
-                        <a:rPr lang="en-US" sz="1300" dirty="0">
+                        <a:rPr lang="en-US" sz="1400" dirty="0">
                           <a:solidFill>
                             <a:srgbClr val="3A3A3A"/>
                           </a:solidFill>
@@ -11416,7 +12099,7 @@
                         </a:rPr>
                         <a:t>現在値、現在値と1時間前との差、24時間平均</a:t>
                       </a:r>
-                      <a:endParaRPr lang="en-US" sz="1300" dirty="0">
+                      <a:endParaRPr lang="en-US" sz="1400" dirty="0">
                         <a:latin typeface="Arial" charset="0"/>
                         <a:ea typeface="Arial" charset="0"/>
                         <a:cs typeface="Arial" charset="0"/>
@@ -11427,7 +12110,7 @@
                         <a:buNone/>
                       </a:pPr>
                       <a:r>
-                        <a:rPr lang="en-US" sz="1300" dirty="0">
+                        <a:rPr lang="en-US" sz="1400" dirty="0">
                           <a:solidFill>
                             <a:srgbClr val="3A3A3A"/>
                           </a:solidFill>
@@ -11437,14 +12120,14 @@
                         </a:rPr>
                         <a:t>参考評価のみ：予測先の実測負荷も追加</a:t>
                       </a:r>
-                      <a:endParaRPr lang="en-US" sz="1300" dirty="0">
+                      <a:endParaRPr lang="en-US" sz="1400" dirty="0">
                         <a:latin typeface="Arial" charset="0"/>
                         <a:ea typeface="Arial" charset="0"/>
                         <a:cs typeface="Arial" charset="0"/>
                       </a:endParaRPr>
                     </a:p>
                   </a:txBody>
-                  <a:tcPr marL="0" marR="76200" marT="50800" marB="50800" anchor="ctr">
+                  <a:tcPr marL="76200" marR="101600" marT="88900" marB="88900" anchor="ctr">
                     <a:lnL w="0" cap="flat" cmpd="sng" algn="ctr">
                       <a:noFill/>
                     </a:lnL>
@@ -11454,7 +12137,7 @@
                     <a:lnT w="0" cap="flat" cmpd="sng" algn="ctr">
                       <a:noFill/>
                     </a:lnT>
-                    <a:lnB w="9525" cap="flat" cmpd="sng" algn="ctr">
+                    <a:lnB w="6350" cap="flat" cmpd="sng" algn="ctr">
                       <a:solidFill>
                         <a:srgbClr val="D9D9D9"/>
                       </a:solidFill>
@@ -11463,6 +12146,9 @@
                       <a:headEnd type="none" w="med" len="med"/>
                       <a:tailEnd type="none" w="med" len="med"/>
                     </a:lnB>
+                    <a:solidFill>
+                      <a:srgbClr val="FFFFFF"/>
+                    </a:solidFill>
                   </a:tcPr>
                 </a:tc>
               </a:tr>
@@ -11476,7 +12162,7 @@
                         <a:buNone/>
                       </a:pPr>
                       <a:r>
-                        <a:rPr lang="en-US" sz="1300" b="1" dirty="0">
+                        <a:rPr lang="en-US" sz="1400" b="1" dirty="0">
                           <a:solidFill>
                             <a:srgbClr val="1F4E79"/>
                           </a:solidFill>
@@ -11486,14 +12172,14 @@
                         </a:rPr>
                         <a:t>LightGBM</a:t>
                       </a:r>
-                      <a:endParaRPr lang="en-US" sz="1300" dirty="0">
+                      <a:endParaRPr lang="en-US" sz="1400" dirty="0">
                         <a:latin typeface="Arial" charset="0"/>
                         <a:ea typeface="Arial" charset="0"/>
                         <a:cs typeface="Arial" charset="0"/>
                       </a:endParaRPr>
                     </a:p>
                   </a:txBody>
-                  <a:tcPr marL="0" marR="76200" marT="50800" marB="50800" anchor="ctr">
+                  <a:tcPr marL="76200" marR="101600" marT="88900" marB="88900" anchor="ctr">
                     <a:lnL w="0" cap="flat" cmpd="sng" algn="ctr">
                       <a:noFill/>
                     </a:lnL>
@@ -11503,7 +12189,7 @@
                     <a:lnT w="0" cap="flat" cmpd="sng" algn="ctr">
                       <a:noFill/>
                     </a:lnT>
-                    <a:lnB w="9525" cap="flat" cmpd="sng" algn="ctr">
+                    <a:lnB w="6350" cap="flat" cmpd="sng" algn="ctr">
                       <a:solidFill>
                         <a:srgbClr val="D9D9D9"/>
                       </a:solidFill>
@@ -11512,6 +12198,9 @@
                       <a:headEnd type="none" w="med" len="med"/>
                       <a:tailEnd type="none" w="med" len="med"/>
                     </a:lnB>
+                    <a:solidFill>
+                      <a:srgbClr val="FFFFFF"/>
+                    </a:solidFill>
                   </a:tcPr>
                 </a:tc>
                 <a:tc>
@@ -11523,7 +12212,7 @@
                         <a:buNone/>
                       </a:pPr>
                       <a:r>
-                        <a:rPr lang="en-US" sz="1300" dirty="0">
+                        <a:rPr lang="en-US" sz="1400" dirty="0">
                           <a:solidFill>
                             <a:srgbClr val="3A3A3A"/>
                           </a:solidFill>
@@ -11531,16 +12220,58 @@
                           <a:ea typeface="Arial" pitchFamily="34" charset="-122"/>
                           <a:cs typeface="Arial" pitchFamily="34" charset="-120"/>
                         </a:rPr>
-                        <a:t>絶対誤差（L1）で学習。学習率0.03、最大葉数31、葉ごとの最小データ数50、特徴量と行の抽出率0.8。検証期間の誤差が100回続けて改善しなければ学習を終了</a:t>
+                        <a:t>絶対誤差（L1）で学習。学習率0.03、最大葉数31、</a:t>
                       </a:r>
-                      <a:endParaRPr lang="en-US" sz="1300" dirty="0">
+                      <a:endParaRPr lang="en-US" sz="1400" dirty="0">
+                        <a:latin typeface="Arial" charset="0"/>
+                        <a:ea typeface="Arial" charset="0"/>
+                        <a:cs typeface="Arial" charset="0"/>
+                      </a:endParaRPr>
+                    </a:p>
+                    <a:p>
+                      <a:pPr algn="l" indent="0" marL="0">
+                        <a:buNone/>
+                      </a:pPr>
+                      <a:r>
+                        <a:rPr lang="en-US" sz="1400" dirty="0">
+                          <a:solidFill>
+                            <a:srgbClr val="3A3A3A"/>
+                          </a:solidFill>
+                          <a:latin typeface="Arial" pitchFamily="34" charset="0"/>
+                          <a:ea typeface="Arial" pitchFamily="34" charset="-122"/>
+                          <a:cs typeface="Arial" pitchFamily="34" charset="-120"/>
+                        </a:rPr>
+                        <a:t>葉ごとの最小データ数50、特徴量と行の抽出率0.8。</a:t>
+                      </a:r>
+                      <a:endParaRPr lang="en-US" sz="1400" dirty="0">
+                        <a:latin typeface="Arial" charset="0"/>
+                        <a:ea typeface="Arial" charset="0"/>
+                        <a:cs typeface="Arial" charset="0"/>
+                      </a:endParaRPr>
+                    </a:p>
+                    <a:p>
+                      <a:pPr algn="l" indent="0" marL="0">
+                        <a:buNone/>
+                      </a:pPr>
+                      <a:r>
+                        <a:rPr lang="en-US" sz="1400" dirty="0">
+                          <a:solidFill>
+                            <a:srgbClr val="3A3A3A"/>
+                          </a:solidFill>
+                          <a:latin typeface="Arial" pitchFamily="34" charset="0"/>
+                          <a:ea typeface="Arial" pitchFamily="34" charset="-122"/>
+                          <a:cs typeface="Arial" pitchFamily="34" charset="-120"/>
+                        </a:rPr>
+                        <a:t>検証期間の誤差が100回続けて改善しなければ学習を終了</a:t>
+                      </a:r>
+                      <a:endParaRPr lang="en-US" sz="1400" dirty="0">
                         <a:latin typeface="Arial" charset="0"/>
                         <a:ea typeface="Arial" charset="0"/>
                         <a:cs typeface="Arial" charset="0"/>
                       </a:endParaRPr>
                     </a:p>
                   </a:txBody>
-                  <a:tcPr marL="0" marR="76200" marT="50800" marB="50800" anchor="ctr">
+                  <a:tcPr marL="76200" marR="101600" marT="88900" marB="88900" anchor="ctr">
                     <a:lnL w="0" cap="flat" cmpd="sng" algn="ctr">
                       <a:noFill/>
                     </a:lnL>
@@ -11550,7 +12281,7 @@
                     <a:lnT w="0" cap="flat" cmpd="sng" algn="ctr">
                       <a:noFill/>
                     </a:lnT>
-                    <a:lnB w="9525" cap="flat" cmpd="sng" algn="ctr">
+                    <a:lnB w="6350" cap="flat" cmpd="sng" algn="ctr">
                       <a:solidFill>
                         <a:srgbClr val="D9D9D9"/>
                       </a:solidFill>
@@ -11559,6 +12290,9 @@
                       <a:headEnd type="none" w="med" len="med"/>
                       <a:tailEnd type="none" w="med" len="med"/>
                     </a:lnB>
+                    <a:solidFill>
+                      <a:srgbClr val="FFFFFF"/>
+                    </a:solidFill>
                   </a:tcPr>
                 </a:tc>
               </a:tr>
@@ -11566,6 +12300,29 @@
           </a:graphicData>
         </a:graphic>
       </p:graphicFrame>
+      <p:sp>
+        <p:nvSpPr>
+          <p:cNvPr id="6" name="Shape 3"/>
+          <p:cNvSpPr/>
+          <p:nvPr/>
+        </p:nvSpPr>
+        <p:spPr>
+          <a:xfrm>
+            <a:off x="457200" y="1417320"/>
+            <a:ext cx="8229600" cy="0"/>
+          </a:xfrm>
+          <a:prstGeom prst="line">
+            <a:avLst/>
+          </a:prstGeom>
+          <a:noFill/>
+          <a:ln w="9525">
+            <a:solidFill>
+              <a:srgbClr val="A6A6A6"/>
+            </a:solidFill>
+            <a:prstDash val="solid"/>
+          </a:ln>
+        </p:spPr>
+      </p:sp>
     </p:spTree>
   </p:cSld>
   <p:clrMapOvr>
@@ -11662,7 +12419,7 @@
               <a:buNone/>
             </a:pPr>
             <a:r>
-              <a:rPr lang="en-US" sz="1200" i="1" dirty="0">
+              <a:rPr lang="en-US" sz="1100" b="1" dirty="0">
                 <a:solidFill>
                   <a:srgbClr val="6E6E6E"/>
                 </a:solidFill>
@@ -11672,7 +12429,7 @@
               </a:rPr>
               <a:t>付録B　予測する時間ごとの結果</a:t>
             </a:r>
-            <a:endParaRPr lang="en-US" sz="1200" dirty="0"/>
+            <a:endParaRPr lang="en-US" sz="1100" dirty="0"/>
           </a:p>
         </p:txBody>
       </p:sp>
@@ -11781,7 +12538,7 @@
                       <a:r>
                         <a:rPr lang="en-US" sz="1100" dirty="0">
                           <a:solidFill>
-                            <a:srgbClr val="6E6E6E"/>
+                            <a:srgbClr val="1F4E79"/>
                           </a:solidFill>
                           <a:latin typeface="Arial" pitchFamily="34" charset="0"/>
                           <a:ea typeface="Arial" pitchFamily="34" charset="-122"/>
@@ -11802,7 +12559,7 @@
                       <a:r>
                         <a:rPr lang="en-US" sz="1100" dirty="0">
                           <a:solidFill>
-                            <a:srgbClr val="6E6E6E"/>
+                            <a:srgbClr val="1F4E79"/>
                           </a:solidFill>
                           <a:latin typeface="Arial" pitchFamily="34" charset="0"/>
                           <a:ea typeface="Arial" pitchFamily="34" charset="-122"/>
@@ -11817,7 +12574,7 @@
                       </a:endParaRPr>
                     </a:p>
                   </a:txBody>
-                  <a:tcPr marL="25400" marR="25400" marT="38100" marB="38100" anchor="ctr">
+                  <a:tcPr marL="25400" marR="25400" marT="63500" marB="63500" anchor="ctr">
                     <a:lnL w="0" cap="flat" cmpd="sng" algn="ctr">
                       <a:noFill/>
                     </a:lnL>
@@ -11836,6 +12593,9 @@
                       <a:headEnd type="none" w="med" len="med"/>
                       <a:tailEnd type="none" w="med" len="med"/>
                     </a:lnB>
+                    <a:solidFill>
+                      <a:srgbClr val="F2F2F2"/>
+                    </a:solidFill>
                   </a:tcPr>
                 </a:tc>
                 <a:tc gridSpan="3">
@@ -11864,7 +12624,7 @@
                       </a:endParaRPr>
                     </a:p>
                   </a:txBody>
-                  <a:tcPr marL="25400" marR="25400" marT="38100" marB="38100" anchor="ctr">
+                  <a:tcPr marL="25400" marR="25400" marT="63500" marB="63500" anchor="ctr">
                     <a:lnL w="0" cap="flat" cmpd="sng" algn="ctr">
                       <a:noFill/>
                     </a:lnL>
@@ -11883,6 +12643,9 @@
                       <a:headEnd type="none" w="med" len="med"/>
                       <a:tailEnd type="none" w="med" len="med"/>
                     </a:lnB>
+                    <a:solidFill>
+                      <a:srgbClr val="F2F2F2"/>
+                    </a:solidFill>
                   </a:tcPr>
                 </a:tc>
                 <a:tc hMerge="1">
@@ -11917,7 +12680,7 @@
                       </a:endParaRPr>
                     </a:p>
                   </a:txBody>
-                  <a:tcPr marL="25400" marR="25400" marT="38100" marB="38100" anchor="ctr">
+                  <a:tcPr marL="25400" marR="25400" marT="63500" marB="63500" anchor="ctr">
                     <a:lnL w="0" cap="flat" cmpd="sng" algn="ctr">
                       <a:noFill/>
                     </a:lnL>
@@ -11936,6 +12699,9 @@
                       <a:headEnd type="none" w="med" len="med"/>
                       <a:tailEnd type="none" w="med" len="med"/>
                     </a:lnB>
+                    <a:solidFill>
+                      <a:srgbClr val="F2F2F2"/>
+                    </a:solidFill>
                   </a:tcPr>
                 </a:tc>
                 <a:tc hMerge="1">
@@ -11960,7 +12726,7 @@
                       <a:r>
                         <a:rPr lang="en-US" sz="1100" dirty="0">
                           <a:solidFill>
-                            <a:srgbClr val="6E6E6E"/>
+                            <a:srgbClr val="1F4E79"/>
                           </a:solidFill>
                           <a:latin typeface="Arial" pitchFamily="34" charset="0"/>
                           <a:ea typeface="Arial" pitchFamily="34" charset="-122"/>
@@ -11975,7 +12741,309 @@
                       </a:endParaRPr>
                     </a:p>
                   </a:txBody>
-                  <a:tcPr marL="25400" marR="25400" marT="38100" marB="38100" anchor="ctr">
+                  <a:tcPr marL="25400" marR="25400" marT="63500" marB="63500" anchor="ctr">
+                    <a:lnL w="0" cap="flat" cmpd="sng" algn="ctr">
+                      <a:noFill/>
+                    </a:lnL>
+                    <a:lnR w="0" cap="flat" cmpd="sng" algn="ctr">
+                      <a:noFill/>
+                    </a:lnR>
+                    <a:lnT w="0" cap="flat" cmpd="sng" algn="ctr">
+                      <a:noFill/>
+                    </a:lnT>
+                    <a:lnB w="9525" cap="flat" cmpd="sng" algn="ctr">
+                      <a:solidFill>
+                        <a:srgbClr val="D9D9D9"/>
+                      </a:solidFill>
+                      <a:prstDash val="solid"/>
+                      <a:round/>
+                      <a:headEnd type="none" w="med" len="med"/>
+                      <a:tailEnd type="none" w="med" len="med"/>
+                    </a:lnB>
+                    <a:solidFill>
+                      <a:srgbClr val="F2F2F2"/>
+                    </a:solidFill>
+                  </a:tcPr>
+                </a:tc>
+                <a:tc>
+                  <a:txBody>
+                    <a:bodyPr/>
+                    <a:lstStyle/>
+                    <a:p>
+                      <a:pPr algn="ctr" indent="0" marL="0">
+                        <a:buNone/>
+                      </a:pPr>
+                      <a:r>
+                        <a:rPr lang="en-US" sz="1100" dirty="0">
+                          <a:solidFill>
+                            <a:srgbClr val="1F4E79"/>
+                          </a:solidFill>
+                          <a:latin typeface="Arial" pitchFamily="34" charset="0"/>
+                          <a:ea typeface="Arial" pitchFamily="34" charset="-122"/>
+                          <a:cs typeface="Arial" pitchFamily="34" charset="-120"/>
+                        </a:rPr>
+                        <a:t>6時間先</a:t>
+                      </a:r>
+                      <a:endParaRPr lang="en-US" sz="1100" dirty="0">
+                        <a:latin typeface="Arial" charset="0"/>
+                        <a:ea typeface="Arial" charset="0"/>
+                        <a:cs typeface="Arial" charset="0"/>
+                      </a:endParaRPr>
+                    </a:p>
+                  </a:txBody>
+                  <a:tcPr marL="25400" marR="25400" marT="63500" marB="63500" anchor="ctr">
+                    <a:lnL w="0" cap="flat" cmpd="sng" algn="ctr">
+                      <a:noFill/>
+                    </a:lnL>
+                    <a:lnR w="0" cap="flat" cmpd="sng" algn="ctr">
+                      <a:noFill/>
+                    </a:lnR>
+                    <a:lnT w="0" cap="flat" cmpd="sng" algn="ctr">
+                      <a:noFill/>
+                    </a:lnT>
+                    <a:lnB w="9525" cap="flat" cmpd="sng" algn="ctr">
+                      <a:solidFill>
+                        <a:srgbClr val="D9D9D9"/>
+                      </a:solidFill>
+                      <a:prstDash val="solid"/>
+                      <a:round/>
+                      <a:headEnd type="none" w="med" len="med"/>
+                      <a:tailEnd type="none" w="med" len="med"/>
+                    </a:lnB>
+                    <a:solidFill>
+                      <a:srgbClr val="F2F2F2"/>
+                    </a:solidFill>
+                  </a:tcPr>
+                </a:tc>
+                <a:tc>
+                  <a:txBody>
+                    <a:bodyPr/>
+                    <a:lstStyle/>
+                    <a:p>
+                      <a:pPr algn="ctr" indent="0" marL="0">
+                        <a:buNone/>
+                      </a:pPr>
+                      <a:r>
+                        <a:rPr lang="en-US" sz="1100" dirty="0">
+                          <a:solidFill>
+                            <a:srgbClr val="1F4E79"/>
+                          </a:solidFill>
+                          <a:latin typeface="Arial" pitchFamily="34" charset="0"/>
+                          <a:ea typeface="Arial" pitchFamily="34" charset="-122"/>
+                          <a:cs typeface="Arial" pitchFamily="34" charset="-120"/>
+                        </a:rPr>
+                        <a:t>24時間先</a:t>
+                      </a:r>
+                      <a:endParaRPr lang="en-US" sz="1100" dirty="0">
+                        <a:latin typeface="Arial" charset="0"/>
+                        <a:ea typeface="Arial" charset="0"/>
+                        <a:cs typeface="Arial" charset="0"/>
+                      </a:endParaRPr>
+                    </a:p>
+                  </a:txBody>
+                  <a:tcPr marL="25400" marR="25400" marT="63500" marB="63500" anchor="ctr">
+                    <a:lnL w="0" cap="flat" cmpd="sng" algn="ctr">
+                      <a:noFill/>
+                    </a:lnL>
+                    <a:lnR w="0" cap="flat" cmpd="sng" algn="ctr">
+                      <a:noFill/>
+                    </a:lnR>
+                    <a:lnT w="0" cap="flat" cmpd="sng" algn="ctr">
+                      <a:noFill/>
+                    </a:lnT>
+                    <a:lnB w="9525" cap="flat" cmpd="sng" algn="ctr">
+                      <a:solidFill>
+                        <a:srgbClr val="D9D9D9"/>
+                      </a:solidFill>
+                      <a:prstDash val="solid"/>
+                      <a:round/>
+                      <a:headEnd type="none" w="med" len="med"/>
+                      <a:tailEnd type="none" w="med" len="med"/>
+                    </a:lnB>
+                    <a:solidFill>
+                      <a:srgbClr val="F2F2F2"/>
+                    </a:solidFill>
+                  </a:tcPr>
+                </a:tc>
+                <a:tc>
+                  <a:txBody>
+                    <a:bodyPr/>
+                    <a:lstStyle/>
+                    <a:p>
+                      <a:pPr algn="ctr" indent="0" marL="0">
+                        <a:buNone/>
+                      </a:pPr>
+                      <a:r>
+                        <a:rPr lang="en-US" sz="1100" dirty="0">
+                          <a:solidFill>
+                            <a:srgbClr val="1F4E79"/>
+                          </a:solidFill>
+                          <a:latin typeface="Arial" pitchFamily="34" charset="0"/>
+                          <a:ea typeface="Arial" pitchFamily="34" charset="-122"/>
+                          <a:cs typeface="Arial" pitchFamily="34" charset="-120"/>
+                        </a:rPr>
+                        <a:t>1時間先</a:t>
+                      </a:r>
+                      <a:endParaRPr lang="en-US" sz="1100" dirty="0">
+                        <a:latin typeface="Arial" charset="0"/>
+                        <a:ea typeface="Arial" charset="0"/>
+                        <a:cs typeface="Arial" charset="0"/>
+                      </a:endParaRPr>
+                    </a:p>
+                  </a:txBody>
+                  <a:tcPr marL="25400" marR="25400" marT="63500" marB="63500" anchor="ctr">
+                    <a:lnL w="0" cap="flat" cmpd="sng" algn="ctr">
+                      <a:noFill/>
+                    </a:lnL>
+                    <a:lnR w="0" cap="flat" cmpd="sng" algn="ctr">
+                      <a:noFill/>
+                    </a:lnR>
+                    <a:lnT w="0" cap="flat" cmpd="sng" algn="ctr">
+                      <a:noFill/>
+                    </a:lnT>
+                    <a:lnB w="9525" cap="flat" cmpd="sng" algn="ctr">
+                      <a:solidFill>
+                        <a:srgbClr val="D9D9D9"/>
+                      </a:solidFill>
+                      <a:prstDash val="solid"/>
+                      <a:round/>
+                      <a:headEnd type="none" w="med" len="med"/>
+                      <a:tailEnd type="none" w="med" len="med"/>
+                    </a:lnB>
+                    <a:solidFill>
+                      <a:srgbClr val="F2F2F2"/>
+                    </a:solidFill>
+                  </a:tcPr>
+                </a:tc>
+                <a:tc>
+                  <a:txBody>
+                    <a:bodyPr/>
+                    <a:lstStyle/>
+                    <a:p>
+                      <a:pPr algn="ctr" indent="0" marL="0">
+                        <a:buNone/>
+                      </a:pPr>
+                      <a:r>
+                        <a:rPr lang="en-US" sz="1100" dirty="0">
+                          <a:solidFill>
+                            <a:srgbClr val="1F4E79"/>
+                          </a:solidFill>
+                          <a:latin typeface="Arial" pitchFamily="34" charset="0"/>
+                          <a:ea typeface="Arial" pitchFamily="34" charset="-122"/>
+                          <a:cs typeface="Arial" pitchFamily="34" charset="-120"/>
+                        </a:rPr>
+                        <a:t>6時間先</a:t>
+                      </a:r>
+                      <a:endParaRPr lang="en-US" sz="1100" dirty="0">
+                        <a:latin typeface="Arial" charset="0"/>
+                        <a:ea typeface="Arial" charset="0"/>
+                        <a:cs typeface="Arial" charset="0"/>
+                      </a:endParaRPr>
+                    </a:p>
+                  </a:txBody>
+                  <a:tcPr marL="25400" marR="25400" marT="63500" marB="63500" anchor="ctr">
+                    <a:lnL w="0" cap="flat" cmpd="sng" algn="ctr">
+                      <a:noFill/>
+                    </a:lnL>
+                    <a:lnR w="0" cap="flat" cmpd="sng" algn="ctr">
+                      <a:noFill/>
+                    </a:lnR>
+                    <a:lnT w="0" cap="flat" cmpd="sng" algn="ctr">
+                      <a:noFill/>
+                    </a:lnT>
+                    <a:lnB w="9525" cap="flat" cmpd="sng" algn="ctr">
+                      <a:solidFill>
+                        <a:srgbClr val="D9D9D9"/>
+                      </a:solidFill>
+                      <a:prstDash val="solid"/>
+                      <a:round/>
+                      <a:headEnd type="none" w="med" len="med"/>
+                      <a:tailEnd type="none" w="med" len="med"/>
+                    </a:lnB>
+                    <a:solidFill>
+                      <a:srgbClr val="F2F2F2"/>
+                    </a:solidFill>
+                  </a:tcPr>
+                </a:tc>
+                <a:tc>
+                  <a:txBody>
+                    <a:bodyPr/>
+                    <a:lstStyle/>
+                    <a:p>
+                      <a:pPr algn="ctr" indent="0" marL="0">
+                        <a:buNone/>
+                      </a:pPr>
+                      <a:r>
+                        <a:rPr lang="en-US" sz="1100" dirty="0">
+                          <a:solidFill>
+                            <a:srgbClr val="1F4E79"/>
+                          </a:solidFill>
+                          <a:latin typeface="Arial" pitchFamily="34" charset="0"/>
+                          <a:ea typeface="Arial" pitchFamily="34" charset="-122"/>
+                          <a:cs typeface="Arial" pitchFamily="34" charset="-120"/>
+                        </a:rPr>
+                        <a:t>24時間先</a:t>
+                      </a:r>
+                      <a:endParaRPr lang="en-US" sz="1100" dirty="0">
+                        <a:latin typeface="Arial" charset="0"/>
+                        <a:ea typeface="Arial" charset="0"/>
+                        <a:cs typeface="Arial" charset="0"/>
+                      </a:endParaRPr>
+                    </a:p>
+                  </a:txBody>
+                  <a:tcPr marL="25400" marR="25400" marT="63500" marB="63500" anchor="ctr">
+                    <a:lnL w="0" cap="flat" cmpd="sng" algn="ctr">
+                      <a:noFill/>
+                    </a:lnL>
+                    <a:lnR w="0" cap="flat" cmpd="sng" algn="ctr">
+                      <a:noFill/>
+                    </a:lnR>
+                    <a:lnT w="0" cap="flat" cmpd="sng" algn="ctr">
+                      <a:noFill/>
+                    </a:lnT>
+                    <a:lnB w="9525" cap="flat" cmpd="sng" algn="ctr">
+                      <a:solidFill>
+                        <a:srgbClr val="D9D9D9"/>
+                      </a:solidFill>
+                      <a:prstDash val="solid"/>
+                      <a:round/>
+                      <a:headEnd type="none" w="med" len="med"/>
+                      <a:tailEnd type="none" w="med" len="med"/>
+                    </a:lnB>
+                    <a:solidFill>
+                      <a:srgbClr val="F2F2F2"/>
+                    </a:solidFill>
+                  </a:tcPr>
+                </a:tc>
+              </a:tr>
+              <a:tr h="384048">
+                <a:tc>
+                  <a:txBody>
+                    <a:bodyPr/>
+                    <a:lstStyle/>
+                    <a:p>
+                      <a:pPr algn="l" indent="0" marL="0">
+                        <a:buNone/>
+                      </a:pPr>
+                      <a:r>
+                        <a:rPr lang="en-US" sz="1400" b="1" dirty="0">
+                          <a:solidFill>
+                            <a:srgbClr val="1F4E79"/>
+                          </a:solidFill>
+                          <a:latin typeface="Arial" pitchFamily="34" charset="0"/>
+                          <a:ea typeface="Arial" pitchFamily="34" charset="-122"/>
+                          <a:cs typeface="Arial" pitchFamily="34" charset="-120"/>
+                        </a:rPr>
+                        <a:t>持続予測</a:t>
+                      </a:r>
+                      <a:endParaRPr lang="en-US" sz="1400" dirty="0">
+                        <a:latin typeface="Arial" charset="0"/>
+                        <a:ea typeface="Arial" charset="0"/>
+                        <a:cs typeface="Arial" charset="0"/>
+                      </a:endParaRPr>
+                    </a:p>
+                  </a:txBody>
+                  <a:tcPr marL="25400" marR="25400" marT="63500" marB="63500" anchor="ctr">
                     <a:lnL w="0" cap="flat" cmpd="sng" algn="ctr">
                       <a:noFill/>
                     </a:lnL>
@@ -12005,24 +13073,24 @@
                         <a:buNone/>
                       </a:pPr>
                       <a:r>
-                        <a:rPr lang="en-US" sz="1100" dirty="0">
+                        <a:rPr lang="en-US" sz="1400" dirty="0">
                           <a:solidFill>
-                            <a:srgbClr val="6E6E6E"/>
+                            <a:srgbClr val="3A3A3A"/>
                           </a:solidFill>
                           <a:latin typeface="Arial" pitchFamily="34" charset="0"/>
                           <a:ea typeface="Arial" pitchFamily="34" charset="-122"/>
                           <a:cs typeface="Arial" pitchFamily="34" charset="-120"/>
                         </a:rPr>
-                        <a:t>6時間先</a:t>
+                        <a:t>0.44</a:t>
                       </a:r>
-                      <a:endParaRPr lang="en-US" sz="1100" dirty="0">
+                      <a:endParaRPr lang="en-US" sz="1400" dirty="0">
                         <a:latin typeface="Arial" charset="0"/>
                         <a:ea typeface="Arial" charset="0"/>
                         <a:cs typeface="Arial" charset="0"/>
                       </a:endParaRPr>
                     </a:p>
                   </a:txBody>
-                  <a:tcPr marL="25400" marR="25400" marT="38100" marB="38100" anchor="ctr">
+                  <a:tcPr marL="25400" marR="25400" marT="63500" marB="63500" anchor="ctr">
                     <a:lnL w="0" cap="flat" cmpd="sng" algn="ctr">
                       <a:noFill/>
                     </a:lnL>
@@ -12052,24 +13120,24 @@
                         <a:buNone/>
                       </a:pPr>
                       <a:r>
-                        <a:rPr lang="en-US" sz="1100" dirty="0">
+                        <a:rPr lang="en-US" sz="1400" dirty="0">
                           <a:solidFill>
-                            <a:srgbClr val="6E6E6E"/>
+                            <a:srgbClr val="3A3A3A"/>
                           </a:solidFill>
                           <a:latin typeface="Arial" pitchFamily="34" charset="0"/>
                           <a:ea typeface="Arial" pitchFamily="34" charset="-122"/>
                           <a:cs typeface="Arial" pitchFamily="34" charset="-120"/>
                         </a:rPr>
-                        <a:t>24時間先</a:t>
+                        <a:t>1.15</a:t>
                       </a:r>
-                      <a:endParaRPr lang="en-US" sz="1100" dirty="0">
+                      <a:endParaRPr lang="en-US" sz="1400" dirty="0">
                         <a:latin typeface="Arial" charset="0"/>
                         <a:ea typeface="Arial" charset="0"/>
                         <a:cs typeface="Arial" charset="0"/>
                       </a:endParaRPr>
                     </a:p>
                   </a:txBody>
-                  <a:tcPr marL="25400" marR="25400" marT="38100" marB="38100" anchor="ctr">
+                  <a:tcPr marL="25400" marR="25400" marT="63500" marB="63500" anchor="ctr">
                     <a:lnL w="0" cap="flat" cmpd="sng" algn="ctr">
                       <a:noFill/>
                     </a:lnL>
@@ -12099,24 +13167,24 @@
                         <a:buNone/>
                       </a:pPr>
                       <a:r>
-                        <a:rPr lang="en-US" sz="1100" dirty="0">
+                        <a:rPr lang="en-US" sz="1400" dirty="0">
                           <a:solidFill>
-                            <a:srgbClr val="6E6E6E"/>
+                            <a:srgbClr val="3A3A3A"/>
                           </a:solidFill>
                           <a:latin typeface="Arial" pitchFamily="34" charset="0"/>
                           <a:ea typeface="Arial" pitchFamily="34" charset="-122"/>
                           <a:cs typeface="Arial" pitchFamily="34" charset="-120"/>
                         </a:rPr>
-                        <a:t>1時間先</a:t>
+                        <a:t>1.63</a:t>
                       </a:r>
-                      <a:endParaRPr lang="en-US" sz="1100" dirty="0">
+                      <a:endParaRPr lang="en-US" sz="1400" dirty="0">
                         <a:latin typeface="Arial" charset="0"/>
                         <a:ea typeface="Arial" charset="0"/>
                         <a:cs typeface="Arial" charset="0"/>
                       </a:endParaRPr>
                     </a:p>
                   </a:txBody>
-                  <a:tcPr marL="25400" marR="25400" marT="38100" marB="38100" anchor="ctr">
+                  <a:tcPr marL="25400" marR="25400" marT="63500" marB="63500" anchor="ctr">
                     <a:lnL w="0" cap="flat" cmpd="sng" algn="ctr">
                       <a:noFill/>
                     </a:lnL>
@@ -12146,24 +13214,24 @@
                         <a:buNone/>
                       </a:pPr>
                       <a:r>
-                        <a:rPr lang="en-US" sz="1100" dirty="0">
+                        <a:rPr lang="en-US" sz="1400" b="1" dirty="0">
                           <a:solidFill>
-                            <a:srgbClr val="6E6E6E"/>
+                            <a:srgbClr val="262626"/>
                           </a:solidFill>
                           <a:latin typeface="Arial" pitchFamily="34" charset="0"/>
                           <a:ea typeface="Arial" pitchFamily="34" charset="-122"/>
                           <a:cs typeface="Arial" pitchFamily="34" charset="-120"/>
                         </a:rPr>
-                        <a:t>6時間先</a:t>
+                        <a:t>0.91</a:t>
                       </a:r>
-                      <a:endParaRPr lang="en-US" sz="1100" dirty="0">
+                      <a:endParaRPr lang="en-US" sz="1400" dirty="0">
                         <a:latin typeface="Arial" charset="0"/>
                         <a:ea typeface="Arial" charset="0"/>
                         <a:cs typeface="Arial" charset="0"/>
                       </a:endParaRPr>
                     </a:p>
                   </a:txBody>
-                  <a:tcPr marL="25400" marR="25400" marT="38100" marB="38100" anchor="ctr">
+                  <a:tcPr marL="25400" marR="25400" marT="63500" marB="63500" anchor="ctr">
                     <a:lnL w="0" cap="flat" cmpd="sng" algn="ctr">
                       <a:noFill/>
                     </a:lnL>
@@ -12193,24 +13261,71 @@
                         <a:buNone/>
                       </a:pPr>
                       <a:r>
-                        <a:rPr lang="en-US" sz="1100" dirty="0">
+                        <a:rPr lang="en-US" sz="1400" dirty="0">
                           <a:solidFill>
-                            <a:srgbClr val="6E6E6E"/>
+                            <a:srgbClr val="3A3A3A"/>
                           </a:solidFill>
                           <a:latin typeface="Arial" pitchFamily="34" charset="0"/>
                           <a:ea typeface="Arial" pitchFamily="34" charset="-122"/>
                           <a:cs typeface="Arial" pitchFamily="34" charset="-120"/>
                         </a:rPr>
-                        <a:t>24時間先</a:t>
+                        <a:t>4.44</a:t>
                       </a:r>
-                      <a:endParaRPr lang="en-US" sz="1100" dirty="0">
+                      <a:endParaRPr lang="en-US" sz="1400" dirty="0">
                         <a:latin typeface="Arial" charset="0"/>
                         <a:ea typeface="Arial" charset="0"/>
                         <a:cs typeface="Arial" charset="0"/>
                       </a:endParaRPr>
                     </a:p>
                   </a:txBody>
-                  <a:tcPr marL="25400" marR="25400" marT="38100" marB="38100" anchor="ctr">
+                  <a:tcPr marL="25400" marR="25400" marT="63500" marB="63500" anchor="ctr">
+                    <a:lnL w="0" cap="flat" cmpd="sng" algn="ctr">
+                      <a:noFill/>
+                    </a:lnL>
+                    <a:lnR w="0" cap="flat" cmpd="sng" algn="ctr">
+                      <a:noFill/>
+                    </a:lnR>
+                    <a:lnT w="0" cap="flat" cmpd="sng" algn="ctr">
+                      <a:noFill/>
+                    </a:lnT>
+                    <a:lnB w="9525" cap="flat" cmpd="sng" algn="ctr">
+                      <a:solidFill>
+                        <a:srgbClr val="D9D9D9"/>
+                      </a:solidFill>
+                      <a:prstDash val="solid"/>
+                      <a:round/>
+                      <a:headEnd type="none" w="med" len="med"/>
+                      <a:tailEnd type="none" w="med" len="med"/>
+                    </a:lnB>
+                  </a:tcPr>
+                </a:tc>
+                <a:tc>
+                  <a:txBody>
+                    <a:bodyPr/>
+                    <a:lstStyle/>
+                    <a:p>
+                      <a:pPr algn="ctr" indent="0" marL="0">
+                        <a:buNone/>
+                      </a:pPr>
+                      <a:r>
+                        <a:rPr lang="en-US" sz="1400" dirty="0">
+                          <a:solidFill>
+                            <a:srgbClr val="3A3A3A"/>
+                          </a:solidFill>
+                          <a:latin typeface="Arial" pitchFamily="34" charset="0"/>
+                          <a:ea typeface="Arial" pitchFamily="34" charset="-122"/>
+                          <a:cs typeface="Arial" pitchFamily="34" charset="-120"/>
+                        </a:rPr>
+                        <a:t>3.19</a:t>
+                      </a:r>
+                      <a:endParaRPr lang="en-US" sz="1400" dirty="0">
+                        <a:latin typeface="Arial" charset="0"/>
+                        <a:ea typeface="Arial" charset="0"/>
+                        <a:cs typeface="Arial" charset="0"/>
+                      </a:endParaRPr>
+                    </a:p>
+                  </a:txBody>
+                  <a:tcPr marL="25400" marR="25400" marT="63500" marB="63500" anchor="ctr">
                     <a:lnL w="0" cap="flat" cmpd="sng" algn="ctr">
                       <a:noFill/>
                     </a:lnL>
@@ -12242,7 +13357,7 @@
                         <a:buNone/>
                       </a:pPr>
                       <a:r>
-                        <a:rPr lang="en-US" sz="1300" b="1" dirty="0">
+                        <a:rPr lang="en-US" sz="1400" b="1" dirty="0">
                           <a:solidFill>
                             <a:srgbClr val="1F4E79"/>
                           </a:solidFill>
@@ -12250,16 +13365,16 @@
                           <a:ea typeface="Arial" pitchFamily="34" charset="-122"/>
                           <a:cs typeface="Arial" pitchFamily="34" charset="-120"/>
                         </a:rPr>
-                        <a:t>持続予測</a:t>
+                        <a:t>前日同時刻</a:t>
                       </a:r>
-                      <a:endParaRPr lang="en-US" sz="1300" dirty="0">
+                      <a:endParaRPr lang="en-US" sz="1400" dirty="0">
                         <a:latin typeface="Arial" charset="0"/>
                         <a:ea typeface="Arial" charset="0"/>
                         <a:cs typeface="Arial" charset="0"/>
                       </a:endParaRPr>
                     </a:p>
                   </a:txBody>
-                  <a:tcPr marL="25400" marR="25400" marT="38100" marB="38100" anchor="ctr">
+                  <a:tcPr marL="25400" marR="25400" marT="63500" marB="63500" anchor="ctr">
                     <a:lnL w="0" cap="flat" cmpd="sng" algn="ctr">
                       <a:noFill/>
                     </a:lnL>
@@ -12289,7 +13404,7 @@
                         <a:buNone/>
                       </a:pPr>
                       <a:r>
-                        <a:rPr lang="en-US" sz="1300" dirty="0">
+                        <a:rPr lang="en-US" sz="1400" dirty="0">
                           <a:solidFill>
                             <a:srgbClr val="3A3A3A"/>
                           </a:solidFill>
@@ -12297,16 +13412,16 @@
                           <a:ea typeface="Arial" pitchFamily="34" charset="-122"/>
                           <a:cs typeface="Arial" pitchFamily="34" charset="-120"/>
                         </a:rPr>
-                        <a:t>0.44</a:t>
+                        <a:t>1.64</a:t>
                       </a:r>
-                      <a:endParaRPr lang="en-US" sz="1300" dirty="0">
+                      <a:endParaRPr lang="en-US" sz="1400" dirty="0">
                         <a:latin typeface="Arial" charset="0"/>
                         <a:ea typeface="Arial" charset="0"/>
                         <a:cs typeface="Arial" charset="0"/>
                       </a:endParaRPr>
                     </a:p>
                   </a:txBody>
-                  <a:tcPr marL="25400" marR="25400" marT="38100" marB="38100" anchor="ctr">
+                  <a:tcPr marL="25400" marR="25400" marT="63500" marB="63500" anchor="ctr">
                     <a:lnL w="0" cap="flat" cmpd="sng" algn="ctr">
                       <a:noFill/>
                     </a:lnL>
@@ -12336,7 +13451,7 @@
                         <a:buNone/>
                       </a:pPr>
                       <a:r>
-                        <a:rPr lang="en-US" sz="1300" dirty="0">
+                        <a:rPr lang="en-US" sz="1400" dirty="0">
                           <a:solidFill>
                             <a:srgbClr val="3A3A3A"/>
                           </a:solidFill>
@@ -12344,16 +13459,16 @@
                           <a:ea typeface="Arial" pitchFamily="34" charset="-122"/>
                           <a:cs typeface="Arial" pitchFamily="34" charset="-120"/>
                         </a:rPr>
-                        <a:t>1.15</a:t>
+                        <a:t>1.64</a:t>
                       </a:r>
-                      <a:endParaRPr lang="en-US" sz="1300" dirty="0">
+                      <a:endParaRPr lang="en-US" sz="1400" dirty="0">
                         <a:latin typeface="Arial" charset="0"/>
                         <a:ea typeface="Arial" charset="0"/>
                         <a:cs typeface="Arial" charset="0"/>
                       </a:endParaRPr>
                     </a:p>
                   </a:txBody>
-                  <a:tcPr marL="25400" marR="25400" marT="38100" marB="38100" anchor="ctr">
+                  <a:tcPr marL="25400" marR="25400" marT="63500" marB="63500" anchor="ctr">
                     <a:lnL w="0" cap="flat" cmpd="sng" algn="ctr">
                       <a:noFill/>
                     </a:lnL>
@@ -12383,7 +13498,7 @@
                         <a:buNone/>
                       </a:pPr>
                       <a:r>
-                        <a:rPr lang="en-US" sz="1300" dirty="0">
+                        <a:rPr lang="en-US" sz="1400" dirty="0">
                           <a:solidFill>
                             <a:srgbClr val="3A3A3A"/>
                           </a:solidFill>
@@ -12393,14 +13508,14 @@
                         </a:rPr>
                         <a:t>1.63</a:t>
                       </a:r>
-                      <a:endParaRPr lang="en-US" sz="1300" dirty="0">
+                      <a:endParaRPr lang="en-US" sz="1400" dirty="0">
                         <a:latin typeface="Arial" charset="0"/>
                         <a:ea typeface="Arial" charset="0"/>
                         <a:cs typeface="Arial" charset="0"/>
                       </a:endParaRPr>
                     </a:p>
                   </a:txBody>
-                  <a:tcPr marL="25400" marR="25400" marT="38100" marB="38100" anchor="ctr">
+                  <a:tcPr marL="25400" marR="25400" marT="63500" marB="63500" anchor="ctr">
                     <a:lnL w="0" cap="flat" cmpd="sng" algn="ctr">
                       <a:noFill/>
                     </a:lnL>
@@ -12430,24 +13545,24 @@
                         <a:buNone/>
                       </a:pPr>
                       <a:r>
-                        <a:rPr lang="en-US" sz="1300" b="1" dirty="0">
+                        <a:rPr lang="en-US" sz="1400" dirty="0">
                           <a:solidFill>
-                            <a:srgbClr val="262626"/>
+                            <a:srgbClr val="3A3A3A"/>
                           </a:solidFill>
                           <a:latin typeface="Arial" pitchFamily="34" charset="0"/>
                           <a:ea typeface="Arial" pitchFamily="34" charset="-122"/>
                           <a:cs typeface="Arial" pitchFamily="34" charset="-120"/>
                         </a:rPr>
-                        <a:t>0.91</a:t>
+                        <a:t>3.21</a:t>
                       </a:r>
-                      <a:endParaRPr lang="en-US" sz="1300" dirty="0">
+                      <a:endParaRPr lang="en-US" sz="1400" dirty="0">
                         <a:latin typeface="Arial" charset="0"/>
                         <a:ea typeface="Arial" charset="0"/>
                         <a:cs typeface="Arial" charset="0"/>
                       </a:endParaRPr>
                     </a:p>
                   </a:txBody>
-                  <a:tcPr marL="25400" marR="25400" marT="38100" marB="38100" anchor="ctr">
+                  <a:tcPr marL="25400" marR="25400" marT="63500" marB="63500" anchor="ctr">
                     <a:lnL w="0" cap="flat" cmpd="sng" algn="ctr">
                       <a:noFill/>
                     </a:lnL>
@@ -12477,7 +13592,7 @@
                         <a:buNone/>
                       </a:pPr>
                       <a:r>
-                        <a:rPr lang="en-US" sz="1300" dirty="0">
+                        <a:rPr lang="en-US" sz="1400" dirty="0">
                           <a:solidFill>
                             <a:srgbClr val="3A3A3A"/>
                           </a:solidFill>
@@ -12485,16 +13600,16 @@
                           <a:ea typeface="Arial" pitchFamily="34" charset="-122"/>
                           <a:cs typeface="Arial" pitchFamily="34" charset="-120"/>
                         </a:rPr>
-                        <a:t>4.44</a:t>
+                        <a:t>3.21</a:t>
                       </a:r>
-                      <a:endParaRPr lang="en-US" sz="1300" dirty="0">
+                      <a:endParaRPr lang="en-US" sz="1400" dirty="0">
                         <a:latin typeface="Arial" charset="0"/>
                         <a:ea typeface="Arial" charset="0"/>
                         <a:cs typeface="Arial" charset="0"/>
                       </a:endParaRPr>
                     </a:p>
                   </a:txBody>
-                  <a:tcPr marL="25400" marR="25400" marT="38100" marB="38100" anchor="ctr">
+                  <a:tcPr marL="25400" marR="25400" marT="63500" marB="63500" anchor="ctr">
                     <a:lnL w="0" cap="flat" cmpd="sng" algn="ctr">
                       <a:noFill/>
                     </a:lnL>
@@ -12524,7 +13639,7 @@
                         <a:buNone/>
                       </a:pPr>
                       <a:r>
-                        <a:rPr lang="en-US" sz="1300" dirty="0">
+                        <a:rPr lang="en-US" sz="1400" dirty="0">
                           <a:solidFill>
                             <a:srgbClr val="3A3A3A"/>
                           </a:solidFill>
@@ -12534,14 +13649,14 @@
                         </a:rPr>
                         <a:t>3.19</a:t>
                       </a:r>
-                      <a:endParaRPr lang="en-US" sz="1300" dirty="0">
+                      <a:endParaRPr lang="en-US" sz="1400" dirty="0">
                         <a:latin typeface="Arial" charset="0"/>
                         <a:ea typeface="Arial" charset="0"/>
                         <a:cs typeface="Arial" charset="0"/>
                       </a:endParaRPr>
                     </a:p>
                   </a:txBody>
-                  <a:tcPr marL="25400" marR="25400" marT="38100" marB="38100" anchor="ctr">
+                  <a:tcPr marL="25400" marR="25400" marT="63500" marB="63500" anchor="ctr">
                     <a:lnL w="0" cap="flat" cmpd="sng" algn="ctr">
                       <a:noFill/>
                     </a:lnL>
@@ -12573,7 +13688,7 @@
                         <a:buNone/>
                       </a:pPr>
                       <a:r>
-                        <a:rPr lang="en-US" sz="1300" b="1" dirty="0">
+                        <a:rPr lang="en-US" sz="1400" b="1" dirty="0">
                           <a:solidFill>
                             <a:srgbClr val="1F4E79"/>
                           </a:solidFill>
@@ -12581,16 +13696,16 @@
                           <a:ea typeface="Arial" pitchFamily="34" charset="-122"/>
                           <a:cs typeface="Arial" pitchFamily="34" charset="-120"/>
                         </a:rPr>
-                        <a:t>前日同時刻</a:t>
+                        <a:t>リッジ回帰</a:t>
                       </a:r>
-                      <a:endParaRPr lang="en-US" sz="1300" dirty="0">
+                      <a:endParaRPr lang="en-US" sz="1400" dirty="0">
                         <a:latin typeface="Arial" charset="0"/>
                         <a:ea typeface="Arial" charset="0"/>
                         <a:cs typeface="Arial" charset="0"/>
                       </a:endParaRPr>
                     </a:p>
                   </a:txBody>
-                  <a:tcPr marL="25400" marR="25400" marT="38100" marB="38100" anchor="ctr">
+                  <a:tcPr marL="25400" marR="25400" marT="63500" marB="63500" anchor="ctr">
                     <a:lnL w="0" cap="flat" cmpd="sng" algn="ctr">
                       <a:noFill/>
                     </a:lnL>
@@ -12620,7 +13735,7 @@
                         <a:buNone/>
                       </a:pPr>
                       <a:r>
-                        <a:rPr lang="en-US" sz="1300" dirty="0">
+                        <a:rPr lang="en-US" sz="1400" dirty="0">
                           <a:solidFill>
                             <a:srgbClr val="3A3A3A"/>
                           </a:solidFill>
@@ -12628,16 +13743,16 @@
                           <a:ea typeface="Arial" pitchFamily="34" charset="-122"/>
                           <a:cs typeface="Arial" pitchFamily="34" charset="-120"/>
                         </a:rPr>
-                        <a:t>1.64</a:t>
+                        <a:t>0.46</a:t>
                       </a:r>
-                      <a:endParaRPr lang="en-US" sz="1300" dirty="0">
+                      <a:endParaRPr lang="en-US" sz="1400" dirty="0">
                         <a:latin typeface="Arial" charset="0"/>
                         <a:ea typeface="Arial" charset="0"/>
                         <a:cs typeface="Arial" charset="0"/>
                       </a:endParaRPr>
                     </a:p>
                   </a:txBody>
-                  <a:tcPr marL="25400" marR="25400" marT="38100" marB="38100" anchor="ctr">
+                  <a:tcPr marL="25400" marR="25400" marT="63500" marB="63500" anchor="ctr">
                     <a:lnL w="0" cap="flat" cmpd="sng" algn="ctr">
                       <a:noFill/>
                     </a:lnL>
@@ -12667,7 +13782,7 @@
                         <a:buNone/>
                       </a:pPr>
                       <a:r>
-                        <a:rPr lang="en-US" sz="1300" dirty="0">
+                        <a:rPr lang="en-US" sz="1400" dirty="0">
                           <a:solidFill>
                             <a:srgbClr val="3A3A3A"/>
                           </a:solidFill>
@@ -12675,16 +13790,16 @@
                           <a:ea typeface="Arial" pitchFamily="34" charset="-122"/>
                           <a:cs typeface="Arial" pitchFamily="34" charset="-120"/>
                         </a:rPr>
-                        <a:t>1.64</a:t>
+                        <a:t>1.16</a:t>
                       </a:r>
-                      <a:endParaRPr lang="en-US" sz="1300" dirty="0">
+                      <a:endParaRPr lang="en-US" sz="1400" dirty="0">
                         <a:latin typeface="Arial" charset="0"/>
                         <a:ea typeface="Arial" charset="0"/>
                         <a:cs typeface="Arial" charset="0"/>
                       </a:endParaRPr>
                     </a:p>
                   </a:txBody>
-                  <a:tcPr marL="25400" marR="25400" marT="38100" marB="38100" anchor="ctr">
+                  <a:tcPr marL="25400" marR="25400" marT="63500" marB="63500" anchor="ctr">
                     <a:lnL w="0" cap="flat" cmpd="sng" algn="ctr">
                       <a:noFill/>
                     </a:lnL>
@@ -12714,7 +13829,7 @@
                         <a:buNone/>
                       </a:pPr>
                       <a:r>
-                        <a:rPr lang="en-US" sz="1300" dirty="0">
+                        <a:rPr lang="en-US" sz="1400" dirty="0">
                           <a:solidFill>
                             <a:srgbClr val="3A3A3A"/>
                           </a:solidFill>
@@ -12722,16 +13837,16 @@
                           <a:ea typeface="Arial" pitchFamily="34" charset="-122"/>
                           <a:cs typeface="Arial" pitchFamily="34" charset="-120"/>
                         </a:rPr>
-                        <a:t>1.63</a:t>
+                        <a:t>1.93</a:t>
                       </a:r>
-                      <a:endParaRPr lang="en-US" sz="1300" dirty="0">
+                      <a:endParaRPr lang="en-US" sz="1400" dirty="0">
                         <a:latin typeface="Arial" charset="0"/>
                         <a:ea typeface="Arial" charset="0"/>
                         <a:cs typeface="Arial" charset="0"/>
                       </a:endParaRPr>
                     </a:p>
                   </a:txBody>
-                  <a:tcPr marL="25400" marR="25400" marT="38100" marB="38100" anchor="ctr">
+                  <a:tcPr marL="25400" marR="25400" marT="63500" marB="63500" anchor="ctr">
                     <a:lnL w="0" cap="flat" cmpd="sng" algn="ctr">
                       <a:noFill/>
                     </a:lnL>
@@ -12761,7 +13876,7 @@
                         <a:buNone/>
                       </a:pPr>
                       <a:r>
-                        <a:rPr lang="en-US" sz="1300" dirty="0">
+                        <a:rPr lang="en-US" sz="1400" dirty="0">
                           <a:solidFill>
                             <a:srgbClr val="3A3A3A"/>
                           </a:solidFill>
@@ -12769,16 +13884,16 @@
                           <a:ea typeface="Arial" pitchFamily="34" charset="-122"/>
                           <a:cs typeface="Arial" pitchFamily="34" charset="-120"/>
                         </a:rPr>
-                        <a:t>3.21</a:t>
+                        <a:t>0.50</a:t>
                       </a:r>
-                      <a:endParaRPr lang="en-US" sz="1300" dirty="0">
+                      <a:endParaRPr lang="en-US" sz="1400" dirty="0">
                         <a:latin typeface="Arial" charset="0"/>
                         <a:ea typeface="Arial" charset="0"/>
                         <a:cs typeface="Arial" charset="0"/>
                       </a:endParaRPr>
                     </a:p>
                   </a:txBody>
-                  <a:tcPr marL="25400" marR="25400" marT="38100" marB="38100" anchor="ctr">
+                  <a:tcPr marL="25400" marR="25400" marT="63500" marB="63500" anchor="ctr">
                     <a:lnL w="0" cap="flat" cmpd="sng" algn="ctr">
                       <a:noFill/>
                     </a:lnL>
@@ -12808,7 +13923,7 @@
                         <a:buNone/>
                       </a:pPr>
                       <a:r>
-                        <a:rPr lang="en-US" sz="1300" dirty="0">
+                        <a:rPr lang="en-US" sz="1400" dirty="0">
                           <a:solidFill>
                             <a:srgbClr val="3A3A3A"/>
                           </a:solidFill>
@@ -12816,16 +13931,16 @@
                           <a:ea typeface="Arial" pitchFamily="34" charset="-122"/>
                           <a:cs typeface="Arial" pitchFamily="34" charset="-120"/>
                         </a:rPr>
-                        <a:t>3.21</a:t>
+                        <a:t>2.37</a:t>
                       </a:r>
-                      <a:endParaRPr lang="en-US" sz="1300" dirty="0">
+                      <a:endParaRPr lang="en-US" sz="1400" dirty="0">
                         <a:latin typeface="Arial" charset="0"/>
                         <a:ea typeface="Arial" charset="0"/>
                         <a:cs typeface="Arial" charset="0"/>
                       </a:endParaRPr>
                     </a:p>
                   </a:txBody>
-                  <a:tcPr marL="25400" marR="25400" marT="38100" marB="38100" anchor="ctr">
+                  <a:tcPr marL="25400" marR="25400" marT="63500" marB="63500" anchor="ctr">
                     <a:lnL w="0" cap="flat" cmpd="sng" algn="ctr">
                       <a:noFill/>
                     </a:lnL>
@@ -12855,7 +13970,7 @@
                         <a:buNone/>
                       </a:pPr>
                       <a:r>
-                        <a:rPr lang="en-US" sz="1300" dirty="0">
+                        <a:rPr lang="en-US" sz="1400" dirty="0">
                           <a:solidFill>
                             <a:srgbClr val="3A3A3A"/>
                           </a:solidFill>
@@ -12863,16 +13978,16 @@
                           <a:ea typeface="Arial" pitchFamily="34" charset="-122"/>
                           <a:cs typeface="Arial" pitchFamily="34" charset="-120"/>
                         </a:rPr>
-                        <a:t>3.19</a:t>
+                        <a:t>3.26</a:t>
                       </a:r>
-                      <a:endParaRPr lang="en-US" sz="1300" dirty="0">
+                      <a:endParaRPr lang="en-US" sz="1400" dirty="0">
                         <a:latin typeface="Arial" charset="0"/>
                         <a:ea typeface="Arial" charset="0"/>
                         <a:cs typeface="Arial" charset="0"/>
                       </a:endParaRPr>
                     </a:p>
                   </a:txBody>
-                  <a:tcPr marL="25400" marR="25400" marT="38100" marB="38100" anchor="ctr">
+                  <a:tcPr marL="25400" marR="25400" marT="63500" marB="63500" anchor="ctr">
                     <a:lnL w="0" cap="flat" cmpd="sng" algn="ctr">
                       <a:noFill/>
                     </a:lnL>
@@ -12904,7 +14019,7 @@
                         <a:buNone/>
                       </a:pPr>
                       <a:r>
-                        <a:rPr lang="en-US" sz="1300" b="1" dirty="0">
+                        <a:rPr lang="en-US" sz="1400" b="1" dirty="0">
                           <a:solidFill>
                             <a:srgbClr val="1F4E79"/>
                           </a:solidFill>
@@ -12912,16 +14027,16 @@
                           <a:ea typeface="Arial" pitchFamily="34" charset="-122"/>
                           <a:cs typeface="Arial" pitchFamily="34" charset="-120"/>
                         </a:rPr>
-                        <a:t>リッジ回帰</a:t>
+                        <a:t>LightGBM</a:t>
                       </a:r>
-                      <a:endParaRPr lang="en-US" sz="1300" dirty="0">
+                      <a:endParaRPr lang="en-US" sz="1400" dirty="0">
                         <a:latin typeface="Arial" charset="0"/>
                         <a:ea typeface="Arial" charset="0"/>
                         <a:cs typeface="Arial" charset="0"/>
                       </a:endParaRPr>
                     </a:p>
                   </a:txBody>
-                  <a:tcPr marL="25400" marR="25400" marT="38100" marB="38100" anchor="ctr">
+                  <a:tcPr marL="25400" marR="25400" marT="63500" marB="63500" anchor="ctr">
                     <a:lnL w="0" cap="flat" cmpd="sng" algn="ctr">
                       <a:noFill/>
                     </a:lnL>
@@ -12951,7 +14066,7 @@
                         <a:buNone/>
                       </a:pPr>
                       <a:r>
-                        <a:rPr lang="en-US" sz="1300" dirty="0">
+                        <a:rPr lang="en-US" sz="1400" dirty="0">
                           <a:solidFill>
                             <a:srgbClr val="3A3A3A"/>
                           </a:solidFill>
@@ -12959,16 +14074,16 @@
                           <a:ea typeface="Arial" pitchFamily="34" charset="-122"/>
                           <a:cs typeface="Arial" pitchFamily="34" charset="-120"/>
                         </a:rPr>
-                        <a:t>0.46</a:t>
+                        <a:t>0.42</a:t>
                       </a:r>
-                      <a:endParaRPr lang="en-US" sz="1300" dirty="0">
+                      <a:endParaRPr lang="en-US" sz="1400" dirty="0">
                         <a:latin typeface="Arial" charset="0"/>
                         <a:ea typeface="Arial" charset="0"/>
                         <a:cs typeface="Arial" charset="0"/>
                       </a:endParaRPr>
                     </a:p>
                   </a:txBody>
-                  <a:tcPr marL="25400" marR="25400" marT="38100" marB="38100" anchor="ctr">
+                  <a:tcPr marL="25400" marR="25400" marT="63500" marB="63500" anchor="ctr">
                     <a:lnL w="0" cap="flat" cmpd="sng" algn="ctr">
                       <a:noFill/>
                     </a:lnL>
@@ -12998,7 +14113,7 @@
                         <a:buNone/>
                       </a:pPr>
                       <a:r>
-                        <a:rPr lang="en-US" sz="1300" dirty="0">
+                        <a:rPr lang="en-US" sz="1400" dirty="0">
                           <a:solidFill>
                             <a:srgbClr val="3A3A3A"/>
                           </a:solidFill>
@@ -13006,16 +14121,16 @@
                           <a:ea typeface="Arial" pitchFamily="34" charset="-122"/>
                           <a:cs typeface="Arial" pitchFamily="34" charset="-120"/>
                         </a:rPr>
-                        <a:t>1.16</a:t>
+                        <a:t>1.11</a:t>
                       </a:r>
-                      <a:endParaRPr lang="en-US" sz="1300" dirty="0">
+                      <a:endParaRPr lang="en-US" sz="1400" dirty="0">
                         <a:latin typeface="Arial" charset="0"/>
                         <a:ea typeface="Arial" charset="0"/>
                         <a:cs typeface="Arial" charset="0"/>
                       </a:endParaRPr>
                     </a:p>
                   </a:txBody>
-                  <a:tcPr marL="25400" marR="25400" marT="38100" marB="38100" anchor="ctr">
+                  <a:tcPr marL="25400" marR="25400" marT="63500" marB="63500" anchor="ctr">
                     <a:lnL w="0" cap="flat" cmpd="sng" algn="ctr">
                       <a:noFill/>
                     </a:lnL>
@@ -13045,7 +14160,7 @@
                         <a:buNone/>
                       </a:pPr>
                       <a:r>
-                        <a:rPr lang="en-US" sz="1300" dirty="0">
+                        <a:rPr lang="en-US" sz="1400" dirty="0">
                           <a:solidFill>
                             <a:srgbClr val="3A3A3A"/>
                           </a:solidFill>
@@ -13053,16 +14168,16 @@
                           <a:ea typeface="Arial" pitchFamily="34" charset="-122"/>
                           <a:cs typeface="Arial" pitchFamily="34" charset="-120"/>
                         </a:rPr>
-                        <a:t>1.93</a:t>
+                        <a:t>1.80</a:t>
                       </a:r>
-                      <a:endParaRPr lang="en-US" sz="1300" dirty="0">
+                      <a:endParaRPr lang="en-US" sz="1400" dirty="0">
                         <a:latin typeface="Arial" charset="0"/>
                         <a:ea typeface="Arial" charset="0"/>
                         <a:cs typeface="Arial" charset="0"/>
                       </a:endParaRPr>
                     </a:p>
                   </a:txBody>
-                  <a:tcPr marL="25400" marR="25400" marT="38100" marB="38100" anchor="ctr">
+                  <a:tcPr marL="25400" marR="25400" marT="63500" marB="63500" anchor="ctr">
                     <a:lnL w="0" cap="flat" cmpd="sng" algn="ctr">
                       <a:noFill/>
                     </a:lnL>
@@ -13092,24 +14207,24 @@
                         <a:buNone/>
                       </a:pPr>
                       <a:r>
-                        <a:rPr lang="en-US" sz="1300" dirty="0">
+                        <a:rPr lang="en-US" sz="1400" b="1" dirty="0">
                           <a:solidFill>
-                            <a:srgbClr val="3A3A3A"/>
+                            <a:srgbClr val="2E75B6"/>
                           </a:solidFill>
                           <a:latin typeface="Arial" pitchFamily="34" charset="0"/>
                           <a:ea typeface="Arial" pitchFamily="34" charset="-122"/>
                           <a:cs typeface="Arial" pitchFamily="34" charset="-120"/>
                         </a:rPr>
-                        <a:t>0.50</a:t>
+                        <a:t>0.37</a:t>
                       </a:r>
-                      <a:endParaRPr lang="en-US" sz="1300" dirty="0">
+                      <a:endParaRPr lang="en-US" sz="1400" dirty="0">
                         <a:latin typeface="Arial" charset="0"/>
                         <a:ea typeface="Arial" charset="0"/>
                         <a:cs typeface="Arial" charset="0"/>
                       </a:endParaRPr>
                     </a:p>
                   </a:txBody>
-                  <a:tcPr marL="25400" marR="25400" marT="38100" marB="38100" anchor="ctr">
+                  <a:tcPr marL="25400" marR="25400" marT="63500" marB="63500" anchor="ctr">
                     <a:lnL w="0" cap="flat" cmpd="sng" algn="ctr">
                       <a:noFill/>
                     </a:lnL>
@@ -13139,7 +14254,7 @@
                         <a:buNone/>
                       </a:pPr>
                       <a:r>
-                        <a:rPr lang="en-US" sz="1300" dirty="0">
+                        <a:rPr lang="en-US" sz="1400" dirty="0">
                           <a:solidFill>
                             <a:srgbClr val="3A3A3A"/>
                           </a:solidFill>
@@ -13147,16 +14262,16 @@
                           <a:ea typeface="Arial" pitchFamily="34" charset="-122"/>
                           <a:cs typeface="Arial" pitchFamily="34" charset="-120"/>
                         </a:rPr>
-                        <a:t>2.37</a:t>
+                        <a:t>1.95</a:t>
                       </a:r>
-                      <a:endParaRPr lang="en-US" sz="1300" dirty="0">
+                      <a:endParaRPr lang="en-US" sz="1400" dirty="0">
                         <a:latin typeface="Arial" charset="0"/>
                         <a:ea typeface="Arial" charset="0"/>
                         <a:cs typeface="Arial" charset="0"/>
                       </a:endParaRPr>
                     </a:p>
                   </a:txBody>
-                  <a:tcPr marL="25400" marR="25400" marT="38100" marB="38100" anchor="ctr">
+                  <a:tcPr marL="25400" marR="25400" marT="63500" marB="63500" anchor="ctr">
                     <a:lnL w="0" cap="flat" cmpd="sng" algn="ctr">
                       <a:noFill/>
                     </a:lnL>
@@ -13186,338 +14301,7 @@
                         <a:buNone/>
                       </a:pPr>
                       <a:r>
-                        <a:rPr lang="en-US" sz="1300" dirty="0">
-                          <a:solidFill>
-                            <a:srgbClr val="3A3A3A"/>
-                          </a:solidFill>
-                          <a:latin typeface="Arial" pitchFamily="34" charset="0"/>
-                          <a:ea typeface="Arial" pitchFamily="34" charset="-122"/>
-                          <a:cs typeface="Arial" pitchFamily="34" charset="-120"/>
-                        </a:rPr>
-                        <a:t>3.26</a:t>
-                      </a:r>
-                      <a:endParaRPr lang="en-US" sz="1300" dirty="0">
-                        <a:latin typeface="Arial" charset="0"/>
-                        <a:ea typeface="Arial" charset="0"/>
-                        <a:cs typeface="Arial" charset="0"/>
-                      </a:endParaRPr>
-                    </a:p>
-                  </a:txBody>
-                  <a:tcPr marL="25400" marR="25400" marT="38100" marB="38100" anchor="ctr">
-                    <a:lnL w="0" cap="flat" cmpd="sng" algn="ctr">
-                      <a:noFill/>
-                    </a:lnL>
-                    <a:lnR w="0" cap="flat" cmpd="sng" algn="ctr">
-                      <a:noFill/>
-                    </a:lnR>
-                    <a:lnT w="0" cap="flat" cmpd="sng" algn="ctr">
-                      <a:noFill/>
-                    </a:lnT>
-                    <a:lnB w="9525" cap="flat" cmpd="sng" algn="ctr">
-                      <a:solidFill>
-                        <a:srgbClr val="D9D9D9"/>
-                      </a:solidFill>
-                      <a:prstDash val="solid"/>
-                      <a:round/>
-                      <a:headEnd type="none" w="med" len="med"/>
-                      <a:tailEnd type="none" w="med" len="med"/>
-                    </a:lnB>
-                  </a:tcPr>
-                </a:tc>
-              </a:tr>
-              <a:tr h="384048">
-                <a:tc>
-                  <a:txBody>
-                    <a:bodyPr/>
-                    <a:lstStyle/>
-                    <a:p>
-                      <a:pPr algn="l" indent="0" marL="0">
-                        <a:buNone/>
-                      </a:pPr>
-                      <a:r>
-                        <a:rPr lang="en-US" sz="1300" b="1" dirty="0">
-                          <a:solidFill>
-                            <a:srgbClr val="1F4E79"/>
-                          </a:solidFill>
-                          <a:latin typeface="Arial" pitchFamily="34" charset="0"/>
-                          <a:ea typeface="Arial" pitchFamily="34" charset="-122"/>
-                          <a:cs typeface="Arial" pitchFamily="34" charset="-120"/>
-                        </a:rPr>
-                        <a:t>LightGBM</a:t>
-                      </a:r>
-                      <a:endParaRPr lang="en-US" sz="1300" dirty="0">
-                        <a:latin typeface="Arial" charset="0"/>
-                        <a:ea typeface="Arial" charset="0"/>
-                        <a:cs typeface="Arial" charset="0"/>
-                      </a:endParaRPr>
-                    </a:p>
-                  </a:txBody>
-                  <a:tcPr marL="25400" marR="25400" marT="38100" marB="38100" anchor="ctr">
-                    <a:lnL w="0" cap="flat" cmpd="sng" algn="ctr">
-                      <a:noFill/>
-                    </a:lnL>
-                    <a:lnR w="0" cap="flat" cmpd="sng" algn="ctr">
-                      <a:noFill/>
-                    </a:lnR>
-                    <a:lnT w="0" cap="flat" cmpd="sng" algn="ctr">
-                      <a:noFill/>
-                    </a:lnT>
-                    <a:lnB w="9525" cap="flat" cmpd="sng" algn="ctr">
-                      <a:solidFill>
-                        <a:srgbClr val="D9D9D9"/>
-                      </a:solidFill>
-                      <a:prstDash val="solid"/>
-                      <a:round/>
-                      <a:headEnd type="none" w="med" len="med"/>
-                      <a:tailEnd type="none" w="med" len="med"/>
-                    </a:lnB>
-                  </a:tcPr>
-                </a:tc>
-                <a:tc>
-                  <a:txBody>
-                    <a:bodyPr/>
-                    <a:lstStyle/>
-                    <a:p>
-                      <a:pPr algn="ctr" indent="0" marL="0">
-                        <a:buNone/>
-                      </a:pPr>
-                      <a:r>
-                        <a:rPr lang="en-US" sz="1300" dirty="0">
-                          <a:solidFill>
-                            <a:srgbClr val="3A3A3A"/>
-                          </a:solidFill>
-                          <a:latin typeface="Arial" pitchFamily="34" charset="0"/>
-                          <a:ea typeface="Arial" pitchFamily="34" charset="-122"/>
-                          <a:cs typeface="Arial" pitchFamily="34" charset="-120"/>
-                        </a:rPr>
-                        <a:t>0.42</a:t>
-                      </a:r>
-                      <a:endParaRPr lang="en-US" sz="1300" dirty="0">
-                        <a:latin typeface="Arial" charset="0"/>
-                        <a:ea typeface="Arial" charset="0"/>
-                        <a:cs typeface="Arial" charset="0"/>
-                      </a:endParaRPr>
-                    </a:p>
-                  </a:txBody>
-                  <a:tcPr marL="25400" marR="25400" marT="38100" marB="38100" anchor="ctr">
-                    <a:lnL w="0" cap="flat" cmpd="sng" algn="ctr">
-                      <a:noFill/>
-                    </a:lnL>
-                    <a:lnR w="0" cap="flat" cmpd="sng" algn="ctr">
-                      <a:noFill/>
-                    </a:lnR>
-                    <a:lnT w="0" cap="flat" cmpd="sng" algn="ctr">
-                      <a:noFill/>
-                    </a:lnT>
-                    <a:lnB w="9525" cap="flat" cmpd="sng" algn="ctr">
-                      <a:solidFill>
-                        <a:srgbClr val="D9D9D9"/>
-                      </a:solidFill>
-                      <a:prstDash val="solid"/>
-                      <a:round/>
-                      <a:headEnd type="none" w="med" len="med"/>
-                      <a:tailEnd type="none" w="med" len="med"/>
-                    </a:lnB>
-                  </a:tcPr>
-                </a:tc>
-                <a:tc>
-                  <a:txBody>
-                    <a:bodyPr/>
-                    <a:lstStyle/>
-                    <a:p>
-                      <a:pPr algn="ctr" indent="0" marL="0">
-                        <a:buNone/>
-                      </a:pPr>
-                      <a:r>
-                        <a:rPr lang="en-US" sz="1300" dirty="0">
-                          <a:solidFill>
-                            <a:srgbClr val="3A3A3A"/>
-                          </a:solidFill>
-                          <a:latin typeface="Arial" pitchFamily="34" charset="0"/>
-                          <a:ea typeface="Arial" pitchFamily="34" charset="-122"/>
-                          <a:cs typeface="Arial" pitchFamily="34" charset="-120"/>
-                        </a:rPr>
-                        <a:t>1.11</a:t>
-                      </a:r>
-                      <a:endParaRPr lang="en-US" sz="1300" dirty="0">
-                        <a:latin typeface="Arial" charset="0"/>
-                        <a:ea typeface="Arial" charset="0"/>
-                        <a:cs typeface="Arial" charset="0"/>
-                      </a:endParaRPr>
-                    </a:p>
-                  </a:txBody>
-                  <a:tcPr marL="25400" marR="25400" marT="38100" marB="38100" anchor="ctr">
-                    <a:lnL w="0" cap="flat" cmpd="sng" algn="ctr">
-                      <a:noFill/>
-                    </a:lnL>
-                    <a:lnR w="0" cap="flat" cmpd="sng" algn="ctr">
-                      <a:noFill/>
-                    </a:lnR>
-                    <a:lnT w="0" cap="flat" cmpd="sng" algn="ctr">
-                      <a:noFill/>
-                    </a:lnT>
-                    <a:lnB w="9525" cap="flat" cmpd="sng" algn="ctr">
-                      <a:solidFill>
-                        <a:srgbClr val="D9D9D9"/>
-                      </a:solidFill>
-                      <a:prstDash val="solid"/>
-                      <a:round/>
-                      <a:headEnd type="none" w="med" len="med"/>
-                      <a:tailEnd type="none" w="med" len="med"/>
-                    </a:lnB>
-                  </a:tcPr>
-                </a:tc>
-                <a:tc>
-                  <a:txBody>
-                    <a:bodyPr/>
-                    <a:lstStyle/>
-                    <a:p>
-                      <a:pPr algn="ctr" indent="0" marL="0">
-                        <a:buNone/>
-                      </a:pPr>
-                      <a:r>
-                        <a:rPr lang="en-US" sz="1300" dirty="0">
-                          <a:solidFill>
-                            <a:srgbClr val="3A3A3A"/>
-                          </a:solidFill>
-                          <a:latin typeface="Arial" pitchFamily="34" charset="0"/>
-                          <a:ea typeface="Arial" pitchFamily="34" charset="-122"/>
-                          <a:cs typeface="Arial" pitchFamily="34" charset="-120"/>
-                        </a:rPr>
-                        <a:t>1.80</a:t>
-                      </a:r>
-                      <a:endParaRPr lang="en-US" sz="1300" dirty="0">
-                        <a:latin typeface="Arial" charset="0"/>
-                        <a:ea typeface="Arial" charset="0"/>
-                        <a:cs typeface="Arial" charset="0"/>
-                      </a:endParaRPr>
-                    </a:p>
-                  </a:txBody>
-                  <a:tcPr marL="25400" marR="25400" marT="38100" marB="38100" anchor="ctr">
-                    <a:lnL w="0" cap="flat" cmpd="sng" algn="ctr">
-                      <a:noFill/>
-                    </a:lnL>
-                    <a:lnR w="0" cap="flat" cmpd="sng" algn="ctr">
-                      <a:noFill/>
-                    </a:lnR>
-                    <a:lnT w="0" cap="flat" cmpd="sng" algn="ctr">
-                      <a:noFill/>
-                    </a:lnT>
-                    <a:lnB w="9525" cap="flat" cmpd="sng" algn="ctr">
-                      <a:solidFill>
-                        <a:srgbClr val="D9D9D9"/>
-                      </a:solidFill>
-                      <a:prstDash val="solid"/>
-                      <a:round/>
-                      <a:headEnd type="none" w="med" len="med"/>
-                      <a:tailEnd type="none" w="med" len="med"/>
-                    </a:lnB>
-                  </a:tcPr>
-                </a:tc>
-                <a:tc>
-                  <a:txBody>
-                    <a:bodyPr/>
-                    <a:lstStyle/>
-                    <a:p>
-                      <a:pPr algn="ctr" indent="0" marL="0">
-                        <a:buNone/>
-                      </a:pPr>
-                      <a:r>
-                        <a:rPr lang="en-US" sz="1300" b="1" dirty="0">
-                          <a:solidFill>
-                            <a:srgbClr val="2E75B6"/>
-                          </a:solidFill>
-                          <a:latin typeface="Arial" pitchFamily="34" charset="0"/>
-                          <a:ea typeface="Arial" pitchFamily="34" charset="-122"/>
-                          <a:cs typeface="Arial" pitchFamily="34" charset="-120"/>
-                        </a:rPr>
-                        <a:t>0.37</a:t>
-                      </a:r>
-                      <a:endParaRPr lang="en-US" sz="1300" dirty="0">
-                        <a:latin typeface="Arial" charset="0"/>
-                        <a:ea typeface="Arial" charset="0"/>
-                        <a:cs typeface="Arial" charset="0"/>
-                      </a:endParaRPr>
-                    </a:p>
-                  </a:txBody>
-                  <a:tcPr marL="25400" marR="25400" marT="38100" marB="38100" anchor="ctr">
-                    <a:lnL w="0" cap="flat" cmpd="sng" algn="ctr">
-                      <a:noFill/>
-                    </a:lnL>
-                    <a:lnR w="0" cap="flat" cmpd="sng" algn="ctr">
-                      <a:noFill/>
-                    </a:lnR>
-                    <a:lnT w="0" cap="flat" cmpd="sng" algn="ctr">
-                      <a:noFill/>
-                    </a:lnT>
-                    <a:lnB w="9525" cap="flat" cmpd="sng" algn="ctr">
-                      <a:solidFill>
-                        <a:srgbClr val="D9D9D9"/>
-                      </a:solidFill>
-                      <a:prstDash val="solid"/>
-                      <a:round/>
-                      <a:headEnd type="none" w="med" len="med"/>
-                      <a:tailEnd type="none" w="med" len="med"/>
-                    </a:lnB>
-                  </a:tcPr>
-                </a:tc>
-                <a:tc>
-                  <a:txBody>
-                    <a:bodyPr/>
-                    <a:lstStyle/>
-                    <a:p>
-                      <a:pPr algn="ctr" indent="0" marL="0">
-                        <a:buNone/>
-                      </a:pPr>
-                      <a:r>
-                        <a:rPr lang="en-US" sz="1300" dirty="0">
-                          <a:solidFill>
-                            <a:srgbClr val="3A3A3A"/>
-                          </a:solidFill>
-                          <a:latin typeface="Arial" pitchFamily="34" charset="0"/>
-                          <a:ea typeface="Arial" pitchFamily="34" charset="-122"/>
-                          <a:cs typeface="Arial" pitchFamily="34" charset="-120"/>
-                        </a:rPr>
-                        <a:t>1.95</a:t>
-                      </a:r>
-                      <a:endParaRPr lang="en-US" sz="1300" dirty="0">
-                        <a:latin typeface="Arial" charset="0"/>
-                        <a:ea typeface="Arial" charset="0"/>
-                        <a:cs typeface="Arial" charset="0"/>
-                      </a:endParaRPr>
-                    </a:p>
-                  </a:txBody>
-                  <a:tcPr marL="25400" marR="25400" marT="38100" marB="38100" anchor="ctr">
-                    <a:lnL w="0" cap="flat" cmpd="sng" algn="ctr">
-                      <a:noFill/>
-                    </a:lnL>
-                    <a:lnR w="0" cap="flat" cmpd="sng" algn="ctr">
-                      <a:noFill/>
-                    </a:lnR>
-                    <a:lnT w="0" cap="flat" cmpd="sng" algn="ctr">
-                      <a:noFill/>
-                    </a:lnT>
-                    <a:lnB w="9525" cap="flat" cmpd="sng" algn="ctr">
-                      <a:solidFill>
-                        <a:srgbClr val="D9D9D9"/>
-                      </a:solidFill>
-                      <a:prstDash val="solid"/>
-                      <a:round/>
-                      <a:headEnd type="none" w="med" len="med"/>
-                      <a:tailEnd type="none" w="med" len="med"/>
-                    </a:lnB>
-                  </a:tcPr>
-                </a:tc>
-                <a:tc>
-                  <a:txBody>
-                    <a:bodyPr/>
-                    <a:lstStyle/>
-                    <a:p>
-                      <a:pPr algn="ctr" indent="0" marL="0">
-                        <a:buNone/>
-                      </a:pPr>
-                      <a:r>
-                        <a:rPr lang="en-US" sz="1300" dirty="0">
+                        <a:rPr lang="en-US" sz="1400" dirty="0">
                           <a:solidFill>
                             <a:srgbClr val="3A3A3A"/>
                           </a:solidFill>
@@ -13527,14 +14311,14 @@
                         </a:rPr>
                         <a:t>3.17</a:t>
                       </a:r>
-                      <a:endParaRPr lang="en-US" sz="1300" dirty="0">
+                      <a:endParaRPr lang="en-US" sz="1400" dirty="0">
                         <a:latin typeface="Arial" charset="0"/>
                         <a:ea typeface="Arial" charset="0"/>
                         <a:cs typeface="Arial" charset="0"/>
                       </a:endParaRPr>
                     </a:p>
                   </a:txBody>
-                  <a:tcPr marL="25400" marR="25400" marT="38100" marB="38100" anchor="ctr">
+                  <a:tcPr marL="25400" marR="25400" marT="63500" marB="63500" anchor="ctr">
                     <a:lnL w="0" cap="flat" cmpd="sng" algn="ctr">
                       <a:noFill/>
                     </a:lnL>
@@ -13569,7 +14353,7 @@
         <p:spPr>
           <a:xfrm>
             <a:off x="6492240" y="1417320"/>
-            <a:ext cx="2194560" cy="2743200"/>
+            <a:ext cx="2194560" cy="707136"/>
           </a:xfrm>
           <a:prstGeom prst="rect">
             <a:avLst/>
@@ -13581,17 +14365,16 @@
           <a:bodyPr wrap="square" lIns="0" tIns="0" rIns="0" bIns="0" rtlCol="0" anchor="t"/>
           <a:lstStyle/>
           <a:p>
-            <a:pPr marL="165100" indent="-165100">
+            <a:pPr algn="l" indent="0" marL="0">
               <a:lnSpc>
                 <a:spcPct val="108000"/>
               </a:lnSpc>
-              <a:buSzPct val="100000"/>
-              <a:buChar char="•"/>
-            </a:pPr>
-            <a:r>
-              <a:rPr lang="en-US" sz="1400" dirty="0">
-                <a:solidFill>
-                  <a:srgbClr val="3A3A3A"/>
+              <a:buNone/>
+            </a:pPr>
+            <a:r>
+              <a:rPr lang="en-US" sz="1400" b="1" dirty="0">
+                <a:solidFill>
+                  <a:srgbClr val="1F4E79"/>
                 </a:solidFill>
                 <a:latin typeface="Arial" pitchFamily="34" charset="0"/>
                 <a:ea typeface="Arial" pitchFamily="34" charset="-122"/>
@@ -13602,57 +14385,96 @@
             <a:endParaRPr lang="en-US" sz="1400" dirty="0"/>
           </a:p>
           <a:p>
-            <a:pPr marL="165100" indent="-165100">
+            <a:pPr algn="l" indent="0" marL="0">
               <a:lnSpc>
                 <a:spcPct val="108000"/>
               </a:lnSpc>
-              <a:spcAft>
-                <a:spcPts val="1200"/>
-              </a:spcAft>
-              <a:buSzPct val="100000"/>
-              <a:buChar char=" "/>
-            </a:pPr>
-            <a:r>
-              <a:rPr lang="en-US" sz="1400" dirty="0">
-                <a:solidFill>
-                  <a:srgbClr val="3A3A3A"/>
-                </a:solidFill>
-                <a:latin typeface="Arial" pitchFamily="34" charset="0"/>
-                <a:ea typeface="Arial" pitchFamily="34" charset="-122"/>
-                <a:cs typeface="Arial" pitchFamily="34" charset="-120"/>
-              </a:rPr>
-              <a:t>0.91℃から0.37℃へ（−59%）</a:t>
+              <a:buNone/>
+            </a:pPr>
+            <a:r>
+              <a:rPr lang="en-US" sz="1400" b="1" dirty="0">
+                <a:solidFill>
+                  <a:srgbClr val="1F4E79"/>
+                </a:solidFill>
+                <a:latin typeface="Arial" pitchFamily="34" charset="0"/>
+                <a:ea typeface="Arial" pitchFamily="34" charset="-122"/>
+                <a:cs typeface="Arial" pitchFamily="34" charset="-120"/>
+              </a:rPr>
+              <a:t>0.91℃から0.37℃へ</a:t>
             </a:r>
             <a:endParaRPr lang="en-US" sz="1400" dirty="0"/>
           </a:p>
           <a:p>
-            <a:pPr marL="165100" indent="-165100">
+            <a:pPr algn="l" indent="0" marL="0">
               <a:lnSpc>
                 <a:spcPct val="108000"/>
               </a:lnSpc>
-              <a:buSzPct val="100000"/>
-              <a:buChar char="•"/>
-            </a:pPr>
-            <a:r>
-              <a:rPr lang="en-US" sz="1400" dirty="0">
-                <a:solidFill>
-                  <a:srgbClr val="3A3A3A"/>
-                </a:solidFill>
-                <a:latin typeface="Arial" pitchFamily="34" charset="0"/>
-                <a:ea typeface="Arial" pitchFamily="34" charset="-122"/>
-                <a:cs typeface="Arial" pitchFamily="34" charset="-120"/>
-              </a:rPr>
-              <a:t>24時間先のLightGBMは</a:t>
+              <a:buNone/>
+            </a:pPr>
+            <a:r>
+              <a:rPr lang="en-US" sz="1400" b="1" dirty="0">
+                <a:solidFill>
+                  <a:srgbClr val="1F4E79"/>
+                </a:solidFill>
+                <a:latin typeface="Arial" pitchFamily="34" charset="0"/>
+                <a:ea typeface="Arial" pitchFamily="34" charset="-122"/>
+                <a:cs typeface="Arial" pitchFamily="34" charset="-120"/>
+              </a:rPr>
+              <a:t>（−59%）</a:t>
             </a:r>
             <a:endParaRPr lang="en-US" sz="1400" dirty="0"/>
           </a:p>
-          <a:p>
-            <a:pPr marL="165100" indent="-165100">
+        </p:txBody>
+      </p:sp>
+      <p:sp>
+        <p:nvSpPr>
+          <p:cNvPr id="7" name="Shape 4"/>
+          <p:cNvSpPr/>
+          <p:nvPr/>
+        </p:nvSpPr>
+        <p:spPr>
+          <a:xfrm>
+            <a:off x="6492240" y="2237232"/>
+            <a:ext cx="2194560" cy="0"/>
+          </a:xfrm>
+          <a:prstGeom prst="line">
+            <a:avLst/>
+          </a:prstGeom>
+          <a:noFill/>
+          <a:ln w="6350">
+            <a:solidFill>
+              <a:srgbClr val="D9D9D9"/>
+            </a:solidFill>
+            <a:prstDash val="solid"/>
+          </a:ln>
+        </p:spPr>
+      </p:sp>
+      <p:sp>
+        <p:nvSpPr>
+          <p:cNvPr id="8" name="Text 5"/>
+          <p:cNvSpPr txBox="1"/>
+          <p:nvPr/>
+        </p:nvSpPr>
+        <p:spPr>
+          <a:xfrm>
+            <a:off x="6492240" y="2350008"/>
+            <a:ext cx="2194560" cy="927608"/>
+          </a:xfrm>
+          <a:prstGeom prst="rect">
+            <a:avLst/>
+          </a:prstGeom>
+          <a:noFill/>
+          <a:ln/>
+        </p:spPr>
+        <p:txBody>
+          <a:bodyPr wrap="square" lIns="0" tIns="0" rIns="0" bIns="0" rtlCol="0" anchor="t"/>
+          <a:lstStyle/>
+          <a:p>
+            <a:pPr algn="l" indent="0" marL="0">
               <a:lnSpc>
                 <a:spcPct val="108000"/>
               </a:lnSpc>
-              <a:buSzPct val="100000"/>
-              <a:buChar char=" "/>
+              <a:buNone/>
             </a:pPr>
             <a:r>
               <a:rPr lang="en-US" sz="1400" dirty="0">
@@ -13663,17 +14485,16 @@
                 <a:ea typeface="Arial" pitchFamily="34" charset="-122"/>
                 <a:cs typeface="Arial" pitchFamily="34" charset="-120"/>
               </a:rPr>
-              <a:t>持続予測に比べて、</a:t>
+              <a:t>24時間先のLightGBMは</a:t>
             </a:r>
             <a:endParaRPr lang="en-US" sz="1400" dirty="0"/>
           </a:p>
           <a:p>
-            <a:pPr marL="165100" indent="-165100">
+            <a:pPr algn="l" indent="0" marL="0">
               <a:lnSpc>
                 <a:spcPct val="108000"/>
               </a:lnSpc>
-              <a:buSzPct val="100000"/>
-              <a:buChar char=" "/>
+              <a:buNone/>
             </a:pPr>
             <a:r>
               <a:rPr lang="en-US" sz="1400" dirty="0">
@@ -13684,20 +14505,16 @@
                 <a:ea typeface="Arial" pitchFamily="34" charset="-122"/>
                 <a:cs typeface="Arial" pitchFamily="34" charset="-120"/>
               </a:rPr>
-              <a:t>設備1で悪化、</a:t>
+              <a:t>持続予測に比べて、</a:t>
             </a:r>
             <a:endParaRPr lang="en-US" sz="1400" dirty="0"/>
           </a:p>
           <a:p>
-            <a:pPr marL="165100" indent="-165100">
+            <a:pPr algn="l" indent="0" marL="0">
               <a:lnSpc>
                 <a:spcPct val="108000"/>
               </a:lnSpc>
-              <a:spcAft>
-                <a:spcPts val="1200"/>
-              </a:spcAft>
-              <a:buSzPct val="100000"/>
-              <a:buChar char=" "/>
+              <a:buNone/>
             </a:pPr>
             <a:r>
               <a:rPr lang="en-US" sz="1400" dirty="0">
@@ -13708,6 +14525,26 @@
                 <a:ea typeface="Arial" pitchFamily="34" charset="-122"/>
                 <a:cs typeface="Arial" pitchFamily="34" charset="-120"/>
               </a:rPr>
+              <a:t>設備1で悪化、</a:t>
+            </a:r>
+            <a:endParaRPr lang="en-US" sz="1400" dirty="0"/>
+          </a:p>
+          <a:p>
+            <a:pPr algn="l" indent="0" marL="0">
+              <a:lnSpc>
+                <a:spcPct val="108000"/>
+              </a:lnSpc>
+              <a:buNone/>
+            </a:pPr>
+            <a:r>
+              <a:rPr lang="en-US" sz="1400" dirty="0">
+                <a:solidFill>
+                  <a:srgbClr val="3A3A3A"/>
+                </a:solidFill>
+                <a:latin typeface="Arial" pitchFamily="34" charset="0"/>
+                <a:ea typeface="Arial" pitchFamily="34" charset="-122"/>
+                <a:cs typeface="Arial" pitchFamily="34" charset="-120"/>
+              </a:rPr>
               <a:t>設備2でほぼ同じ</a:t>
             </a:r>
             <a:endParaRPr lang="en-US" sz="1400" dirty="0"/>
@@ -13716,7 +14553,7 @@
       </p:sp>
       <p:sp>
         <p:nvSpPr>
-          <p:cNvPr id="7" name="Text 4"/>
+          <p:cNvPr id="9" name="Text 6"/>
           <p:cNvSpPr txBox="1"/>
           <p:nvPr/>
         </p:nvSpPr>
@@ -13852,7 +14689,7 @@
               <a:buNone/>
             </a:pPr>
             <a:r>
-              <a:rPr lang="en-US" sz="1200" i="1" dirty="0">
+              <a:rPr lang="en-US" sz="1100" b="1" dirty="0">
                 <a:solidFill>
                   <a:srgbClr val="6E6E6E"/>
                 </a:solidFill>
@@ -13862,7 +14699,7 @@
               </a:rPr>
               <a:t>付録C　見逃した例</a:t>
             </a:r>
-            <a:endParaRPr lang="en-US" sz="1200" dirty="0"/>
+            <a:endParaRPr lang="en-US" sz="1100" dirty="0"/>
           </a:p>
         </p:txBody>
       </p:sp>
@@ -14465,7 +15302,7 @@
         </p:nvSpPr>
         <p:spPr>
           <a:xfrm>
-            <a:off x="3456432" y="4370832"/>
+            <a:off x="3456432" y="4261104"/>
             <a:ext cx="1280160" cy="201168"/>
           </a:xfrm>
           <a:prstGeom prst="rect">
@@ -14600,7 +15437,7 @@
         <p:spPr>
           <a:xfrm>
             <a:off x="6309360" y="1417320"/>
-            <a:ext cx="2377440" cy="3017520"/>
+            <a:ext cx="2377440" cy="486664"/>
           </a:xfrm>
           <a:prstGeom prst="rect">
             <a:avLst/>
@@ -14612,12 +15449,11 @@
           <a:bodyPr wrap="square" lIns="0" tIns="0" rIns="0" bIns="0" rtlCol="0" anchor="t"/>
           <a:lstStyle/>
           <a:p>
-            <a:pPr marL="165100" indent="-165100">
+            <a:pPr algn="l" indent="0" marL="0">
               <a:lnSpc>
                 <a:spcPct val="108000"/>
               </a:lnSpc>
-              <a:buSzPct val="100000"/>
-              <a:buChar char="•"/>
+              <a:buNone/>
             </a:pPr>
             <a:r>
               <a:rPr lang="en-US" sz="1400" dirty="0">
@@ -14633,15 +15469,11 @@
             <a:endParaRPr lang="en-US" sz="1400" dirty="0"/>
           </a:p>
           <a:p>
-            <a:pPr marL="165100" indent="-165100">
+            <a:pPr algn="l" indent="0" marL="0">
               <a:lnSpc>
                 <a:spcPct val="108000"/>
               </a:lnSpc>
-              <a:spcAft>
-                <a:spcPts val="1000"/>
-              </a:spcAft>
-              <a:buSzPct val="100000"/>
-              <a:buChar char=" "/>
+              <a:buNone/>
             </a:pPr>
             <a:r>
               <a:rPr lang="en-US" sz="1400" dirty="0">
@@ -14656,18 +15488,62 @@
             </a:r>
             <a:endParaRPr lang="en-US" sz="1400" dirty="0"/>
           </a:p>
-          <a:p>
-            <a:pPr marL="165100" indent="-165100">
+        </p:txBody>
+      </p:sp>
+      <p:sp>
+        <p:nvSpPr>
+          <p:cNvPr id="24" name="Shape 21"/>
+          <p:cNvSpPr/>
+          <p:nvPr/>
+        </p:nvSpPr>
+        <p:spPr>
+          <a:xfrm>
+            <a:off x="6309360" y="2004060"/>
+            <a:ext cx="2377440" cy="0"/>
+          </a:xfrm>
+          <a:prstGeom prst="line">
+            <a:avLst/>
+          </a:prstGeom>
+          <a:noFill/>
+          <a:ln w="6350">
+            <a:solidFill>
+              <a:srgbClr val="D9D9D9"/>
+            </a:solidFill>
+            <a:prstDash val="solid"/>
+          </a:ln>
+        </p:spPr>
+      </p:sp>
+      <p:sp>
+        <p:nvSpPr>
+          <p:cNvPr id="25" name="Text 22"/>
+          <p:cNvSpPr txBox="1"/>
+          <p:nvPr/>
+        </p:nvSpPr>
+        <p:spPr>
+          <a:xfrm>
+            <a:off x="6309360" y="2104136"/>
+            <a:ext cx="2377440" cy="927608"/>
+          </a:xfrm>
+          <a:prstGeom prst="rect">
+            <a:avLst/>
+          </a:prstGeom>
+          <a:noFill/>
+          <a:ln/>
+        </p:spPr>
+        <p:txBody>
+          <a:bodyPr wrap="square" lIns="0" tIns="0" rIns="0" bIns="0" rtlCol="0" anchor="t"/>
+          <a:lstStyle/>
+          <a:p>
+            <a:pPr algn="l" indent="0" marL="0">
               <a:lnSpc>
                 <a:spcPct val="108000"/>
               </a:lnSpc>
-              <a:buSzPct val="100000"/>
-              <a:buChar char="•"/>
-            </a:pPr>
-            <a:r>
-              <a:rPr lang="en-US" sz="1400" dirty="0">
-                <a:solidFill>
-                  <a:srgbClr val="3A3A3A"/>
+              <a:buNone/>
+            </a:pPr>
+            <a:r>
+              <a:rPr lang="en-US" sz="1400" b="1" dirty="0">
+                <a:solidFill>
+                  <a:srgbClr val="1F4E79"/>
                 </a:solidFill>
                 <a:latin typeface="Arial" pitchFamily="34" charset="0"/>
                 <a:ea typeface="Arial" pitchFamily="34" charset="-122"/>
@@ -14678,17 +15554,16 @@
             <a:endParaRPr lang="en-US" sz="1400" dirty="0"/>
           </a:p>
           <a:p>
-            <a:pPr marL="165100" indent="-165100">
+            <a:pPr algn="l" indent="0" marL="0">
               <a:lnSpc>
                 <a:spcPct val="108000"/>
               </a:lnSpc>
-              <a:buSzPct val="100000"/>
-              <a:buChar char=" "/>
-            </a:pPr>
-            <a:r>
-              <a:rPr lang="en-US" sz="1400" dirty="0">
-                <a:solidFill>
-                  <a:srgbClr val="3A3A3A"/>
+              <a:buNone/>
+            </a:pPr>
+            <a:r>
+              <a:rPr lang="en-US" sz="1400" b="1" dirty="0">
+                <a:solidFill>
+                  <a:srgbClr val="1F4E79"/>
                 </a:solidFill>
                 <a:latin typeface="Arial" pitchFamily="34" charset="0"/>
                 <a:ea typeface="Arial" pitchFamily="34" charset="-122"/>
@@ -14699,17 +15574,16 @@
             <a:endParaRPr lang="en-US" sz="1400" dirty="0"/>
           </a:p>
           <a:p>
-            <a:pPr marL="165100" indent="-165100">
+            <a:pPr algn="l" indent="0" marL="0">
               <a:lnSpc>
                 <a:spcPct val="108000"/>
               </a:lnSpc>
-              <a:buSzPct val="100000"/>
-              <a:buChar char=" "/>
-            </a:pPr>
-            <a:r>
-              <a:rPr lang="en-US" sz="1400" dirty="0">
-                <a:solidFill>
-                  <a:srgbClr val="3A3A3A"/>
+              <a:buNone/>
+            </a:pPr>
+            <a:r>
+              <a:rPr lang="en-US" sz="1400" b="1" dirty="0">
+                <a:solidFill>
+                  <a:srgbClr val="1F4E79"/>
                 </a:solidFill>
                 <a:latin typeface="Arial" pitchFamily="34" charset="0"/>
                 <a:ea typeface="Arial" pitchFamily="34" charset="-122"/>
@@ -14720,20 +15594,16 @@
             <a:endParaRPr lang="en-US" sz="1400" dirty="0"/>
           </a:p>
           <a:p>
-            <a:pPr marL="165100" indent="-165100">
+            <a:pPr algn="l" indent="0" marL="0">
               <a:lnSpc>
                 <a:spcPct val="108000"/>
               </a:lnSpc>
-              <a:spcAft>
-                <a:spcPts val="1000"/>
-              </a:spcAft>
-              <a:buSzPct val="100000"/>
-              <a:buChar char=" "/>
-            </a:pPr>
-            <a:r>
-              <a:rPr lang="en-US" sz="1400" dirty="0">
-                <a:solidFill>
-                  <a:srgbClr val="3A3A3A"/>
+              <a:buNone/>
+            </a:pPr>
+            <a:r>
+              <a:rPr lang="en-US" sz="1400" b="1" dirty="0">
+                <a:solidFill>
+                  <a:srgbClr val="1F4E79"/>
                 </a:solidFill>
                 <a:latin typeface="Arial" pitchFamily="34" charset="0"/>
                 <a:ea typeface="Arial" pitchFamily="34" charset="-122"/>
@@ -14743,13 +15613,57 @@
             </a:r>
             <a:endParaRPr lang="en-US" sz="1400" dirty="0"/>
           </a:p>
-          <a:p>
-            <a:pPr marL="165100" indent="-165100">
+        </p:txBody>
+      </p:sp>
+      <p:sp>
+        <p:nvSpPr>
+          <p:cNvPr id="26" name="Shape 23"/>
+          <p:cNvSpPr/>
+          <p:nvPr/>
+        </p:nvSpPr>
+        <p:spPr>
+          <a:xfrm>
+            <a:off x="6309360" y="3131820"/>
+            <a:ext cx="2377440" cy="0"/>
+          </a:xfrm>
+          <a:prstGeom prst="line">
+            <a:avLst/>
+          </a:prstGeom>
+          <a:noFill/>
+          <a:ln w="6350">
+            <a:solidFill>
+              <a:srgbClr val="D9D9D9"/>
+            </a:solidFill>
+            <a:prstDash val="solid"/>
+          </a:ln>
+        </p:spPr>
+      </p:sp>
+      <p:sp>
+        <p:nvSpPr>
+          <p:cNvPr id="27" name="Text 24"/>
+          <p:cNvSpPr txBox="1"/>
+          <p:nvPr/>
+        </p:nvSpPr>
+        <p:spPr>
+          <a:xfrm>
+            <a:off x="6309360" y="3231896"/>
+            <a:ext cx="2377440" cy="707136"/>
+          </a:xfrm>
+          <a:prstGeom prst="rect">
+            <a:avLst/>
+          </a:prstGeom>
+          <a:noFill/>
+          <a:ln/>
+        </p:spPr>
+        <p:txBody>
+          <a:bodyPr wrap="square" lIns="0" tIns="0" rIns="0" bIns="0" rtlCol="0" anchor="t"/>
+          <a:lstStyle/>
+          <a:p>
+            <a:pPr algn="l" indent="0" marL="0">
               <a:lnSpc>
                 <a:spcPct val="108000"/>
               </a:lnSpc>
-              <a:buSzPct val="100000"/>
-              <a:buChar char="•"/>
+              <a:buNone/>
             </a:pPr>
             <a:r>
               <a:rPr lang="en-US" sz="1400" dirty="0">
@@ -14765,12 +15679,11 @@
             <a:endParaRPr lang="en-US" sz="1400" dirty="0"/>
           </a:p>
           <a:p>
-            <a:pPr marL="165100" indent="-165100">
+            <a:pPr algn="l" indent="0" marL="0">
               <a:lnSpc>
                 <a:spcPct val="108000"/>
               </a:lnSpc>
-              <a:buSzPct val="100000"/>
-              <a:buChar char=" "/>
+              <a:buNone/>
             </a:pPr>
             <a:r>
               <a:rPr lang="en-US" sz="1400" dirty="0">
@@ -14786,15 +15699,11 @@
             <a:endParaRPr lang="en-US" sz="1400" dirty="0"/>
           </a:p>
           <a:p>
-            <a:pPr marL="165100" indent="-165100">
+            <a:pPr algn="l" indent="0" marL="0">
               <a:lnSpc>
                 <a:spcPct val="108000"/>
               </a:lnSpc>
-              <a:spcAft>
-                <a:spcPts val="1000"/>
-              </a:spcAft>
-              <a:buSzPct val="100000"/>
-              <a:buChar char=" "/>
+              <a:buNone/>
             </a:pPr>
             <a:r>
               <a:rPr lang="en-US" sz="1400" dirty="0">
@@ -14813,7 +15722,7 @@
       </p:sp>
       <p:sp>
         <p:nvSpPr>
-          <p:cNvPr id="24" name="Text 21"/>
+          <p:cNvPr id="28" name="Text 25"/>
           <p:cNvSpPr txBox="1"/>
           <p:nvPr/>
         </p:nvSpPr>
@@ -14932,7 +15841,7 @@
         </p:nvSpPr>
         <p:spPr>
           <a:xfrm>
-            <a:off x="457200" y="292608"/>
+            <a:off x="457200" y="310896"/>
             <a:ext cx="8229600" cy="868680"/>
           </a:xfrm>
           <a:prstGeom prst="rect">
@@ -15039,7 +15948,7 @@
                       </a:endParaRPr>
                     </a:p>
                   </a:txBody>
-                  <a:tcPr marL="0" marR="76200" marT="50800" marB="50800" anchor="ctr">
+                  <a:tcPr marL="76200" marR="101600" marT="88900" marB="88900" anchor="ctr">
                     <a:lnL w="0" cap="flat" cmpd="sng" algn="ctr">
                       <a:noFill/>
                     </a:lnL>
@@ -15049,7 +15958,7 @@
                     <a:lnT w="0" cap="flat" cmpd="sng" algn="ctr">
                       <a:noFill/>
                     </a:lnT>
-                    <a:lnB w="9525" cap="flat" cmpd="sng" algn="ctr">
+                    <a:lnB w="6350" cap="flat" cmpd="sng" algn="ctr">
                       <a:solidFill>
                         <a:srgbClr val="D9D9D9"/>
                       </a:solidFill>
@@ -15058,6 +15967,9 @@
                       <a:headEnd type="none" w="med" len="med"/>
                       <a:tailEnd type="none" w="med" len="med"/>
                     </a:lnB>
+                    <a:solidFill>
+                      <a:srgbClr val="FFFFFF"/>
+                    </a:solidFill>
                   </a:tcPr>
                 </a:tc>
                 <a:tc>
@@ -15086,7 +15998,7 @@
                       </a:endParaRPr>
                     </a:p>
                   </a:txBody>
-                  <a:tcPr marL="0" marR="76200" marT="50800" marB="50800" anchor="ctr">
+                  <a:tcPr marL="76200" marR="101600" marT="88900" marB="88900" anchor="ctr">
                     <a:lnL w="0" cap="flat" cmpd="sng" algn="ctr">
                       <a:noFill/>
                     </a:lnL>
@@ -15096,7 +16008,7 @@
                     <a:lnT w="0" cap="flat" cmpd="sng" algn="ctr">
                       <a:noFill/>
                     </a:lnT>
-                    <a:lnB w="9525" cap="flat" cmpd="sng" algn="ctr">
+                    <a:lnB w="6350" cap="flat" cmpd="sng" algn="ctr">
                       <a:solidFill>
                         <a:srgbClr val="D9D9D9"/>
                       </a:solidFill>
@@ -15105,6 +16017,9 @@
                       <a:headEnd type="none" w="med" len="med"/>
                       <a:tailEnd type="none" w="med" len="med"/>
                     </a:lnB>
+                    <a:solidFill>
+                      <a:srgbClr val="FFFFFF"/>
+                    </a:solidFill>
                   </a:tcPr>
                 </a:tc>
               </a:tr>
@@ -15135,7 +16050,7 @@
                       </a:endParaRPr>
                     </a:p>
                   </a:txBody>
-                  <a:tcPr marL="0" marR="76200" marT="50800" marB="50800" anchor="ctr">
+                  <a:tcPr marL="76200" marR="101600" marT="88900" marB="88900" anchor="ctr">
                     <a:lnL w="0" cap="flat" cmpd="sng" algn="ctr">
                       <a:noFill/>
                     </a:lnL>
@@ -15145,7 +16060,7 @@
                     <a:lnT w="0" cap="flat" cmpd="sng" algn="ctr">
                       <a:noFill/>
                     </a:lnT>
-                    <a:lnB w="9525" cap="flat" cmpd="sng" algn="ctr">
+                    <a:lnB w="6350" cap="flat" cmpd="sng" algn="ctr">
                       <a:solidFill>
                         <a:srgbClr val="D9D9D9"/>
                       </a:solidFill>
@@ -15154,6 +16069,9 @@
                       <a:headEnd type="none" w="med" len="med"/>
                       <a:tailEnd type="none" w="med" len="med"/>
                     </a:lnB>
+                    <a:solidFill>
+                      <a:srgbClr val="FFFFFF"/>
+                    </a:solidFill>
                   </a:tcPr>
                 </a:tc>
                 <a:tc>
@@ -15182,7 +16100,7 @@
                       </a:endParaRPr>
                     </a:p>
                   </a:txBody>
-                  <a:tcPr marL="0" marR="76200" marT="50800" marB="50800" anchor="ctr">
+                  <a:tcPr marL="76200" marR="101600" marT="88900" marB="88900" anchor="ctr">
                     <a:lnL w="0" cap="flat" cmpd="sng" algn="ctr">
                       <a:noFill/>
                     </a:lnL>
@@ -15192,7 +16110,7 @@
                     <a:lnT w="0" cap="flat" cmpd="sng" algn="ctr">
                       <a:noFill/>
                     </a:lnT>
-                    <a:lnB w="9525" cap="flat" cmpd="sng" algn="ctr">
+                    <a:lnB w="6350" cap="flat" cmpd="sng" algn="ctr">
                       <a:solidFill>
                         <a:srgbClr val="D9D9D9"/>
                       </a:solidFill>
@@ -15201,6 +16119,9 @@
                       <a:headEnd type="none" w="med" len="med"/>
                       <a:tailEnd type="none" w="med" len="med"/>
                     </a:lnB>
+                    <a:solidFill>
+                      <a:srgbClr val="FFFFFF"/>
+                    </a:solidFill>
                   </a:tcPr>
                 </a:tc>
               </a:tr>
@@ -15231,7 +16152,7 @@
                       </a:endParaRPr>
                     </a:p>
                   </a:txBody>
-                  <a:tcPr marL="0" marR="76200" marT="50800" marB="50800" anchor="ctr">
+                  <a:tcPr marL="76200" marR="101600" marT="88900" marB="88900" anchor="ctr">
                     <a:lnL w="0" cap="flat" cmpd="sng" algn="ctr">
                       <a:noFill/>
                     </a:lnL>
@@ -15241,7 +16162,7 @@
                     <a:lnT w="0" cap="flat" cmpd="sng" algn="ctr">
                       <a:noFill/>
                     </a:lnT>
-                    <a:lnB w="9525" cap="flat" cmpd="sng" algn="ctr">
+                    <a:lnB w="6350" cap="flat" cmpd="sng" algn="ctr">
                       <a:solidFill>
                         <a:srgbClr val="D9D9D9"/>
                       </a:solidFill>
@@ -15250,6 +16171,9 @@
                       <a:headEnd type="none" w="med" len="med"/>
                       <a:tailEnd type="none" w="med" len="med"/>
                     </a:lnB>
+                    <a:solidFill>
+                      <a:srgbClr val="FFFFFF"/>
+                    </a:solidFill>
                   </a:tcPr>
                 </a:tc>
                 <a:tc>
@@ -15278,7 +16202,7 @@
                       </a:endParaRPr>
                     </a:p>
                   </a:txBody>
-                  <a:tcPr marL="0" marR="76200" marT="50800" marB="50800" anchor="ctr">
+                  <a:tcPr marL="76200" marR="101600" marT="88900" marB="88900" anchor="ctr">
                     <a:lnL w="0" cap="flat" cmpd="sng" algn="ctr">
                       <a:noFill/>
                     </a:lnL>
@@ -15288,7 +16212,7 @@
                     <a:lnT w="0" cap="flat" cmpd="sng" algn="ctr">
                       <a:noFill/>
                     </a:lnT>
-                    <a:lnB w="9525" cap="flat" cmpd="sng" algn="ctr">
+                    <a:lnB w="6350" cap="flat" cmpd="sng" algn="ctr">
                       <a:solidFill>
                         <a:srgbClr val="D9D9D9"/>
                       </a:solidFill>
@@ -15297,6 +16221,9 @@
                       <a:headEnd type="none" w="med" len="med"/>
                       <a:tailEnd type="none" w="med" len="med"/>
                     </a:lnB>
+                    <a:solidFill>
+                      <a:srgbClr val="FFFFFF"/>
+                    </a:solidFill>
                   </a:tcPr>
                 </a:tc>
               </a:tr>
@@ -15306,14 +16233,37 @@
       </p:graphicFrame>
       <p:sp>
         <p:nvSpPr>
-          <p:cNvPr id="5" name="Text 2"/>
-          <p:cNvSpPr txBox="1"/>
+          <p:cNvPr id="5" name="Shape 2"/>
+          <p:cNvSpPr/>
           <p:nvPr/>
         </p:nvSpPr>
         <p:spPr>
           <a:xfrm>
-            <a:off x="457200" y="3337560"/>
-            <a:ext cx="8229600" cy="365760"/>
+            <a:off x="457200" y="1417320"/>
+            <a:ext cx="8229600" cy="0"/>
+          </a:xfrm>
+          <a:prstGeom prst="line">
+            <a:avLst/>
+          </a:prstGeom>
+          <a:noFill/>
+          <a:ln w="9525">
+            <a:solidFill>
+              <a:srgbClr val="A6A6A6"/>
+            </a:solidFill>
+            <a:prstDash val="solid"/>
+          </a:ln>
+        </p:spPr>
+      </p:sp>
+      <p:sp>
+        <p:nvSpPr>
+          <p:cNvPr id="6" name="Text 3"/>
+          <p:cNvSpPr txBox="1"/>
+          <p:nvPr/>
+        </p:nvSpPr>
+        <p:spPr>
+          <a:xfrm>
+            <a:off x="530352" y="3401568"/>
+            <a:ext cx="1371600" cy="365760"/>
           </a:xfrm>
           <a:prstGeom prst="rect">
             <a:avLst/>
@@ -15332,7 +16282,7 @@
               <a:buNone/>
             </a:pPr>
             <a:r>
-              <a:rPr lang="en-US" sz="1800" b="1" dirty="0">
+              <a:rPr lang="en-US" sz="1700" b="1" dirty="0">
                 <a:solidFill>
                   <a:srgbClr val="1F4E79"/>
                 </a:solidFill>
@@ -15340,15 +16290,77 @@
                 <a:ea typeface="Arial" pitchFamily="34" charset="-122"/>
                 <a:cs typeface="Arial" pitchFamily="34" charset="-120"/>
               </a:rPr>
-              <a:t>提案：現場へ通知せずに試行し、通知候補の数と外れた数を確かめる</a:t>
-            </a:r>
-            <a:endParaRPr lang="en-US" sz="1800" dirty="0"/>
+              <a:t>提案：</a:t>
+            </a:r>
+            <a:endParaRPr lang="en-US" sz="1700" dirty="0"/>
           </a:p>
         </p:txBody>
       </p:sp>
       <p:sp>
         <p:nvSpPr>
-          <p:cNvPr id="6" name="Text 3"/>
+          <p:cNvPr id="7" name="Text 4"/>
+          <p:cNvSpPr txBox="1"/>
+          <p:nvPr/>
+        </p:nvSpPr>
+        <p:spPr>
+          <a:xfrm>
+            <a:off x="2084832" y="3364992"/>
+            <a:ext cx="6601968" cy="777240"/>
+          </a:xfrm>
+          <a:prstGeom prst="rect">
+            <a:avLst/>
+          </a:prstGeom>
+          <a:noFill/>
+          <a:ln/>
+        </p:spPr>
+        <p:txBody>
+          <a:bodyPr wrap="square" lIns="0" tIns="0" rIns="0" bIns="0" rtlCol="0" anchor="t"/>
+          <a:lstStyle/>
+          <a:p>
+            <a:pPr algn="l" indent="0" marL="0">
+              <a:lnSpc>
+                <a:spcPct val="108000"/>
+              </a:lnSpc>
+              <a:buNone/>
+            </a:pPr>
+            <a:r>
+              <a:rPr lang="en-US" sz="2000" b="1" dirty="0">
+                <a:solidFill>
+                  <a:srgbClr val="1F4E79"/>
+                </a:solidFill>
+                <a:latin typeface="Arial" pitchFamily="34" charset="0"/>
+                <a:ea typeface="Arial" pitchFamily="34" charset="-122"/>
+                <a:cs typeface="Arial" pitchFamily="34" charset="-120"/>
+              </a:rPr>
+              <a:t>現場へ通知せずに試行し、</a:t>
+            </a:r>
+            <a:endParaRPr lang="en-US" sz="2000" dirty="0"/>
+          </a:p>
+          <a:p>
+            <a:pPr algn="l" indent="0" marL="0">
+              <a:lnSpc>
+                <a:spcPct val="108000"/>
+              </a:lnSpc>
+              <a:buNone/>
+            </a:pPr>
+            <a:r>
+              <a:rPr lang="en-US" sz="2000" b="1" dirty="0">
+                <a:solidFill>
+                  <a:srgbClr val="1F4E79"/>
+                </a:solidFill>
+                <a:latin typeface="Arial" pitchFamily="34" charset="0"/>
+                <a:ea typeface="Arial" pitchFamily="34" charset="-122"/>
+                <a:cs typeface="Arial" pitchFamily="34" charset="-120"/>
+              </a:rPr>
+              <a:t>通知候補の数と外れた数を確かめる</a:t>
+            </a:r>
+            <a:endParaRPr lang="en-US" sz="2000" dirty="0"/>
+          </a:p>
+        </p:txBody>
+      </p:sp>
+      <p:sp>
+        <p:nvSpPr>
+          <p:cNvPr id="8" name="Text 5"/>
           <p:cNvSpPr txBox="1"/>
           <p:nvPr/>
         </p:nvSpPr>
@@ -15484,7 +16496,7 @@
               <a:buNone/>
             </a:pPr>
             <a:r>
-              <a:rPr lang="en-US" sz="1200" i="1" dirty="0">
+              <a:rPr lang="en-US" sz="1100" b="1" dirty="0">
                 <a:solidFill>
                   <a:srgbClr val="6E6E6E"/>
                 </a:solidFill>
@@ -15494,7 +16506,7 @@
               </a:rPr>
               <a:t>付録D　高温検知の数え方</a:t>
             </a:r>
-            <a:endParaRPr lang="en-US" sz="1200" dirty="0"/>
+            <a:endParaRPr lang="en-US" sz="1100" dirty="0"/>
           </a:p>
         </p:txBody>
       </p:sp>
@@ -15593,7 +16605,7 @@
                       </a:endParaRPr>
                     </a:p>
                   </a:txBody>
-                  <a:tcPr marL="0" marR="76200" marT="50800" marB="50800" anchor="ctr">
+                  <a:tcPr marL="76200" marR="101600" marT="88900" marB="88900" anchor="ctr">
                     <a:lnL w="0" cap="flat" cmpd="sng" algn="ctr">
                       <a:noFill/>
                     </a:lnL>
@@ -15603,7 +16615,7 @@
                     <a:lnT w="0" cap="flat" cmpd="sng" algn="ctr">
                       <a:noFill/>
                     </a:lnT>
-                    <a:lnB w="9525" cap="flat" cmpd="sng" algn="ctr">
+                    <a:lnB w="6350" cap="flat" cmpd="sng" algn="ctr">
                       <a:solidFill>
                         <a:srgbClr val="D9D9D9"/>
                       </a:solidFill>
@@ -15612,6 +16624,9 @@
                       <a:headEnd type="none" w="med" len="med"/>
                       <a:tailEnd type="none" w="med" len="med"/>
                     </a:lnB>
+                    <a:solidFill>
+                      <a:srgbClr val="FFFFFF"/>
+                    </a:solidFill>
                   </a:tcPr>
                 </a:tc>
                 <a:tc>
@@ -15640,7 +16655,7 @@
                       </a:endParaRPr>
                     </a:p>
                   </a:txBody>
-                  <a:tcPr marL="0" marR="76200" marT="50800" marB="50800" anchor="ctr">
+                  <a:tcPr marL="76200" marR="101600" marT="88900" marB="88900" anchor="ctr">
                     <a:lnL w="0" cap="flat" cmpd="sng" algn="ctr">
                       <a:noFill/>
                     </a:lnL>
@@ -15650,7 +16665,7 @@
                     <a:lnT w="0" cap="flat" cmpd="sng" algn="ctr">
                       <a:noFill/>
                     </a:lnT>
-                    <a:lnB w="9525" cap="flat" cmpd="sng" algn="ctr">
+                    <a:lnB w="6350" cap="flat" cmpd="sng" algn="ctr">
                       <a:solidFill>
                         <a:srgbClr val="D9D9D9"/>
                       </a:solidFill>
@@ -15659,6 +16674,9 @@
                       <a:headEnd type="none" w="med" len="med"/>
                       <a:tailEnd type="none" w="med" len="med"/>
                     </a:lnB>
+                    <a:solidFill>
+                      <a:srgbClr val="FFFFFF"/>
+                    </a:solidFill>
                   </a:tcPr>
                 </a:tc>
               </a:tr>
@@ -15689,7 +16707,7 @@
                       </a:endParaRPr>
                     </a:p>
                   </a:txBody>
-                  <a:tcPr marL="0" marR="76200" marT="50800" marB="50800" anchor="ctr">
+                  <a:tcPr marL="76200" marR="101600" marT="88900" marB="88900" anchor="ctr">
                     <a:lnL w="0" cap="flat" cmpd="sng" algn="ctr">
                       <a:noFill/>
                     </a:lnL>
@@ -15699,7 +16717,7 @@
                     <a:lnT w="0" cap="flat" cmpd="sng" algn="ctr">
                       <a:noFill/>
                     </a:lnT>
-                    <a:lnB w="9525" cap="flat" cmpd="sng" algn="ctr">
+                    <a:lnB w="6350" cap="flat" cmpd="sng" algn="ctr">
                       <a:solidFill>
                         <a:srgbClr val="D9D9D9"/>
                       </a:solidFill>
@@ -15708,6 +16726,9 @@
                       <a:headEnd type="none" w="med" len="med"/>
                       <a:tailEnd type="none" w="med" len="med"/>
                     </a:lnB>
+                    <a:solidFill>
+                      <a:srgbClr val="FFFFFF"/>
+                    </a:solidFill>
                   </a:tcPr>
                 </a:tc>
                 <a:tc>
@@ -15757,7 +16778,7 @@
                       </a:endParaRPr>
                     </a:p>
                   </a:txBody>
-                  <a:tcPr marL="0" marR="76200" marT="50800" marB="50800" anchor="ctr">
+                  <a:tcPr marL="76200" marR="101600" marT="88900" marB="88900" anchor="ctr">
                     <a:lnL w="0" cap="flat" cmpd="sng" algn="ctr">
                       <a:noFill/>
                     </a:lnL>
@@ -15767,7 +16788,7 @@
                     <a:lnT w="0" cap="flat" cmpd="sng" algn="ctr">
                       <a:noFill/>
                     </a:lnT>
-                    <a:lnB w="9525" cap="flat" cmpd="sng" algn="ctr">
+                    <a:lnB w="6350" cap="flat" cmpd="sng" algn="ctr">
                       <a:solidFill>
                         <a:srgbClr val="D9D9D9"/>
                       </a:solidFill>
@@ -15776,6 +16797,9 @@
                       <a:headEnd type="none" w="med" len="med"/>
                       <a:tailEnd type="none" w="med" len="med"/>
                     </a:lnB>
+                    <a:solidFill>
+                      <a:srgbClr val="FFFFFF"/>
+                    </a:solidFill>
                   </a:tcPr>
                 </a:tc>
               </a:tr>
@@ -15806,7 +16830,7 @@
                       </a:endParaRPr>
                     </a:p>
                   </a:txBody>
-                  <a:tcPr marL="0" marR="76200" marT="50800" marB="50800" anchor="ctr">
+                  <a:tcPr marL="76200" marR="101600" marT="88900" marB="88900" anchor="ctr">
                     <a:lnL w="0" cap="flat" cmpd="sng" algn="ctr">
                       <a:noFill/>
                     </a:lnL>
@@ -15816,7 +16840,7 @@
                     <a:lnT w="0" cap="flat" cmpd="sng" algn="ctr">
                       <a:noFill/>
                     </a:lnT>
-                    <a:lnB w="9525" cap="flat" cmpd="sng" algn="ctr">
+                    <a:lnB w="6350" cap="flat" cmpd="sng" algn="ctr">
                       <a:solidFill>
                         <a:srgbClr val="D9D9D9"/>
                       </a:solidFill>
@@ -15825,6 +16849,9 @@
                       <a:headEnd type="none" w="med" len="med"/>
                       <a:tailEnd type="none" w="med" len="med"/>
                     </a:lnB>
+                    <a:solidFill>
+                      <a:srgbClr val="FFFFFF"/>
+                    </a:solidFill>
                   </a:tcPr>
                 </a:tc>
                 <a:tc>
@@ -15844,7 +16871,28 @@
                           <a:ea typeface="Arial" pitchFamily="34" charset="-122"/>
                           <a:cs typeface="Arial" pitchFamily="34" charset="-120"/>
                         </a:rPr>
-                        <a:t>予測時点で閾値以下のときに出た警報のうち、連続するものを1件と数える</a:t>
+                        <a:t>予測時点で閾値以下のときに出た警報のうち、</a:t>
+                      </a:r>
+                      <a:endParaRPr lang="en-US" sz="1500" dirty="0">
+                        <a:latin typeface="Arial" charset="0"/>
+                        <a:ea typeface="Arial" charset="0"/>
+                        <a:cs typeface="Arial" charset="0"/>
+                      </a:endParaRPr>
+                    </a:p>
+                    <a:p>
+                      <a:pPr algn="l" indent="0" marL="0">
+                        <a:buNone/>
+                      </a:pPr>
+                      <a:r>
+                        <a:rPr lang="en-US" sz="1500" dirty="0">
+                          <a:solidFill>
+                            <a:srgbClr val="3A3A3A"/>
+                          </a:solidFill>
+                          <a:latin typeface="Arial" pitchFamily="34" charset="0"/>
+                          <a:ea typeface="Arial" pitchFamily="34" charset="-122"/>
+                          <a:cs typeface="Arial" pitchFamily="34" charset="-120"/>
+                        </a:rPr>
+                        <a:t>連続するものを1件と数える</a:t>
                       </a:r>
                       <a:endParaRPr lang="en-US" sz="1500" dirty="0">
                         <a:latin typeface="Arial" charset="0"/>
@@ -15853,7 +16901,7 @@
                       </a:endParaRPr>
                     </a:p>
                   </a:txBody>
-                  <a:tcPr marL="0" marR="76200" marT="50800" marB="50800" anchor="ctr">
+                  <a:tcPr marL="76200" marR="101600" marT="88900" marB="88900" anchor="ctr">
                     <a:lnL w="0" cap="flat" cmpd="sng" algn="ctr">
                       <a:noFill/>
                     </a:lnL>
@@ -15863,7 +16911,7 @@
                     <a:lnT w="0" cap="flat" cmpd="sng" algn="ctr">
                       <a:noFill/>
                     </a:lnT>
-                    <a:lnB w="9525" cap="flat" cmpd="sng" algn="ctr">
+                    <a:lnB w="6350" cap="flat" cmpd="sng" algn="ctr">
                       <a:solidFill>
                         <a:srgbClr val="D9D9D9"/>
                       </a:solidFill>
@@ -15872,6 +16920,9 @@
                       <a:headEnd type="none" w="med" len="med"/>
                       <a:tailEnd type="none" w="med" len="med"/>
                     </a:lnB>
+                    <a:solidFill>
+                      <a:srgbClr val="FFFFFF"/>
+                    </a:solidFill>
                   </a:tcPr>
                 </a:tc>
               </a:tr>
@@ -15902,7 +16953,7 @@
                       </a:endParaRPr>
                     </a:p>
                   </a:txBody>
-                  <a:tcPr marL="0" marR="76200" marT="50800" marB="50800" anchor="ctr">
+                  <a:tcPr marL="76200" marR="101600" marT="88900" marB="88900" anchor="ctr">
                     <a:lnL w="0" cap="flat" cmpd="sng" algn="ctr">
                       <a:noFill/>
                     </a:lnL>
@@ -15912,7 +16963,7 @@
                     <a:lnT w="0" cap="flat" cmpd="sng" algn="ctr">
                       <a:noFill/>
                     </a:lnT>
-                    <a:lnB w="9525" cap="flat" cmpd="sng" algn="ctr">
+                    <a:lnB w="6350" cap="flat" cmpd="sng" algn="ctr">
                       <a:solidFill>
                         <a:srgbClr val="D9D9D9"/>
                       </a:solidFill>
@@ -15921,6 +16972,9 @@
                       <a:headEnd type="none" w="med" len="med"/>
                       <a:tailEnd type="none" w="med" len="med"/>
                     </a:lnB>
+                    <a:solidFill>
+                      <a:srgbClr val="FFFFFF"/>
+                    </a:solidFill>
                   </a:tcPr>
                 </a:tc>
                 <a:tc>
@@ -15970,7 +17024,7 @@
                       </a:endParaRPr>
                     </a:p>
                   </a:txBody>
-                  <a:tcPr marL="0" marR="76200" marT="50800" marB="50800" anchor="ctr">
+                  <a:tcPr marL="76200" marR="101600" marT="88900" marB="88900" anchor="ctr">
                     <a:lnL w="0" cap="flat" cmpd="sng" algn="ctr">
                       <a:noFill/>
                     </a:lnL>
@@ -15980,7 +17034,7 @@
                     <a:lnT w="0" cap="flat" cmpd="sng" algn="ctr">
                       <a:noFill/>
                     </a:lnT>
-                    <a:lnB w="9525" cap="flat" cmpd="sng" algn="ctr">
+                    <a:lnB w="6350" cap="flat" cmpd="sng" algn="ctr">
                       <a:solidFill>
                         <a:srgbClr val="D9D9D9"/>
                       </a:solidFill>
@@ -15989,6 +17043,9 @@
                       <a:headEnd type="none" w="med" len="med"/>
                       <a:tailEnd type="none" w="med" len="med"/>
                     </a:lnB>
+                    <a:solidFill>
+                      <a:srgbClr val="FFFFFF"/>
+                    </a:solidFill>
                   </a:tcPr>
                 </a:tc>
               </a:tr>
@@ -16019,7 +17076,7 @@
                       </a:endParaRPr>
                     </a:p>
                   </a:txBody>
-                  <a:tcPr marL="0" marR="76200" marT="50800" marB="50800" anchor="ctr">
+                  <a:tcPr marL="76200" marR="101600" marT="88900" marB="88900" anchor="ctr">
                     <a:lnL w="0" cap="flat" cmpd="sng" algn="ctr">
                       <a:noFill/>
                     </a:lnL>
@@ -16029,7 +17086,7 @@
                     <a:lnT w="0" cap="flat" cmpd="sng" algn="ctr">
                       <a:noFill/>
                     </a:lnT>
-                    <a:lnB w="9525" cap="flat" cmpd="sng" algn="ctr">
+                    <a:lnB w="6350" cap="flat" cmpd="sng" algn="ctr">
                       <a:solidFill>
                         <a:srgbClr val="D9D9D9"/>
                       </a:solidFill>
@@ -16038,6 +17095,9 @@
                       <a:headEnd type="none" w="med" len="med"/>
                       <a:tailEnd type="none" w="med" len="med"/>
                     </a:lnB>
+                    <a:solidFill>
+                      <a:srgbClr val="FFFFFF"/>
+                    </a:solidFill>
                   </a:tcPr>
                 </a:tc>
                 <a:tc>
@@ -16087,7 +17147,7 @@
                       </a:endParaRPr>
                     </a:p>
                   </a:txBody>
-                  <a:tcPr marL="0" marR="76200" marT="50800" marB="50800" anchor="ctr">
+                  <a:tcPr marL="76200" marR="101600" marT="88900" marB="88900" anchor="ctr">
                     <a:lnL w="0" cap="flat" cmpd="sng" algn="ctr">
                       <a:noFill/>
                     </a:lnL>
@@ -16097,7 +17157,7 @@
                     <a:lnT w="0" cap="flat" cmpd="sng" algn="ctr">
                       <a:noFill/>
                     </a:lnT>
-                    <a:lnB w="9525" cap="flat" cmpd="sng" algn="ctr">
+                    <a:lnB w="6350" cap="flat" cmpd="sng" algn="ctr">
                       <a:solidFill>
                         <a:srgbClr val="D9D9D9"/>
                       </a:solidFill>
@@ -16106,6 +17166,9 @@
                       <a:headEnd type="none" w="med" len="med"/>
                       <a:tailEnd type="none" w="med" len="med"/>
                     </a:lnB>
+                    <a:solidFill>
+                      <a:srgbClr val="FFFFFF"/>
+                    </a:solidFill>
                   </a:tcPr>
                 </a:tc>
               </a:tr>
@@ -16115,7 +17178,30 @@
       </p:graphicFrame>
       <p:sp>
         <p:nvSpPr>
-          <p:cNvPr id="6" name="Text 3"/>
+          <p:cNvPr id="6" name="Shape 3"/>
+          <p:cNvSpPr/>
+          <p:nvPr/>
+        </p:nvSpPr>
+        <p:spPr>
+          <a:xfrm>
+            <a:off x="457200" y="1280160"/>
+            <a:ext cx="8229600" cy="0"/>
+          </a:xfrm>
+          <a:prstGeom prst="line">
+            <a:avLst/>
+          </a:prstGeom>
+          <a:noFill/>
+          <a:ln w="9525">
+            <a:solidFill>
+              <a:srgbClr val="A6A6A6"/>
+            </a:solidFill>
+            <a:prstDash val="solid"/>
+          </a:ln>
+        </p:spPr>
+      </p:sp>
+      <p:sp>
+        <p:nvSpPr>
+          <p:cNvPr id="7" name="Text 4"/>
           <p:cNvSpPr txBox="1"/>
           <p:nvPr/>
         </p:nvSpPr>
@@ -16251,7 +17337,7 @@
               <a:buNone/>
             </a:pPr>
             <a:r>
-              <a:rPr lang="en-US" sz="1200" i="1" dirty="0">
+              <a:rPr lang="en-US" sz="1100" b="1" dirty="0">
                 <a:solidFill>
                   <a:srgbClr val="6E6E6E"/>
                 </a:solidFill>
@@ -16261,7 +17347,7 @@
               </a:rPr>
               <a:t>付録E　高温の基準を上位10%にした場合</a:t>
             </a:r>
-            <a:endParaRPr lang="en-US" sz="1200" dirty="0"/>
+            <a:endParaRPr lang="en-US" sz="1100" dirty="0"/>
           </a:p>
         </p:txBody>
       </p:sp>
@@ -16364,9 +17450,9 @@
                         <a:buNone/>
                       </a:pPr>
                       <a:r>
-                        <a:rPr lang="en-US" sz="1100" dirty="0">
+                        <a:rPr lang="en-US" sz="1200" b="1" dirty="0">
                           <a:solidFill>
-                            <a:srgbClr val="6E6E6E"/>
+                            <a:srgbClr val="1F4E79"/>
                           </a:solidFill>
                           <a:latin typeface="Arial" pitchFamily="34" charset="0"/>
                           <a:ea typeface="Arial" pitchFamily="34" charset="-122"/>
@@ -16374,14 +17460,14 @@
                         </a:rPr>
                         <a:t>設備2・6時間先</a:t>
                       </a:r>
-                      <a:endParaRPr lang="en-US" sz="1100" dirty="0">
+                      <a:endParaRPr lang="en-US" sz="1200" dirty="0">
                         <a:latin typeface="Arial" charset="0"/>
                         <a:ea typeface="Arial" charset="0"/>
                         <a:cs typeface="Arial" charset="0"/>
                       </a:endParaRPr>
                     </a:p>
                   </a:txBody>
-                  <a:tcPr marL="0" marR="76200" marT="50800" marB="50800" anchor="ctr">
+                  <a:tcPr marL="76200" marR="101600" marT="88900" marB="88900" anchor="ctr">
                     <a:lnL w="0" cap="flat" cmpd="sng" algn="ctr">
                       <a:noFill/>
                     </a:lnL>
@@ -16391,15 +17477,18 @@
                     <a:lnT w="0" cap="flat" cmpd="sng" algn="ctr">
                       <a:noFill/>
                     </a:lnT>
-                    <a:lnB w="9525" cap="flat" cmpd="sng" algn="ctr">
+                    <a:lnB w="12700" cap="flat" cmpd="sng" algn="ctr">
                       <a:solidFill>
-                        <a:srgbClr val="D9D9D9"/>
+                        <a:srgbClr val="1F4E79"/>
                       </a:solidFill>
                       <a:prstDash val="solid"/>
                       <a:round/>
                       <a:headEnd type="none" w="med" len="med"/>
                       <a:tailEnd type="none" w="med" len="med"/>
                     </a:lnB>
+                    <a:solidFill>
+                      <a:srgbClr val="F2F2F2"/>
+                    </a:solidFill>
                   </a:tcPr>
                 </a:tc>
                 <a:tc>
@@ -16411,9 +17500,9 @@
                         <a:buNone/>
                       </a:pPr>
                       <a:r>
-                        <a:rPr lang="en-US" sz="1100" dirty="0">
+                        <a:rPr lang="en-US" sz="1200" b="1" dirty="0">
                           <a:solidFill>
-                            <a:srgbClr val="6E6E6E"/>
+                            <a:srgbClr val="1F4E79"/>
                           </a:solidFill>
                           <a:latin typeface="Arial" pitchFamily="34" charset="0"/>
                           <a:ea typeface="Arial" pitchFamily="34" charset="-122"/>
@@ -16421,14 +17510,14 @@
                         </a:rPr>
                         <a:t>上位5%（46.4℃）</a:t>
                       </a:r>
-                      <a:endParaRPr lang="en-US" sz="1100" dirty="0">
+                      <a:endParaRPr lang="en-US" sz="1200" dirty="0">
                         <a:latin typeface="Arial" charset="0"/>
                         <a:ea typeface="Arial" charset="0"/>
                         <a:cs typeface="Arial" charset="0"/>
                       </a:endParaRPr>
                     </a:p>
                   </a:txBody>
-                  <a:tcPr marL="0" marR="76200" marT="50800" marB="50800" anchor="ctr">
+                  <a:tcPr marL="76200" marR="101600" marT="88900" marB="88900" anchor="ctr">
                     <a:lnL w="0" cap="flat" cmpd="sng" algn="ctr">
                       <a:noFill/>
                     </a:lnL>
@@ -16438,15 +17527,18 @@
                     <a:lnT w="0" cap="flat" cmpd="sng" algn="ctr">
                       <a:noFill/>
                     </a:lnT>
-                    <a:lnB w="9525" cap="flat" cmpd="sng" algn="ctr">
+                    <a:lnB w="12700" cap="flat" cmpd="sng" algn="ctr">
                       <a:solidFill>
-                        <a:srgbClr val="D9D9D9"/>
+                        <a:srgbClr val="1F4E79"/>
                       </a:solidFill>
                       <a:prstDash val="solid"/>
                       <a:round/>
                       <a:headEnd type="none" w="med" len="med"/>
                       <a:tailEnd type="none" w="med" len="med"/>
                     </a:lnB>
+                    <a:solidFill>
+                      <a:srgbClr val="F2F2F2"/>
+                    </a:solidFill>
                   </a:tcPr>
                 </a:tc>
                 <a:tc>
@@ -16458,9 +17550,9 @@
                         <a:buNone/>
                       </a:pPr>
                       <a:r>
-                        <a:rPr lang="en-US" sz="1100" dirty="0">
+                        <a:rPr lang="en-US" sz="1200" b="1" dirty="0">
                           <a:solidFill>
-                            <a:srgbClr val="6E6E6E"/>
+                            <a:srgbClr val="1F4E79"/>
                           </a:solidFill>
                           <a:latin typeface="Arial" pitchFamily="34" charset="0"/>
                           <a:ea typeface="Arial" pitchFamily="34" charset="-122"/>
@@ -16468,14 +17560,14 @@
                         </a:rPr>
                         <a:t>上位10%（43.1℃）</a:t>
                       </a:r>
-                      <a:endParaRPr lang="en-US" sz="1100" dirty="0">
+                      <a:endParaRPr lang="en-US" sz="1200" dirty="0">
                         <a:latin typeface="Arial" charset="0"/>
                         <a:ea typeface="Arial" charset="0"/>
                         <a:cs typeface="Arial" charset="0"/>
                       </a:endParaRPr>
                     </a:p>
                   </a:txBody>
-                  <a:tcPr marL="0" marR="76200" marT="50800" marB="50800" anchor="ctr">
+                  <a:tcPr marL="76200" marR="101600" marT="88900" marB="88900" anchor="ctr">
                     <a:lnL w="0" cap="flat" cmpd="sng" algn="ctr">
                       <a:noFill/>
                     </a:lnL>
@@ -16485,15 +17577,18 @@
                     <a:lnT w="0" cap="flat" cmpd="sng" algn="ctr">
                       <a:noFill/>
                     </a:lnT>
-                    <a:lnB w="9525" cap="flat" cmpd="sng" algn="ctr">
+                    <a:lnB w="12700" cap="flat" cmpd="sng" algn="ctr">
                       <a:solidFill>
-                        <a:srgbClr val="D9D9D9"/>
+                        <a:srgbClr val="1F4E79"/>
                       </a:solidFill>
                       <a:prstDash val="solid"/>
                       <a:round/>
                       <a:headEnd type="none" w="med" len="med"/>
                       <a:tailEnd type="none" w="med" len="med"/>
                     </a:lnB>
+                    <a:solidFill>
+                      <a:srgbClr val="F2F2F2"/>
+                    </a:solidFill>
                   </a:tcPr>
                 </a:tc>
               </a:tr>
@@ -16524,7 +17619,7 @@
                       </a:endParaRPr>
                     </a:p>
                   </a:txBody>
-                  <a:tcPr marL="0" marR="76200" marT="50800" marB="50800" anchor="ctr">
+                  <a:tcPr marL="76200" marR="101600" marT="88900" marB="88900" anchor="ctr">
                     <a:lnL w="0" cap="flat" cmpd="sng" algn="ctr">
                       <a:noFill/>
                     </a:lnL>
@@ -16534,7 +17629,7 @@
                     <a:lnT w="0" cap="flat" cmpd="sng" algn="ctr">
                       <a:noFill/>
                     </a:lnT>
-                    <a:lnB w="9525" cap="flat" cmpd="sng" algn="ctr">
+                    <a:lnB w="6350" cap="flat" cmpd="sng" algn="ctr">
                       <a:solidFill>
                         <a:srgbClr val="D9D9D9"/>
                       </a:solidFill>
@@ -16543,6 +17638,9 @@
                       <a:headEnd type="none" w="med" len="med"/>
                       <a:tailEnd type="none" w="med" len="med"/>
                     </a:lnB>
+                    <a:solidFill>
+                      <a:srgbClr val="FFFFFF"/>
+                    </a:solidFill>
                   </a:tcPr>
                 </a:tc>
                 <a:tc>
@@ -16571,7 +17669,7 @@
                       </a:endParaRPr>
                     </a:p>
                   </a:txBody>
-                  <a:tcPr marL="0" marR="76200" marT="50800" marB="50800" anchor="ctr">
+                  <a:tcPr marL="76200" marR="101600" marT="88900" marB="88900" anchor="ctr">
                     <a:lnL w="0" cap="flat" cmpd="sng" algn="ctr">
                       <a:noFill/>
                     </a:lnL>
@@ -16581,7 +17679,7 @@
                     <a:lnT w="0" cap="flat" cmpd="sng" algn="ctr">
                       <a:noFill/>
                     </a:lnT>
-                    <a:lnB w="9525" cap="flat" cmpd="sng" algn="ctr">
+                    <a:lnB w="6350" cap="flat" cmpd="sng" algn="ctr">
                       <a:solidFill>
                         <a:srgbClr val="D9D9D9"/>
                       </a:solidFill>
@@ -16590,6 +17688,9 @@
                       <a:headEnd type="none" w="med" len="med"/>
                       <a:tailEnd type="none" w="med" len="med"/>
                     </a:lnB>
+                    <a:solidFill>
+                      <a:srgbClr val="FFFFFF"/>
+                    </a:solidFill>
                   </a:tcPr>
                 </a:tc>
                 <a:tc>
@@ -16618,7 +17719,7 @@
                       </a:endParaRPr>
                     </a:p>
                   </a:txBody>
-                  <a:tcPr marL="0" marR="76200" marT="50800" marB="50800" anchor="ctr">
+                  <a:tcPr marL="76200" marR="101600" marT="88900" marB="88900" anchor="ctr">
                     <a:lnL w="0" cap="flat" cmpd="sng" algn="ctr">
                       <a:noFill/>
                     </a:lnL>
@@ -16628,7 +17729,7 @@
                     <a:lnT w="0" cap="flat" cmpd="sng" algn="ctr">
                       <a:noFill/>
                     </a:lnT>
-                    <a:lnB w="9525" cap="flat" cmpd="sng" algn="ctr">
+                    <a:lnB w="6350" cap="flat" cmpd="sng" algn="ctr">
                       <a:solidFill>
                         <a:srgbClr val="D9D9D9"/>
                       </a:solidFill>
@@ -16637,6 +17738,9 @@
                       <a:headEnd type="none" w="med" len="med"/>
                       <a:tailEnd type="none" w="med" len="med"/>
                     </a:lnB>
+                    <a:solidFill>
+                      <a:srgbClr val="FFFFFF"/>
+                    </a:solidFill>
                   </a:tcPr>
                 </a:tc>
               </a:tr>
@@ -16667,7 +17771,7 @@
                       </a:endParaRPr>
                     </a:p>
                   </a:txBody>
-                  <a:tcPr marL="0" marR="76200" marT="50800" marB="50800" anchor="ctr">
+                  <a:tcPr marL="76200" marR="101600" marT="88900" marB="88900" anchor="ctr">
                     <a:lnL w="0" cap="flat" cmpd="sng" algn="ctr">
                       <a:noFill/>
                     </a:lnL>
@@ -16677,7 +17781,7 @@
                     <a:lnT w="0" cap="flat" cmpd="sng" algn="ctr">
                       <a:noFill/>
                     </a:lnT>
-                    <a:lnB w="9525" cap="flat" cmpd="sng" algn="ctr">
+                    <a:lnB w="6350" cap="flat" cmpd="sng" algn="ctr">
                       <a:solidFill>
                         <a:srgbClr val="D9D9D9"/>
                       </a:solidFill>
@@ -16686,6 +17790,9 @@
                       <a:headEnd type="none" w="med" len="med"/>
                       <a:tailEnd type="none" w="med" len="med"/>
                     </a:lnB>
+                    <a:solidFill>
+                      <a:srgbClr val="FFFFFF"/>
+                    </a:solidFill>
                   </a:tcPr>
                 </a:tc>
                 <a:tc>
@@ -16714,7 +17821,7 @@
                       </a:endParaRPr>
                     </a:p>
                   </a:txBody>
-                  <a:tcPr marL="0" marR="76200" marT="50800" marB="50800" anchor="ctr">
+                  <a:tcPr marL="76200" marR="101600" marT="88900" marB="88900" anchor="ctr">
                     <a:lnL w="0" cap="flat" cmpd="sng" algn="ctr">
                       <a:noFill/>
                     </a:lnL>
@@ -16724,7 +17831,7 @@
                     <a:lnT w="0" cap="flat" cmpd="sng" algn="ctr">
                       <a:noFill/>
                     </a:lnT>
-                    <a:lnB w="9525" cap="flat" cmpd="sng" algn="ctr">
+                    <a:lnB w="6350" cap="flat" cmpd="sng" algn="ctr">
                       <a:solidFill>
                         <a:srgbClr val="D9D9D9"/>
                       </a:solidFill>
@@ -16733,6 +17840,9 @@
                       <a:headEnd type="none" w="med" len="med"/>
                       <a:tailEnd type="none" w="med" len="med"/>
                     </a:lnB>
+                    <a:solidFill>
+                      <a:srgbClr val="FFFFFF"/>
+                    </a:solidFill>
                   </a:tcPr>
                 </a:tc>
                 <a:tc>
@@ -16761,7 +17871,7 @@
                       </a:endParaRPr>
                     </a:p>
                   </a:txBody>
-                  <a:tcPr marL="0" marR="76200" marT="50800" marB="50800" anchor="ctr">
+                  <a:tcPr marL="76200" marR="101600" marT="88900" marB="88900" anchor="ctr">
                     <a:lnL w="0" cap="flat" cmpd="sng" algn="ctr">
                       <a:noFill/>
                     </a:lnL>
@@ -16771,7 +17881,7 @@
                     <a:lnT w="0" cap="flat" cmpd="sng" algn="ctr">
                       <a:noFill/>
                     </a:lnT>
-                    <a:lnB w="9525" cap="flat" cmpd="sng" algn="ctr">
+                    <a:lnB w="6350" cap="flat" cmpd="sng" algn="ctr">
                       <a:solidFill>
                         <a:srgbClr val="D9D9D9"/>
                       </a:solidFill>
@@ -16780,6 +17890,9 @@
                       <a:headEnd type="none" w="med" len="med"/>
                       <a:tailEnd type="none" w="med" len="med"/>
                     </a:lnB>
+                    <a:solidFill>
+                      <a:srgbClr val="FFFFFF"/>
+                    </a:solidFill>
                   </a:tcPr>
                 </a:tc>
               </a:tr>
@@ -16810,7 +17923,7 @@
                       </a:endParaRPr>
                     </a:p>
                   </a:txBody>
-                  <a:tcPr marL="0" marR="76200" marT="50800" marB="50800" anchor="ctr">
+                  <a:tcPr marL="76200" marR="101600" marT="88900" marB="88900" anchor="ctr">
                     <a:lnL w="0" cap="flat" cmpd="sng" algn="ctr">
                       <a:noFill/>
                     </a:lnL>
@@ -16820,7 +17933,7 @@
                     <a:lnT w="0" cap="flat" cmpd="sng" algn="ctr">
                       <a:noFill/>
                     </a:lnT>
-                    <a:lnB w="9525" cap="flat" cmpd="sng" algn="ctr">
+                    <a:lnB w="6350" cap="flat" cmpd="sng" algn="ctr">
                       <a:solidFill>
                         <a:srgbClr val="D9D9D9"/>
                       </a:solidFill>
@@ -16829,6 +17942,9 @@
                       <a:headEnd type="none" w="med" len="med"/>
                       <a:tailEnd type="none" w="med" len="med"/>
                     </a:lnB>
+                    <a:solidFill>
+                      <a:srgbClr val="FFFFFF"/>
+                    </a:solidFill>
                   </a:tcPr>
                 </a:tc>
                 <a:tc>
@@ -16857,7 +17973,7 @@
                       </a:endParaRPr>
                     </a:p>
                   </a:txBody>
-                  <a:tcPr marL="0" marR="76200" marT="50800" marB="50800" anchor="ctr">
+                  <a:tcPr marL="76200" marR="101600" marT="88900" marB="88900" anchor="ctr">
                     <a:lnL w="0" cap="flat" cmpd="sng" algn="ctr">
                       <a:noFill/>
                     </a:lnL>
@@ -16867,7 +17983,7 @@
                     <a:lnT w="0" cap="flat" cmpd="sng" algn="ctr">
                       <a:noFill/>
                     </a:lnT>
-                    <a:lnB w="9525" cap="flat" cmpd="sng" algn="ctr">
+                    <a:lnB w="6350" cap="flat" cmpd="sng" algn="ctr">
                       <a:solidFill>
                         <a:srgbClr val="D9D9D9"/>
                       </a:solidFill>
@@ -16876,6 +17992,9 @@
                       <a:headEnd type="none" w="med" len="med"/>
                       <a:tailEnd type="none" w="med" len="med"/>
                     </a:lnB>
+                    <a:solidFill>
+                      <a:srgbClr val="FFFFFF"/>
+                    </a:solidFill>
                   </a:tcPr>
                 </a:tc>
                 <a:tc>
@@ -16904,7 +18023,7 @@
                       </a:endParaRPr>
                     </a:p>
                   </a:txBody>
-                  <a:tcPr marL="0" marR="76200" marT="50800" marB="50800" anchor="ctr">
+                  <a:tcPr marL="76200" marR="101600" marT="88900" marB="88900" anchor="ctr">
                     <a:lnL w="0" cap="flat" cmpd="sng" algn="ctr">
                       <a:noFill/>
                     </a:lnL>
@@ -16914,7 +18033,7 @@
                     <a:lnT w="0" cap="flat" cmpd="sng" algn="ctr">
                       <a:noFill/>
                     </a:lnT>
-                    <a:lnB w="9525" cap="flat" cmpd="sng" algn="ctr">
+                    <a:lnB w="6350" cap="flat" cmpd="sng" algn="ctr">
                       <a:solidFill>
                         <a:srgbClr val="D9D9D9"/>
                       </a:solidFill>
@@ -16923,6 +18042,9 @@
                       <a:headEnd type="none" w="med" len="med"/>
                       <a:tailEnd type="none" w="med" len="med"/>
                     </a:lnB>
+                    <a:solidFill>
+                      <a:srgbClr val="FFFFFF"/>
+                    </a:solidFill>
                   </a:tcPr>
                 </a:tc>
               </a:tr>
@@ -16953,7 +18075,7 @@
                       </a:endParaRPr>
                     </a:p>
                   </a:txBody>
-                  <a:tcPr marL="0" marR="76200" marT="50800" marB="50800" anchor="ctr">
+                  <a:tcPr marL="76200" marR="101600" marT="88900" marB="88900" anchor="ctr">
                     <a:lnL w="0" cap="flat" cmpd="sng" algn="ctr">
                       <a:noFill/>
                     </a:lnL>
@@ -16963,7 +18085,7 @@
                     <a:lnT w="0" cap="flat" cmpd="sng" algn="ctr">
                       <a:noFill/>
                     </a:lnT>
-                    <a:lnB w="9525" cap="flat" cmpd="sng" algn="ctr">
+                    <a:lnB w="6350" cap="flat" cmpd="sng" algn="ctr">
                       <a:solidFill>
                         <a:srgbClr val="D9D9D9"/>
                       </a:solidFill>
@@ -16972,6 +18094,9 @@
                       <a:headEnd type="none" w="med" len="med"/>
                       <a:tailEnd type="none" w="med" len="med"/>
                     </a:lnB>
+                    <a:solidFill>
+                      <a:srgbClr val="FFFFFF"/>
+                    </a:solidFill>
                   </a:tcPr>
                 </a:tc>
                 <a:tc>
@@ -17000,7 +18125,7 @@
                       </a:endParaRPr>
                     </a:p>
                   </a:txBody>
-                  <a:tcPr marL="0" marR="76200" marT="50800" marB="50800" anchor="ctr">
+                  <a:tcPr marL="76200" marR="101600" marT="88900" marB="88900" anchor="ctr">
                     <a:lnL w="0" cap="flat" cmpd="sng" algn="ctr">
                       <a:noFill/>
                     </a:lnL>
@@ -17010,7 +18135,7 @@
                     <a:lnT w="0" cap="flat" cmpd="sng" algn="ctr">
                       <a:noFill/>
                     </a:lnT>
-                    <a:lnB w="9525" cap="flat" cmpd="sng" algn="ctr">
+                    <a:lnB w="6350" cap="flat" cmpd="sng" algn="ctr">
                       <a:solidFill>
                         <a:srgbClr val="D9D9D9"/>
                       </a:solidFill>
@@ -17019,6 +18144,9 @@
                       <a:headEnd type="none" w="med" len="med"/>
                       <a:tailEnd type="none" w="med" len="med"/>
                     </a:lnB>
+                    <a:solidFill>
+                      <a:srgbClr val="FFFFFF"/>
+                    </a:solidFill>
                   </a:tcPr>
                 </a:tc>
                 <a:tc>
@@ -17047,7 +18175,7 @@
                       </a:endParaRPr>
                     </a:p>
                   </a:txBody>
-                  <a:tcPr marL="0" marR="76200" marT="50800" marB="50800" anchor="ctr">
+                  <a:tcPr marL="76200" marR="101600" marT="88900" marB="88900" anchor="ctr">
                     <a:lnL w="0" cap="flat" cmpd="sng" algn="ctr">
                       <a:noFill/>
                     </a:lnL>
@@ -17057,7 +18185,7 @@
                     <a:lnT w="0" cap="flat" cmpd="sng" algn="ctr">
                       <a:noFill/>
                     </a:lnT>
-                    <a:lnB w="9525" cap="flat" cmpd="sng" algn="ctr">
+                    <a:lnB w="6350" cap="flat" cmpd="sng" algn="ctr">
                       <a:solidFill>
                         <a:srgbClr val="D9D9D9"/>
                       </a:solidFill>
@@ -17066,6 +18194,9 @@
                       <a:headEnd type="none" w="med" len="med"/>
                       <a:tailEnd type="none" w="med" len="med"/>
                     </a:lnB>
+                    <a:solidFill>
+                      <a:srgbClr val="FFFFFF"/>
+                    </a:solidFill>
                   </a:tcPr>
                 </a:tc>
               </a:tr>
@@ -17096,7 +18227,7 @@
                       </a:endParaRPr>
                     </a:p>
                   </a:txBody>
-                  <a:tcPr marL="0" marR="76200" marT="50800" marB="50800" anchor="ctr">
+                  <a:tcPr marL="76200" marR="101600" marT="88900" marB="88900" anchor="ctr">
                     <a:lnL w="0" cap="flat" cmpd="sng" algn="ctr">
                       <a:noFill/>
                     </a:lnL>
@@ -17106,7 +18237,7 @@
                     <a:lnT w="0" cap="flat" cmpd="sng" algn="ctr">
                       <a:noFill/>
                     </a:lnT>
-                    <a:lnB w="9525" cap="flat" cmpd="sng" algn="ctr">
+                    <a:lnB w="6350" cap="flat" cmpd="sng" algn="ctr">
                       <a:solidFill>
                         <a:srgbClr val="D9D9D9"/>
                       </a:solidFill>
@@ -17115,6 +18246,9 @@
                       <a:headEnd type="none" w="med" len="med"/>
                       <a:tailEnd type="none" w="med" len="med"/>
                     </a:lnB>
+                    <a:solidFill>
+                      <a:srgbClr val="FFFFFF"/>
+                    </a:solidFill>
                   </a:tcPr>
                 </a:tc>
                 <a:tc>
@@ -17143,7 +18277,7 @@
                       </a:endParaRPr>
                     </a:p>
                   </a:txBody>
-                  <a:tcPr marL="0" marR="76200" marT="50800" marB="50800" anchor="ctr">
+                  <a:tcPr marL="76200" marR="101600" marT="88900" marB="88900" anchor="ctr">
                     <a:lnL w="0" cap="flat" cmpd="sng" algn="ctr">
                       <a:noFill/>
                     </a:lnL>
@@ -17153,7 +18287,7 @@
                     <a:lnT w="0" cap="flat" cmpd="sng" algn="ctr">
                       <a:noFill/>
                     </a:lnT>
-                    <a:lnB w="9525" cap="flat" cmpd="sng" algn="ctr">
+                    <a:lnB w="6350" cap="flat" cmpd="sng" algn="ctr">
                       <a:solidFill>
                         <a:srgbClr val="D9D9D9"/>
                       </a:solidFill>
@@ -17162,6 +18296,9 @@
                       <a:headEnd type="none" w="med" len="med"/>
                       <a:tailEnd type="none" w="med" len="med"/>
                     </a:lnB>
+                    <a:solidFill>
+                      <a:srgbClr val="FFFFFF"/>
+                    </a:solidFill>
                   </a:tcPr>
                 </a:tc>
                 <a:tc>
@@ -17190,7 +18327,7 @@
                       </a:endParaRPr>
                     </a:p>
                   </a:txBody>
-                  <a:tcPr marL="0" marR="76200" marT="50800" marB="50800" anchor="ctr">
+                  <a:tcPr marL="76200" marR="101600" marT="88900" marB="88900" anchor="ctr">
                     <a:lnL w="0" cap="flat" cmpd="sng" algn="ctr">
                       <a:noFill/>
                     </a:lnL>
@@ -17200,7 +18337,7 @@
                     <a:lnT w="0" cap="flat" cmpd="sng" algn="ctr">
                       <a:noFill/>
                     </a:lnT>
-                    <a:lnB w="9525" cap="flat" cmpd="sng" algn="ctr">
+                    <a:lnB w="6350" cap="flat" cmpd="sng" algn="ctr">
                       <a:solidFill>
                         <a:srgbClr val="D9D9D9"/>
                       </a:solidFill>
@@ -17209,6 +18346,9 @@
                       <a:headEnd type="none" w="med" len="med"/>
                       <a:tailEnd type="none" w="med" len="med"/>
                     </a:lnB>
+                    <a:solidFill>
+                      <a:srgbClr val="FFFFFF"/>
+                    </a:solidFill>
                   </a:tcPr>
                 </a:tc>
               </a:tr>
@@ -17239,7 +18379,7 @@
                       </a:endParaRPr>
                     </a:p>
                   </a:txBody>
-                  <a:tcPr marL="0" marR="76200" marT="50800" marB="50800" anchor="ctr">
+                  <a:tcPr marL="76200" marR="101600" marT="88900" marB="88900" anchor="ctr">
                     <a:lnL w="0" cap="flat" cmpd="sng" algn="ctr">
                       <a:noFill/>
                     </a:lnL>
@@ -17249,7 +18389,7 @@
                     <a:lnT w="0" cap="flat" cmpd="sng" algn="ctr">
                       <a:noFill/>
                     </a:lnT>
-                    <a:lnB w="9525" cap="flat" cmpd="sng" algn="ctr">
+                    <a:lnB w="6350" cap="flat" cmpd="sng" algn="ctr">
                       <a:solidFill>
                         <a:srgbClr val="D9D9D9"/>
                       </a:solidFill>
@@ -17258,6 +18398,9 @@
                       <a:headEnd type="none" w="med" len="med"/>
                       <a:tailEnd type="none" w="med" len="med"/>
                     </a:lnB>
+                    <a:solidFill>
+                      <a:srgbClr val="FFFFFF"/>
+                    </a:solidFill>
                   </a:tcPr>
                 </a:tc>
                 <a:tc>
@@ -17286,7 +18429,7 @@
                       </a:endParaRPr>
                     </a:p>
                   </a:txBody>
-                  <a:tcPr marL="0" marR="76200" marT="50800" marB="50800" anchor="ctr">
+                  <a:tcPr marL="76200" marR="101600" marT="88900" marB="88900" anchor="ctr">
                     <a:lnL w="0" cap="flat" cmpd="sng" algn="ctr">
                       <a:noFill/>
                     </a:lnL>
@@ -17296,7 +18439,7 @@
                     <a:lnT w="0" cap="flat" cmpd="sng" algn="ctr">
                       <a:noFill/>
                     </a:lnT>
-                    <a:lnB w="9525" cap="flat" cmpd="sng" algn="ctr">
+                    <a:lnB w="6350" cap="flat" cmpd="sng" algn="ctr">
                       <a:solidFill>
                         <a:srgbClr val="D9D9D9"/>
                       </a:solidFill>
@@ -17305,6 +18448,9 @@
                       <a:headEnd type="none" w="med" len="med"/>
                       <a:tailEnd type="none" w="med" len="med"/>
                     </a:lnB>
+                    <a:solidFill>
+                      <a:srgbClr val="FFFFFF"/>
+                    </a:solidFill>
                   </a:tcPr>
                 </a:tc>
                 <a:tc>
@@ -17333,7 +18479,7 @@
                       </a:endParaRPr>
                     </a:p>
                   </a:txBody>
-                  <a:tcPr marL="0" marR="76200" marT="50800" marB="50800" anchor="ctr">
+                  <a:tcPr marL="76200" marR="101600" marT="88900" marB="88900" anchor="ctr">
                     <a:lnL w="0" cap="flat" cmpd="sng" algn="ctr">
                       <a:noFill/>
                     </a:lnL>
@@ -17343,7 +18489,7 @@
                     <a:lnT w="0" cap="flat" cmpd="sng" algn="ctr">
                       <a:noFill/>
                     </a:lnT>
-                    <a:lnB w="9525" cap="flat" cmpd="sng" algn="ctr">
+                    <a:lnB w="6350" cap="flat" cmpd="sng" algn="ctr">
                       <a:solidFill>
                         <a:srgbClr val="D9D9D9"/>
                       </a:solidFill>
@@ -17352,6 +18498,9 @@
                       <a:headEnd type="none" w="med" len="med"/>
                       <a:tailEnd type="none" w="med" len="med"/>
                     </a:lnB>
+                    <a:solidFill>
+                      <a:srgbClr val="FFFFFF"/>
+                    </a:solidFill>
                   </a:tcPr>
                 </a:tc>
               </a:tr>
@@ -17361,14 +18510,37 @@
       </p:graphicFrame>
       <p:sp>
         <p:nvSpPr>
-          <p:cNvPr id="6" name="Text 3"/>
+          <p:cNvPr id="6" name="Shape 3"/>
+          <p:cNvSpPr/>
+          <p:nvPr/>
+        </p:nvSpPr>
+        <p:spPr>
+          <a:xfrm>
+            <a:off x="457200" y="1325880"/>
+            <a:ext cx="5394960" cy="0"/>
+          </a:xfrm>
+          <a:prstGeom prst="line">
+            <a:avLst/>
+          </a:prstGeom>
+          <a:noFill/>
+          <a:ln w="12700">
+            <a:solidFill>
+              <a:srgbClr val="1F4E79"/>
+            </a:solidFill>
+            <a:prstDash val="solid"/>
+          </a:ln>
+        </p:spPr>
+      </p:sp>
+      <p:sp>
+        <p:nvSpPr>
+          <p:cNvPr id="7" name="Text 4"/>
           <p:cNvSpPr txBox="1"/>
           <p:nvPr/>
         </p:nvSpPr>
         <p:spPr>
           <a:xfrm>
             <a:off x="6126480" y="1417320"/>
-            <a:ext cx="2560320" cy="2743200"/>
+            <a:ext cx="2560320" cy="754380"/>
           </a:xfrm>
           <a:prstGeom prst="rect">
             <a:avLst/>
@@ -17380,17 +18552,16 @@
           <a:bodyPr wrap="square" lIns="0" tIns="0" rIns="0" bIns="0" rtlCol="0" anchor="t"/>
           <a:lstStyle/>
           <a:p>
-            <a:pPr marL="177800" indent="-177800">
+            <a:pPr algn="l" indent="0" marL="0">
               <a:lnSpc>
                 <a:spcPct val="108000"/>
               </a:lnSpc>
-              <a:buSzPct val="100000"/>
-              <a:buChar char="•"/>
-            </a:pPr>
-            <a:r>
-              <a:rPr lang="en-US" sz="1500" dirty="0">
-                <a:solidFill>
-                  <a:srgbClr val="3A3A3A"/>
+              <a:buNone/>
+            </a:pPr>
+            <a:r>
+              <a:rPr lang="en-US" sz="1500" b="1" dirty="0">
+                <a:solidFill>
+                  <a:srgbClr val="1F4E79"/>
                 </a:solidFill>
                 <a:latin typeface="Arial" pitchFamily="34" charset="0"/>
                 <a:ea typeface="Arial" pitchFamily="34" charset="-122"/>
@@ -17401,17 +18572,16 @@
             <a:endParaRPr lang="en-US" sz="1500" dirty="0"/>
           </a:p>
           <a:p>
-            <a:pPr marL="177800" indent="-177800">
+            <a:pPr algn="l" indent="0" marL="0">
               <a:lnSpc>
                 <a:spcPct val="108000"/>
               </a:lnSpc>
-              <a:buSzPct val="100000"/>
-              <a:buChar char=" "/>
-            </a:pPr>
-            <a:r>
-              <a:rPr lang="en-US" sz="1500" dirty="0">
-                <a:solidFill>
-                  <a:srgbClr val="3A3A3A"/>
+              <a:buNone/>
+            </a:pPr>
+            <a:r>
+              <a:rPr lang="en-US" sz="1500" b="1" dirty="0">
+                <a:solidFill>
+                  <a:srgbClr val="1F4E79"/>
                 </a:solidFill>
                 <a:latin typeface="Arial" pitchFamily="34" charset="0"/>
                 <a:ea typeface="Arial" pitchFamily="34" charset="-122"/>
@@ -17422,20 +18592,16 @@
             <a:endParaRPr lang="en-US" sz="1500" dirty="0"/>
           </a:p>
           <a:p>
-            <a:pPr marL="177800" indent="-177800">
+            <a:pPr algn="l" indent="0" marL="0">
               <a:lnSpc>
                 <a:spcPct val="108000"/>
               </a:lnSpc>
-              <a:spcAft>
-                <a:spcPts val="1200"/>
-              </a:spcAft>
-              <a:buSzPct val="100000"/>
-              <a:buChar char=" "/>
-            </a:pPr>
-            <a:r>
-              <a:rPr lang="en-US" sz="1500" dirty="0">
-                <a:solidFill>
-                  <a:srgbClr val="3A3A3A"/>
+              <a:buNone/>
+            </a:pPr>
+            <a:r>
+              <a:rPr lang="en-US" sz="1500" b="1" dirty="0">
+                <a:solidFill>
+                  <a:srgbClr val="1F4E79"/>
                 </a:solidFill>
                 <a:latin typeface="Arial" pitchFamily="34" charset="0"/>
                 <a:ea typeface="Arial" pitchFamily="34" charset="-122"/>
@@ -17445,13 +18611,57 @@
             </a:r>
             <a:endParaRPr lang="en-US" sz="1500" dirty="0"/>
           </a:p>
-          <a:p>
-            <a:pPr marL="177800" indent="-177800">
+        </p:txBody>
+      </p:sp>
+      <p:sp>
+        <p:nvSpPr>
+          <p:cNvPr id="8" name="Shape 5"/>
+          <p:cNvSpPr/>
+          <p:nvPr/>
+        </p:nvSpPr>
+        <p:spPr>
+          <a:xfrm>
+            <a:off x="6126480" y="2284476"/>
+            <a:ext cx="2560320" cy="0"/>
+          </a:xfrm>
+          <a:prstGeom prst="line">
+            <a:avLst/>
+          </a:prstGeom>
+          <a:noFill/>
+          <a:ln w="6350">
+            <a:solidFill>
+              <a:srgbClr val="D9D9D9"/>
+            </a:solidFill>
+            <a:prstDash val="solid"/>
+          </a:ln>
+        </p:spPr>
+      </p:sp>
+      <p:sp>
+        <p:nvSpPr>
+          <p:cNvPr id="9" name="Text 6"/>
+          <p:cNvSpPr txBox="1"/>
+          <p:nvPr/>
+        </p:nvSpPr>
+        <p:spPr>
+          <a:xfrm>
+            <a:off x="6126480" y="2397252"/>
+            <a:ext cx="2560320" cy="518160"/>
+          </a:xfrm>
+          <a:prstGeom prst="rect">
+            <a:avLst/>
+          </a:prstGeom>
+          <a:noFill/>
+          <a:ln/>
+        </p:spPr>
+        <p:txBody>
+          <a:bodyPr wrap="square" lIns="0" tIns="0" rIns="0" bIns="0" rtlCol="0" anchor="t"/>
+          <a:lstStyle/>
+          <a:p>
+            <a:pPr algn="l" indent="0" marL="0">
               <a:lnSpc>
                 <a:spcPct val="108000"/>
               </a:lnSpc>
-              <a:buSzPct val="100000"/>
-              <a:buChar char="•"/>
+              <a:buNone/>
             </a:pPr>
             <a:r>
               <a:rPr lang="en-US" sz="1500" dirty="0">
@@ -17467,15 +18677,11 @@
             <a:endParaRPr lang="en-US" sz="1500" dirty="0"/>
           </a:p>
           <a:p>
-            <a:pPr marL="177800" indent="-177800">
+            <a:pPr algn="l" indent="0" marL="0">
               <a:lnSpc>
                 <a:spcPct val="108000"/>
               </a:lnSpc>
-              <a:spcAft>
-                <a:spcPts val="1200"/>
-              </a:spcAft>
-              <a:buSzPct val="100000"/>
-              <a:buChar char=" "/>
+              <a:buNone/>
             </a:pPr>
             <a:r>
               <a:rPr lang="en-US" sz="1500" dirty="0">
@@ -17494,7 +18700,7 @@
       </p:sp>
       <p:sp>
         <p:nvSpPr>
-          <p:cNvPr id="7" name="Text 4"/>
+          <p:cNvPr id="10" name="Text 7"/>
           <p:cNvSpPr txBox="1"/>
           <p:nvPr/>
         </p:nvSpPr>
@@ -17613,7 +18819,7 @@
         </p:nvSpPr>
         <p:spPr>
           <a:xfrm>
-            <a:off x="457200" y="292608"/>
+            <a:off x="457200" y="310896"/>
             <a:ext cx="8229600" cy="868680"/>
           </a:xfrm>
           <a:prstGeom prst="rect">
@@ -17676,7 +18882,7 @@
         <p:spPr>
           <a:xfrm>
             <a:off x="457200" y="1600200"/>
-            <a:ext cx="7680960" cy="3017520"/>
+            <a:ext cx="7680960" cy="392176"/>
           </a:xfrm>
           <a:prstGeom prst="rect">
             <a:avLst/>
@@ -17688,20 +18894,16 @@
           <a:bodyPr wrap="square" lIns="0" tIns="0" rIns="0" bIns="0" rtlCol="0" anchor="t"/>
           <a:lstStyle/>
           <a:p>
-            <a:pPr marL="254000" indent="-254000">
+            <a:pPr algn="l" indent="0" marL="0">
               <a:lnSpc>
                 <a:spcPct val="108000"/>
               </a:lnSpc>
-              <a:spcAft>
-                <a:spcPts val="2200"/>
-              </a:spcAft>
-              <a:buSzPct val="100000"/>
-              <a:buChar char="•"/>
-            </a:pPr>
-            <a:r>
-              <a:rPr lang="en-US" sz="2200" dirty="0">
-                <a:solidFill>
-                  <a:srgbClr val="3A3A3A"/>
+              <a:buNone/>
+            </a:pPr>
+            <a:r>
+              <a:rPr lang="en-US" sz="2200" b="1" dirty="0">
+                <a:solidFill>
+                  <a:srgbClr val="1F4E79"/>
                 </a:solidFill>
                 <a:latin typeface="Arial" pitchFamily="34" charset="0"/>
                 <a:ea typeface="Arial" pitchFamily="34" charset="-122"/>
@@ -17711,16 +18913,57 @@
             </a:r>
             <a:endParaRPr lang="en-US" sz="2200" dirty="0"/>
           </a:p>
-          <a:p>
-            <a:pPr marL="254000" indent="-254000">
+        </p:txBody>
+      </p:sp>
+      <p:sp>
+        <p:nvSpPr>
+          <p:cNvPr id="5" name="Shape 3"/>
+          <p:cNvSpPr/>
+          <p:nvPr/>
+        </p:nvSpPr>
+        <p:spPr>
+          <a:xfrm>
+            <a:off x="457200" y="2168652"/>
+            <a:ext cx="7680960" cy="0"/>
+          </a:xfrm>
+          <a:prstGeom prst="line">
+            <a:avLst/>
+          </a:prstGeom>
+          <a:noFill/>
+          <a:ln w="6350">
+            <a:solidFill>
+              <a:srgbClr val="D9D9D9"/>
+            </a:solidFill>
+            <a:prstDash val="solid"/>
+          </a:ln>
+        </p:spPr>
+      </p:sp>
+      <p:sp>
+        <p:nvSpPr>
+          <p:cNvPr id="6" name="Text 4"/>
+          <p:cNvSpPr txBox="1"/>
+          <p:nvPr/>
+        </p:nvSpPr>
+        <p:spPr>
+          <a:xfrm>
+            <a:off x="457200" y="2344928"/>
+            <a:ext cx="7680960" cy="392176"/>
+          </a:xfrm>
+          <a:prstGeom prst="rect">
+            <a:avLst/>
+          </a:prstGeom>
+          <a:noFill/>
+          <a:ln/>
+        </p:spPr>
+        <p:txBody>
+          <a:bodyPr wrap="square" lIns="0" tIns="0" rIns="0" bIns="0" rtlCol="0" anchor="t"/>
+          <a:lstStyle/>
+          <a:p>
+            <a:pPr algn="l" indent="0" marL="0">
               <a:lnSpc>
                 <a:spcPct val="108000"/>
               </a:lnSpc>
-              <a:spcAft>
-                <a:spcPts val="2200"/>
-              </a:spcAft>
-              <a:buSzPct val="100000"/>
-              <a:buChar char="•"/>
+              <a:buNone/>
             </a:pPr>
             <a:r>
               <a:rPr lang="en-US" sz="2200" dirty="0">
@@ -17735,16 +18978,57 @@
             </a:r>
             <a:endParaRPr lang="en-US" sz="2200" dirty="0"/>
           </a:p>
-          <a:p>
-            <a:pPr marL="254000" indent="-254000">
+        </p:txBody>
+      </p:sp>
+      <p:sp>
+        <p:nvSpPr>
+          <p:cNvPr id="7" name="Shape 5"/>
+          <p:cNvSpPr/>
+          <p:nvPr/>
+        </p:nvSpPr>
+        <p:spPr>
+          <a:xfrm>
+            <a:off x="457200" y="2913380"/>
+            <a:ext cx="7680960" cy="0"/>
+          </a:xfrm>
+          <a:prstGeom prst="line">
+            <a:avLst/>
+          </a:prstGeom>
+          <a:noFill/>
+          <a:ln w="6350">
+            <a:solidFill>
+              <a:srgbClr val="D9D9D9"/>
+            </a:solidFill>
+            <a:prstDash val="solid"/>
+          </a:ln>
+        </p:spPr>
+      </p:sp>
+      <p:sp>
+        <p:nvSpPr>
+          <p:cNvPr id="8" name="Text 6"/>
+          <p:cNvSpPr txBox="1"/>
+          <p:nvPr/>
+        </p:nvSpPr>
+        <p:spPr>
+          <a:xfrm>
+            <a:off x="457200" y="3089656"/>
+            <a:ext cx="7680960" cy="392176"/>
+          </a:xfrm>
+          <a:prstGeom prst="rect">
+            <a:avLst/>
+          </a:prstGeom>
+          <a:noFill/>
+          <a:ln/>
+        </p:spPr>
+        <p:txBody>
+          <a:bodyPr wrap="square" lIns="0" tIns="0" rIns="0" bIns="0" rtlCol="0" anchor="t"/>
+          <a:lstStyle/>
+          <a:p>
+            <a:pPr algn="l" indent="0" marL="0">
               <a:lnSpc>
                 <a:spcPct val="108000"/>
               </a:lnSpc>
-              <a:spcAft>
-                <a:spcPts val="2200"/>
-              </a:spcAft>
-              <a:buSzPct val="100000"/>
-              <a:buChar char="•"/>
+              <a:buNone/>
             </a:pPr>
             <a:r>
               <a:rPr lang="en-US" sz="2200" dirty="0">
@@ -17763,7 +19047,7 @@
       </p:sp>
       <p:sp>
         <p:nvSpPr>
-          <p:cNvPr id="5" name="Text 3"/>
+          <p:cNvPr id="9" name="Text 7"/>
           <p:cNvSpPr txBox="1"/>
           <p:nvPr/>
         </p:nvSpPr>
@@ -17882,7 +19166,7 @@
         </p:nvSpPr>
         <p:spPr>
           <a:xfrm>
-            <a:off x="457200" y="292608"/>
+            <a:off x="457200" y="310896"/>
             <a:ext cx="8229600" cy="868680"/>
           </a:xfrm>
           <a:prstGeom prst="rect">
@@ -17973,9 +19257,9 @@
                         <a:buNone/>
                       </a:pPr>
                       <a:r>
-                        <a:rPr lang="en-US" sz="1300" dirty="0">
+                        <a:rPr lang="en-US" sz="1400" b="1" dirty="0">
                           <a:solidFill>
-                            <a:srgbClr val="6E6E6E"/>
+                            <a:srgbClr val="1F4E79"/>
                           </a:solidFill>
                           <a:latin typeface="Arial" pitchFamily="34" charset="0"/>
                           <a:ea typeface="Arial" pitchFamily="34" charset="-122"/>
@@ -17983,14 +19267,14 @@
                         </a:rPr>
                         <a:t>問い</a:t>
                       </a:r>
-                      <a:endParaRPr lang="en-US" sz="1300" dirty="0">
+                      <a:endParaRPr lang="en-US" sz="1400" dirty="0">
                         <a:latin typeface="Arial" charset="0"/>
                         <a:ea typeface="Arial" charset="0"/>
                         <a:cs typeface="Arial" charset="0"/>
                       </a:endParaRPr>
                     </a:p>
                   </a:txBody>
-                  <a:tcPr marL="0" marR="76200" marT="50800" marB="50800" anchor="ctr">
+                  <a:tcPr marL="76200" marR="101600" marT="88900" marB="88900" anchor="ctr">
                     <a:lnL w="0" cap="flat" cmpd="sng" algn="ctr">
                       <a:noFill/>
                     </a:lnL>
@@ -18000,15 +19284,18 @@
                     <a:lnT w="0" cap="flat" cmpd="sng" algn="ctr">
                       <a:noFill/>
                     </a:lnT>
-                    <a:lnB w="9525" cap="flat" cmpd="sng" algn="ctr">
+                    <a:lnB w="12700" cap="flat" cmpd="sng" algn="ctr">
                       <a:solidFill>
-                        <a:srgbClr val="D9D9D9"/>
+                        <a:srgbClr val="1F4E79"/>
                       </a:solidFill>
                       <a:prstDash val="solid"/>
                       <a:round/>
                       <a:headEnd type="none" w="med" len="med"/>
                       <a:tailEnd type="none" w="med" len="med"/>
                     </a:lnB>
+                    <a:solidFill>
+                      <a:srgbClr val="F2F2F2"/>
+                    </a:solidFill>
                   </a:tcPr>
                 </a:tc>
                 <a:tc>
@@ -18020,9 +19307,9 @@
                         <a:buNone/>
                       </a:pPr>
                       <a:r>
-                        <a:rPr lang="en-US" sz="1300" dirty="0">
+                        <a:rPr lang="en-US" sz="1400" b="1" dirty="0">
                           <a:solidFill>
-                            <a:srgbClr val="6E6E6E"/>
+                            <a:srgbClr val="1F4E79"/>
                           </a:solidFill>
                           <a:latin typeface="Arial" pitchFamily="34" charset="0"/>
                           <a:ea typeface="Arial" pitchFamily="34" charset="-122"/>
@@ -18030,14 +19317,14 @@
                         </a:rPr>
                         <a:t>測るもの</a:t>
                       </a:r>
-                      <a:endParaRPr lang="en-US" sz="1300" dirty="0">
+                      <a:endParaRPr lang="en-US" sz="1400" dirty="0">
                         <a:latin typeface="Arial" charset="0"/>
                         <a:ea typeface="Arial" charset="0"/>
                         <a:cs typeface="Arial" charset="0"/>
                       </a:endParaRPr>
                     </a:p>
                   </a:txBody>
-                  <a:tcPr marL="0" marR="76200" marT="50800" marB="50800" anchor="ctr">
+                  <a:tcPr marL="76200" marR="101600" marT="88900" marB="88900" anchor="ctr">
                     <a:lnL w="0" cap="flat" cmpd="sng" algn="ctr">
                       <a:noFill/>
                     </a:lnL>
@@ -18047,15 +19334,18 @@
                     <a:lnT w="0" cap="flat" cmpd="sng" algn="ctr">
                       <a:noFill/>
                     </a:lnT>
-                    <a:lnB w="9525" cap="flat" cmpd="sng" algn="ctr">
+                    <a:lnB w="12700" cap="flat" cmpd="sng" algn="ctr">
                       <a:solidFill>
-                        <a:srgbClr val="D9D9D9"/>
+                        <a:srgbClr val="1F4E79"/>
                       </a:solidFill>
                       <a:prstDash val="solid"/>
                       <a:round/>
                       <a:headEnd type="none" w="med" len="med"/>
                       <a:tailEnd type="none" w="med" len="med"/>
                     </a:lnB>
+                    <a:solidFill>
+                      <a:srgbClr val="F2F2F2"/>
+                    </a:solidFill>
                   </a:tcPr>
                 </a:tc>
                 <a:tc>
@@ -18067,9 +19357,9 @@
                         <a:buNone/>
                       </a:pPr>
                       <a:r>
-                        <a:rPr lang="en-US" sz="1300" dirty="0">
+                        <a:rPr lang="en-US" sz="1400" b="1" dirty="0">
                           <a:solidFill>
-                            <a:srgbClr val="6E6E6E"/>
+                            <a:srgbClr val="1F4E79"/>
                           </a:solidFill>
                           <a:latin typeface="Arial" pitchFamily="34" charset="0"/>
                           <a:ea typeface="Arial" pitchFamily="34" charset="-122"/>
@@ -18077,14 +19367,14 @@
                         </a:rPr>
                         <a:t>事前に決めた目標</a:t>
                       </a:r>
-                      <a:endParaRPr lang="en-US" sz="1300" dirty="0">
+                      <a:endParaRPr lang="en-US" sz="1400" dirty="0">
                         <a:latin typeface="Arial" charset="0"/>
                         <a:ea typeface="Arial" charset="0"/>
                         <a:cs typeface="Arial" charset="0"/>
                       </a:endParaRPr>
                     </a:p>
                   </a:txBody>
-                  <a:tcPr marL="0" marR="76200" marT="50800" marB="50800" anchor="ctr">
+                  <a:tcPr marL="76200" marR="101600" marT="88900" marB="88900" anchor="ctr">
                     <a:lnL w="0" cap="flat" cmpd="sng" algn="ctr">
                       <a:noFill/>
                     </a:lnL>
@@ -18094,15 +19384,18 @@
                     <a:lnT w="0" cap="flat" cmpd="sng" algn="ctr">
                       <a:noFill/>
                     </a:lnT>
-                    <a:lnB w="9525" cap="flat" cmpd="sng" algn="ctr">
+                    <a:lnB w="12700" cap="flat" cmpd="sng" algn="ctr">
                       <a:solidFill>
-                        <a:srgbClr val="D9D9D9"/>
+                        <a:srgbClr val="1F4E79"/>
                       </a:solidFill>
                       <a:prstDash val="solid"/>
                       <a:round/>
                       <a:headEnd type="none" w="med" len="med"/>
                       <a:tailEnd type="none" w="med" len="med"/>
                     </a:lnB>
+                    <a:solidFill>
+                      <a:srgbClr val="F2F2F2"/>
+                    </a:solidFill>
                   </a:tcPr>
                 </a:tc>
               </a:tr>
@@ -18133,7 +19426,7 @@
                       </a:endParaRPr>
                     </a:p>
                   </a:txBody>
-                  <a:tcPr marL="0" marR="76200" marT="50800" marB="50800" anchor="ctr">
+                  <a:tcPr marL="76200" marR="101600" marT="88900" marB="88900" anchor="ctr">
                     <a:lnL w="0" cap="flat" cmpd="sng" algn="ctr">
                       <a:noFill/>
                     </a:lnL>
@@ -18143,7 +19436,7 @@
                     <a:lnT w="0" cap="flat" cmpd="sng" algn="ctr">
                       <a:noFill/>
                     </a:lnT>
-                    <a:lnB w="9525" cap="flat" cmpd="sng" algn="ctr">
+                    <a:lnB w="6350" cap="flat" cmpd="sng" algn="ctr">
                       <a:solidFill>
                         <a:srgbClr val="D9D9D9"/>
                       </a:solidFill>
@@ -18152,6 +19445,9 @@
                       <a:headEnd type="none" w="med" len="med"/>
                       <a:tailEnd type="none" w="med" len="med"/>
                     </a:lnB>
+                    <a:solidFill>
+                      <a:srgbClr val="FFFFFF"/>
+                    </a:solidFill>
                   </a:tcPr>
                 </a:tc>
                 <a:tc>
@@ -18180,7 +19476,7 @@
                       </a:endParaRPr>
                     </a:p>
                   </a:txBody>
-                  <a:tcPr marL="0" marR="76200" marT="50800" marB="50800" anchor="ctr">
+                  <a:tcPr marL="76200" marR="101600" marT="88900" marB="88900" anchor="ctr">
                     <a:lnL w="0" cap="flat" cmpd="sng" algn="ctr">
                       <a:noFill/>
                     </a:lnL>
@@ -18190,7 +19486,7 @@
                     <a:lnT w="0" cap="flat" cmpd="sng" algn="ctr">
                       <a:noFill/>
                     </a:lnT>
-                    <a:lnB w="9525" cap="flat" cmpd="sng" algn="ctr">
+                    <a:lnB w="6350" cap="flat" cmpd="sng" algn="ctr">
                       <a:solidFill>
                         <a:srgbClr val="D9D9D9"/>
                       </a:solidFill>
@@ -18199,6 +19495,9 @@
                       <a:headEnd type="none" w="med" len="med"/>
                       <a:tailEnd type="none" w="med" len="med"/>
                     </a:lnB>
+                    <a:solidFill>
+                      <a:srgbClr val="FFFFFF"/>
+                    </a:solidFill>
                   </a:tcPr>
                 </a:tc>
                 <a:tc>
@@ -18248,7 +19547,7 @@
                       </a:endParaRPr>
                     </a:p>
                   </a:txBody>
-                  <a:tcPr marL="0" marR="76200" marT="50800" marB="50800" anchor="ctr">
+                  <a:tcPr marL="76200" marR="101600" marT="88900" marB="88900" anchor="ctr">
                     <a:lnL w="0" cap="flat" cmpd="sng" algn="ctr">
                       <a:noFill/>
                     </a:lnL>
@@ -18258,7 +19557,7 @@
                     <a:lnT w="0" cap="flat" cmpd="sng" algn="ctr">
                       <a:noFill/>
                     </a:lnT>
-                    <a:lnB w="9525" cap="flat" cmpd="sng" algn="ctr">
+                    <a:lnB w="6350" cap="flat" cmpd="sng" algn="ctr">
                       <a:solidFill>
                         <a:srgbClr val="D9D9D9"/>
                       </a:solidFill>
@@ -18267,6 +19566,9 @@
                       <a:headEnd type="none" w="med" len="med"/>
                       <a:tailEnd type="none" w="med" len="med"/>
                     </a:lnB>
+                    <a:solidFill>
+                      <a:srgbClr val="FFFFFF"/>
+                    </a:solidFill>
                   </a:tcPr>
                 </a:tc>
               </a:tr>
@@ -18297,7 +19599,7 @@
                       </a:endParaRPr>
                     </a:p>
                   </a:txBody>
-                  <a:tcPr marL="0" marR="76200" marT="50800" marB="50800" anchor="ctr">
+                  <a:tcPr marL="76200" marR="101600" marT="88900" marB="88900" anchor="ctr">
                     <a:lnL w="0" cap="flat" cmpd="sng" algn="ctr">
                       <a:noFill/>
                     </a:lnL>
@@ -18307,7 +19609,7 @@
                     <a:lnT w="0" cap="flat" cmpd="sng" algn="ctr">
                       <a:noFill/>
                     </a:lnT>
-                    <a:lnB w="9525" cap="flat" cmpd="sng" algn="ctr">
+                    <a:lnB w="6350" cap="flat" cmpd="sng" algn="ctr">
                       <a:solidFill>
                         <a:srgbClr val="D9D9D9"/>
                       </a:solidFill>
@@ -18316,6 +19618,9 @@
                       <a:headEnd type="none" w="med" len="med"/>
                       <a:tailEnd type="none" w="med" len="med"/>
                     </a:lnB>
+                    <a:solidFill>
+                      <a:srgbClr val="FFFFFF"/>
+                    </a:solidFill>
                   </a:tcPr>
                 </a:tc>
                 <a:tc>
@@ -18344,7 +19649,7 @@
                       </a:endParaRPr>
                     </a:p>
                   </a:txBody>
-                  <a:tcPr marL="0" marR="76200" marT="50800" marB="50800" anchor="ctr">
+                  <a:tcPr marL="76200" marR="101600" marT="88900" marB="88900" anchor="ctr">
                     <a:lnL w="0" cap="flat" cmpd="sng" algn="ctr">
                       <a:noFill/>
                     </a:lnL>
@@ -18354,7 +19659,7 @@
                     <a:lnT w="0" cap="flat" cmpd="sng" algn="ctr">
                       <a:noFill/>
                     </a:lnT>
-                    <a:lnB w="9525" cap="flat" cmpd="sng" algn="ctr">
+                    <a:lnB w="6350" cap="flat" cmpd="sng" algn="ctr">
                       <a:solidFill>
                         <a:srgbClr val="D9D9D9"/>
                       </a:solidFill>
@@ -18363,6 +19668,9 @@
                       <a:headEnd type="none" w="med" len="med"/>
                       <a:tailEnd type="none" w="med" len="med"/>
                     </a:lnB>
+                    <a:solidFill>
+                      <a:srgbClr val="FFFFFF"/>
+                    </a:solidFill>
                   </a:tcPr>
                 </a:tc>
                 <a:tc>
@@ -18412,7 +19720,7 @@
                       </a:endParaRPr>
                     </a:p>
                   </a:txBody>
-                  <a:tcPr marL="0" marR="76200" marT="50800" marB="50800" anchor="ctr">
+                  <a:tcPr marL="76200" marR="101600" marT="88900" marB="88900" anchor="ctr">
                     <a:lnL w="0" cap="flat" cmpd="sng" algn="ctr">
                       <a:noFill/>
                     </a:lnL>
@@ -18422,7 +19730,7 @@
                     <a:lnT w="0" cap="flat" cmpd="sng" algn="ctr">
                       <a:noFill/>
                     </a:lnT>
-                    <a:lnB w="9525" cap="flat" cmpd="sng" algn="ctr">
+                    <a:lnB w="6350" cap="flat" cmpd="sng" algn="ctr">
                       <a:solidFill>
                         <a:srgbClr val="D9D9D9"/>
                       </a:solidFill>
@@ -18431,6 +19739,9 @@
                       <a:headEnd type="none" w="med" len="med"/>
                       <a:tailEnd type="none" w="med" len="med"/>
                     </a:lnB>
+                    <a:solidFill>
+                      <a:srgbClr val="FFFFFF"/>
+                    </a:solidFill>
                   </a:tcPr>
                 </a:tc>
               </a:tr>
@@ -18461,7 +19772,7 @@
                       </a:endParaRPr>
                     </a:p>
                   </a:txBody>
-                  <a:tcPr marL="0" marR="76200" marT="50800" marB="50800" anchor="ctr">
+                  <a:tcPr marL="76200" marR="101600" marT="88900" marB="88900" anchor="ctr">
                     <a:lnL w="0" cap="flat" cmpd="sng" algn="ctr">
                       <a:noFill/>
                     </a:lnL>
@@ -18471,7 +19782,7 @@
                     <a:lnT w="0" cap="flat" cmpd="sng" algn="ctr">
                       <a:noFill/>
                     </a:lnT>
-                    <a:lnB w="9525" cap="flat" cmpd="sng" algn="ctr">
+                    <a:lnB w="6350" cap="flat" cmpd="sng" algn="ctr">
                       <a:solidFill>
                         <a:srgbClr val="D9D9D9"/>
                       </a:solidFill>
@@ -18480,6 +19791,9 @@
                       <a:headEnd type="none" w="med" len="med"/>
                       <a:tailEnd type="none" w="med" len="med"/>
                     </a:lnB>
+                    <a:solidFill>
+                      <a:srgbClr val="FFFFFF"/>
+                    </a:solidFill>
                   </a:tcPr>
                 </a:tc>
                 <a:tc>
@@ -18508,7 +19822,7 @@
                       </a:endParaRPr>
                     </a:p>
                   </a:txBody>
-                  <a:tcPr marL="0" marR="76200" marT="50800" marB="50800" anchor="ctr">
+                  <a:tcPr marL="76200" marR="101600" marT="88900" marB="88900" anchor="ctr">
                     <a:lnL w="0" cap="flat" cmpd="sng" algn="ctr">
                       <a:noFill/>
                     </a:lnL>
@@ -18518,7 +19832,7 @@
                     <a:lnT w="0" cap="flat" cmpd="sng" algn="ctr">
                       <a:noFill/>
                     </a:lnT>
-                    <a:lnB w="9525" cap="flat" cmpd="sng" algn="ctr">
+                    <a:lnB w="6350" cap="flat" cmpd="sng" algn="ctr">
                       <a:solidFill>
                         <a:srgbClr val="D9D9D9"/>
                       </a:solidFill>
@@ -18527,6 +19841,9 @@
                       <a:headEnd type="none" w="med" len="med"/>
                       <a:tailEnd type="none" w="med" len="med"/>
                     </a:lnB>
+                    <a:solidFill>
+                      <a:srgbClr val="FFFFFF"/>
+                    </a:solidFill>
                   </a:tcPr>
                 </a:tc>
                 <a:tc>
@@ -18555,7 +19872,7 @@
                       </a:endParaRPr>
                     </a:p>
                   </a:txBody>
-                  <a:tcPr marL="0" marR="76200" marT="50800" marB="50800" anchor="ctr">
+                  <a:tcPr marL="76200" marR="101600" marT="88900" marB="88900" anchor="ctr">
                     <a:lnL w="0" cap="flat" cmpd="sng" algn="ctr">
                       <a:noFill/>
                     </a:lnL>
@@ -18565,7 +19882,7 @@
                     <a:lnT w="0" cap="flat" cmpd="sng" algn="ctr">
                       <a:noFill/>
                     </a:lnT>
-                    <a:lnB w="9525" cap="flat" cmpd="sng" algn="ctr">
+                    <a:lnB w="6350" cap="flat" cmpd="sng" algn="ctr">
                       <a:solidFill>
                         <a:srgbClr val="D9D9D9"/>
                       </a:solidFill>
@@ -18574,6 +19891,9 @@
                       <a:headEnd type="none" w="med" len="med"/>
                       <a:tailEnd type="none" w="med" len="med"/>
                     </a:lnB>
+                    <a:solidFill>
+                      <a:srgbClr val="FFFFFF"/>
+                    </a:solidFill>
                   </a:tcPr>
                 </a:tc>
               </a:tr>
@@ -18583,7 +19903,30 @@
       </p:graphicFrame>
       <p:sp>
         <p:nvSpPr>
-          <p:cNvPr id="5" name="Text 2"/>
+          <p:cNvPr id="5" name="Shape 2"/>
+          <p:cNvSpPr/>
+          <p:nvPr/>
+        </p:nvSpPr>
+        <p:spPr>
+          <a:xfrm>
+            <a:off x="457200" y="1417320"/>
+            <a:ext cx="8229600" cy="0"/>
+          </a:xfrm>
+          <a:prstGeom prst="line">
+            <a:avLst/>
+          </a:prstGeom>
+          <a:noFill/>
+          <a:ln w="12700">
+            <a:solidFill>
+              <a:srgbClr val="1F4E79"/>
+            </a:solidFill>
+            <a:prstDash val="solid"/>
+          </a:ln>
+        </p:spPr>
+      </p:sp>
+      <p:sp>
+        <p:nvSpPr>
+          <p:cNvPr id="6" name="Text 3"/>
           <p:cNvSpPr txBox="1"/>
           <p:nvPr/>
         </p:nvSpPr>
@@ -18702,7 +20045,7 @@
         </p:nvSpPr>
         <p:spPr>
           <a:xfrm>
-            <a:off x="457200" y="292608"/>
+            <a:off x="457200" y="310896"/>
             <a:ext cx="8229600" cy="868680"/>
           </a:xfrm>
           <a:prstGeom prst="rect">
@@ -19326,7 +20669,7 @@
         </p:nvSpPr>
         <p:spPr>
           <a:xfrm>
-            <a:off x="4410151" y="4370832"/>
+            <a:off x="4410151" y="4251960"/>
             <a:ext cx="457200" cy="201168"/>
           </a:xfrm>
           <a:prstGeom prst="rect">
@@ -19411,7 +20754,7 @@
         <p:spPr>
           <a:xfrm>
             <a:off x="5806440" y="1463040"/>
-            <a:ext cx="2880360" cy="2926080"/>
+            <a:ext cx="2880360" cy="549656"/>
           </a:xfrm>
           <a:prstGeom prst="rect">
             <a:avLst/>
@@ -19423,17 +20766,16 @@
           <a:bodyPr wrap="square" lIns="0" tIns="0" rIns="0" bIns="0" rtlCol="0" anchor="t"/>
           <a:lstStyle/>
           <a:p>
-            <a:pPr marL="177800" indent="-177800">
+            <a:pPr algn="l" indent="0" marL="0">
               <a:lnSpc>
                 <a:spcPct val="108000"/>
               </a:lnSpc>
-              <a:buSzPct val="100000"/>
-              <a:buChar char="•"/>
-            </a:pPr>
-            <a:r>
-              <a:rPr lang="en-US" sz="1600" dirty="0">
-                <a:solidFill>
-                  <a:srgbClr val="3A3A3A"/>
+              <a:buNone/>
+            </a:pPr>
+            <a:r>
+              <a:rPr lang="en-US" sz="1600" b="1" dirty="0">
+                <a:solidFill>
+                  <a:srgbClr val="1F4E79"/>
                 </a:solidFill>
                 <a:latin typeface="Arial" pitchFamily="34" charset="0"/>
                 <a:ea typeface="Arial" pitchFamily="34" charset="-122"/>
@@ -19444,20 +20786,16 @@
             <a:endParaRPr lang="en-US" sz="1600" dirty="0"/>
           </a:p>
           <a:p>
-            <a:pPr marL="177800" indent="-177800">
+            <a:pPr algn="l" indent="0" marL="0">
               <a:lnSpc>
                 <a:spcPct val="108000"/>
               </a:lnSpc>
-              <a:spcAft>
-                <a:spcPts val="1400"/>
-              </a:spcAft>
-              <a:buSzPct val="100000"/>
-              <a:buChar char=" "/>
-            </a:pPr>
-            <a:r>
-              <a:rPr lang="en-US" sz="1600" dirty="0">
-                <a:solidFill>
-                  <a:srgbClr val="3A3A3A"/>
+              <a:buNone/>
+            </a:pPr>
+            <a:r>
+              <a:rPr lang="en-US" sz="1600" b="1" dirty="0">
+                <a:solidFill>
+                  <a:srgbClr val="1F4E79"/>
                 </a:solidFill>
                 <a:latin typeface="Arial" pitchFamily="34" charset="0"/>
                 <a:ea typeface="Arial" pitchFamily="34" charset="-122"/>
@@ -19467,13 +20805,57 @@
             </a:r>
             <a:endParaRPr lang="en-US" sz="1600" dirty="0"/>
           </a:p>
-          <a:p>
-            <a:pPr marL="177800" indent="-177800">
+        </p:txBody>
+      </p:sp>
+      <p:sp>
+        <p:nvSpPr>
+          <p:cNvPr id="21" name="Shape 18"/>
+          <p:cNvSpPr/>
+          <p:nvPr/>
+        </p:nvSpPr>
+        <p:spPr>
+          <a:xfrm>
+            <a:off x="5806440" y="2121747"/>
+            <a:ext cx="2880360" cy="0"/>
+          </a:xfrm>
+          <a:prstGeom prst="line">
+            <a:avLst/>
+          </a:prstGeom>
+          <a:noFill/>
+          <a:ln w="6350">
+            <a:solidFill>
+              <a:srgbClr val="D9D9D9"/>
+            </a:solidFill>
+            <a:prstDash val="solid"/>
+          </a:ln>
+        </p:spPr>
+      </p:sp>
+      <p:sp>
+        <p:nvSpPr>
+          <p:cNvPr id="22" name="Text 19"/>
+          <p:cNvSpPr txBox="1"/>
+          <p:nvPr/>
+        </p:nvSpPr>
+        <p:spPr>
+          <a:xfrm>
+            <a:off x="5806440" y="2230797"/>
+            <a:ext cx="2880360" cy="549656"/>
+          </a:xfrm>
+          <a:prstGeom prst="rect">
+            <a:avLst/>
+          </a:prstGeom>
+          <a:noFill/>
+          <a:ln/>
+        </p:spPr>
+        <p:txBody>
+          <a:bodyPr wrap="square" lIns="0" tIns="0" rIns="0" bIns="0" rtlCol="0" anchor="t"/>
+          <a:lstStyle/>
+          <a:p>
+            <a:pPr algn="l" indent="0" marL="0">
               <a:lnSpc>
                 <a:spcPct val="108000"/>
               </a:lnSpc>
-              <a:buSzPct val="100000"/>
-              <a:buChar char="•"/>
+              <a:buNone/>
             </a:pPr>
             <a:r>
               <a:rPr lang="en-US" sz="1600" dirty="0">
@@ -19489,15 +20871,11 @@
             <a:endParaRPr lang="en-US" sz="1600" dirty="0"/>
           </a:p>
           <a:p>
-            <a:pPr marL="177800" indent="-177800">
+            <a:pPr algn="l" indent="0" marL="0">
               <a:lnSpc>
                 <a:spcPct val="108000"/>
               </a:lnSpc>
-              <a:spcAft>
-                <a:spcPts val="1400"/>
-              </a:spcAft>
-              <a:buSzPct val="100000"/>
-              <a:buChar char=" "/>
+              <a:buNone/>
             </a:pPr>
             <a:r>
               <a:rPr lang="en-US" sz="1600" dirty="0">
@@ -19512,13 +20890,57 @@
             </a:r>
             <a:endParaRPr lang="en-US" sz="1600" dirty="0"/>
           </a:p>
-          <a:p>
-            <a:pPr marL="177800" indent="-177800">
+        </p:txBody>
+      </p:sp>
+      <p:sp>
+        <p:nvSpPr>
+          <p:cNvPr id="23" name="Shape 20"/>
+          <p:cNvSpPr/>
+          <p:nvPr/>
+        </p:nvSpPr>
+        <p:spPr>
+          <a:xfrm>
+            <a:off x="5806440" y="2889504"/>
+            <a:ext cx="2880360" cy="0"/>
+          </a:xfrm>
+          <a:prstGeom prst="line">
+            <a:avLst/>
+          </a:prstGeom>
+          <a:noFill/>
+          <a:ln w="6350">
+            <a:solidFill>
+              <a:srgbClr val="D9D9D9"/>
+            </a:solidFill>
+            <a:prstDash val="solid"/>
+          </a:ln>
+        </p:spPr>
+      </p:sp>
+      <p:sp>
+        <p:nvSpPr>
+          <p:cNvPr id="24" name="Text 21"/>
+          <p:cNvSpPr txBox="1"/>
+          <p:nvPr/>
+        </p:nvSpPr>
+        <p:spPr>
+          <a:xfrm>
+            <a:off x="5806440" y="2998555"/>
+            <a:ext cx="2880360" cy="549656"/>
+          </a:xfrm>
+          <a:prstGeom prst="rect">
+            <a:avLst/>
+          </a:prstGeom>
+          <a:noFill/>
+          <a:ln/>
+        </p:spPr>
+        <p:txBody>
+          <a:bodyPr wrap="square" lIns="0" tIns="0" rIns="0" bIns="0" rtlCol="0" anchor="t"/>
+          <a:lstStyle/>
+          <a:p>
+            <a:pPr algn="l" indent="0" marL="0">
               <a:lnSpc>
                 <a:spcPct val="108000"/>
               </a:lnSpc>
-              <a:buSzPct val="100000"/>
-              <a:buChar char="•"/>
+              <a:buNone/>
             </a:pPr>
             <a:r>
               <a:rPr lang="en-US" sz="1600" dirty="0">
@@ -19534,15 +20956,11 @@
             <a:endParaRPr lang="en-US" sz="1600" dirty="0"/>
           </a:p>
           <a:p>
-            <a:pPr marL="177800" indent="-177800">
+            <a:pPr algn="l" indent="0" marL="0">
               <a:lnSpc>
                 <a:spcPct val="108000"/>
               </a:lnSpc>
-              <a:spcAft>
-                <a:spcPts val="1400"/>
-              </a:spcAft>
-              <a:buSzPct val="100000"/>
-              <a:buChar char=" "/>
+              <a:buNone/>
             </a:pPr>
             <a:r>
               <a:rPr lang="en-US" sz="1600" dirty="0">
@@ -19557,13 +20975,57 @@
             </a:r>
             <a:endParaRPr lang="en-US" sz="1600" dirty="0"/>
           </a:p>
-          <a:p>
-            <a:pPr marL="177800" indent="-177800">
+        </p:txBody>
+      </p:sp>
+      <p:sp>
+        <p:nvSpPr>
+          <p:cNvPr id="25" name="Shape 22"/>
+          <p:cNvSpPr/>
+          <p:nvPr/>
+        </p:nvSpPr>
+        <p:spPr>
+          <a:xfrm>
+            <a:off x="5806440" y="3657261"/>
+            <a:ext cx="2880360" cy="0"/>
+          </a:xfrm>
+          <a:prstGeom prst="line">
+            <a:avLst/>
+          </a:prstGeom>
+          <a:noFill/>
+          <a:ln w="6350">
+            <a:solidFill>
+              <a:srgbClr val="D9D9D9"/>
+            </a:solidFill>
+            <a:prstDash val="solid"/>
+          </a:ln>
+        </p:spPr>
+      </p:sp>
+      <p:sp>
+        <p:nvSpPr>
+          <p:cNvPr id="26" name="Text 23"/>
+          <p:cNvSpPr txBox="1"/>
+          <p:nvPr/>
+        </p:nvSpPr>
+        <p:spPr>
+          <a:xfrm>
+            <a:off x="5806440" y="3766312"/>
+            <a:ext cx="2880360" cy="549656"/>
+          </a:xfrm>
+          <a:prstGeom prst="rect">
+            <a:avLst/>
+          </a:prstGeom>
+          <a:noFill/>
+          <a:ln/>
+        </p:spPr>
+        <p:txBody>
+          <a:bodyPr wrap="square" lIns="0" tIns="0" rIns="0" bIns="0" rtlCol="0" anchor="t"/>
+          <a:lstStyle/>
+          <a:p>
+            <a:pPr algn="l" indent="0" marL="0">
               <a:lnSpc>
                 <a:spcPct val="108000"/>
               </a:lnSpc>
-              <a:buSzPct val="100000"/>
-              <a:buChar char="•"/>
+              <a:buNone/>
             </a:pPr>
             <a:r>
               <a:rPr lang="en-US" sz="1600" dirty="0">
@@ -19579,15 +21041,11 @@
             <a:endParaRPr lang="en-US" sz="1600" dirty="0"/>
           </a:p>
           <a:p>
-            <a:pPr marL="177800" indent="-177800">
+            <a:pPr algn="l" indent="0" marL="0">
               <a:lnSpc>
                 <a:spcPct val="108000"/>
               </a:lnSpc>
-              <a:spcAft>
-                <a:spcPts val="1400"/>
-              </a:spcAft>
-              <a:buSzPct val="100000"/>
-              <a:buChar char=" "/>
+              <a:buNone/>
             </a:pPr>
             <a:r>
               <a:rPr lang="en-US" sz="1600" dirty="0">
@@ -19606,7 +21064,7 @@
       </p:sp>
       <p:sp>
         <p:nvSpPr>
-          <p:cNvPr id="21" name="Text 18"/>
+          <p:cNvPr id="27" name="Text 24"/>
           <p:cNvSpPr txBox="1"/>
           <p:nvPr/>
         </p:nvSpPr>
@@ -19725,7 +21183,7 @@
         </p:nvSpPr>
         <p:spPr>
           <a:xfrm>
-            <a:off x="457200" y="292608"/>
+            <a:off x="457200" y="310896"/>
             <a:ext cx="8229600" cy="868680"/>
           </a:xfrm>
           <a:prstGeom prst="rect">
@@ -20056,7 +21514,7 @@
         <p:spPr>
           <a:xfrm>
             <a:off x="457200" y="2880360"/>
-            <a:ext cx="8229600" cy="1645920"/>
+            <a:ext cx="8229600" cy="329184"/>
           </a:xfrm>
           <a:prstGeom prst="rect">
             <a:avLst/>
@@ -20068,20 +21526,16 @@
           <a:bodyPr wrap="square" lIns="0" tIns="0" rIns="0" bIns="0" rtlCol="0" anchor="t"/>
           <a:lstStyle/>
           <a:p>
-            <a:pPr marL="203200" indent="-203200">
+            <a:pPr algn="l" indent="0" marL="0">
               <a:lnSpc>
                 <a:spcPct val="108000"/>
               </a:lnSpc>
-              <a:spcAft>
-                <a:spcPts val="1000"/>
-              </a:spcAft>
-              <a:buSzPct val="100000"/>
-              <a:buChar char="•"/>
-            </a:pPr>
-            <a:r>
-              <a:rPr lang="en-US" sz="1800" dirty="0">
-                <a:solidFill>
-                  <a:srgbClr val="3A3A3A"/>
+              <a:buNone/>
+            </a:pPr>
+            <a:r>
+              <a:rPr lang="en-US" sz="1800" b="1" dirty="0">
+                <a:solidFill>
+                  <a:srgbClr val="1F4E79"/>
                 </a:solidFill>
                 <a:latin typeface="Arial" pitchFamily="34" charset="0"/>
                 <a:ea typeface="Arial" pitchFamily="34" charset="-122"/>
@@ -20091,16 +21545,57 @@
             </a:r>
             <a:endParaRPr lang="en-US" sz="1800" dirty="0"/>
           </a:p>
-          <a:p>
-            <a:pPr marL="203200" indent="-203200">
+        </p:txBody>
+      </p:sp>
+      <p:sp>
+        <p:nvSpPr>
+          <p:cNvPr id="13" name="Shape 11"/>
+          <p:cNvSpPr/>
+          <p:nvPr/>
+        </p:nvSpPr>
+        <p:spPr>
+          <a:xfrm>
+            <a:off x="457200" y="3309620"/>
+            <a:ext cx="8229600" cy="0"/>
+          </a:xfrm>
+          <a:prstGeom prst="line">
+            <a:avLst/>
+          </a:prstGeom>
+          <a:noFill/>
+          <a:ln w="6350">
+            <a:solidFill>
+              <a:srgbClr val="D9D9D9"/>
+            </a:solidFill>
+            <a:prstDash val="solid"/>
+          </a:ln>
+        </p:spPr>
+      </p:sp>
+      <p:sp>
+        <p:nvSpPr>
+          <p:cNvPr id="14" name="Text 12"/>
+          <p:cNvSpPr txBox="1"/>
+          <p:nvPr/>
+        </p:nvSpPr>
+        <p:spPr>
+          <a:xfrm>
+            <a:off x="457200" y="3409696"/>
+            <a:ext cx="8229600" cy="329184"/>
+          </a:xfrm>
+          <a:prstGeom prst="rect">
+            <a:avLst/>
+          </a:prstGeom>
+          <a:noFill/>
+          <a:ln/>
+        </p:spPr>
+        <p:txBody>
+          <a:bodyPr wrap="square" lIns="0" tIns="0" rIns="0" bIns="0" rtlCol="0" anchor="t"/>
+          <a:lstStyle/>
+          <a:p>
+            <a:pPr algn="l" indent="0" marL="0">
               <a:lnSpc>
                 <a:spcPct val="108000"/>
               </a:lnSpc>
-              <a:spcAft>
-                <a:spcPts val="1000"/>
-              </a:spcAft>
-              <a:buSzPct val="100000"/>
-              <a:buChar char="•"/>
+              <a:buNone/>
             </a:pPr>
             <a:r>
               <a:rPr lang="en-US" sz="1800" dirty="0">
@@ -20115,16 +21610,57 @@
             </a:r>
             <a:endParaRPr lang="en-US" sz="1800" dirty="0"/>
           </a:p>
-          <a:p>
-            <a:pPr marL="203200" indent="-203200">
+        </p:txBody>
+      </p:sp>
+      <p:sp>
+        <p:nvSpPr>
+          <p:cNvPr id="15" name="Shape 13"/>
+          <p:cNvSpPr/>
+          <p:nvPr/>
+        </p:nvSpPr>
+        <p:spPr>
+          <a:xfrm>
+            <a:off x="457200" y="3838956"/>
+            <a:ext cx="8229600" cy="0"/>
+          </a:xfrm>
+          <a:prstGeom prst="line">
+            <a:avLst/>
+          </a:prstGeom>
+          <a:noFill/>
+          <a:ln w="6350">
+            <a:solidFill>
+              <a:srgbClr val="D9D9D9"/>
+            </a:solidFill>
+            <a:prstDash val="solid"/>
+          </a:ln>
+        </p:spPr>
+      </p:sp>
+      <p:sp>
+        <p:nvSpPr>
+          <p:cNvPr id="16" name="Text 14"/>
+          <p:cNvSpPr txBox="1"/>
+          <p:nvPr/>
+        </p:nvSpPr>
+        <p:spPr>
+          <a:xfrm>
+            <a:off x="457200" y="3939032"/>
+            <a:ext cx="8229600" cy="329184"/>
+          </a:xfrm>
+          <a:prstGeom prst="rect">
+            <a:avLst/>
+          </a:prstGeom>
+          <a:noFill/>
+          <a:ln/>
+        </p:spPr>
+        <p:txBody>
+          <a:bodyPr wrap="square" lIns="0" tIns="0" rIns="0" bIns="0" rtlCol="0" anchor="t"/>
+          <a:lstStyle/>
+          <a:p>
+            <a:pPr algn="l" indent="0" marL="0">
               <a:lnSpc>
                 <a:spcPct val="108000"/>
               </a:lnSpc>
-              <a:spcAft>
-                <a:spcPts val="1000"/>
-              </a:spcAft>
-              <a:buSzPct val="100000"/>
-              <a:buChar char="•"/>
+              <a:buNone/>
             </a:pPr>
             <a:r>
               <a:rPr lang="en-US" sz="1800" dirty="0">
@@ -20220,7 +21756,7 @@
         </p:nvSpPr>
         <p:spPr>
           <a:xfrm>
-            <a:off x="457200" y="292608"/>
+            <a:off x="457200" y="310896"/>
             <a:ext cx="8229600" cy="868680"/>
           </a:xfrm>
           <a:prstGeom prst="rect">
@@ -20378,7 +21914,7 @@
             <a:avLst/>
           </a:prstGeom>
           <a:solidFill>
-            <a:srgbClr val="5B8DC0"/>
+            <a:srgbClr val="6E6E6E"/>
           </a:solidFill>
           <a:ln w="19050">
             <a:solidFill>
@@ -20590,7 +22126,7 @@
         <p:spPr>
           <a:xfrm>
             <a:off x="457200" y="2377440"/>
-            <a:ext cx="8229600" cy="2103120"/>
+            <a:ext cx="8229600" cy="329184"/>
           </a:xfrm>
           <a:prstGeom prst="rect">
             <a:avLst/>
@@ -20602,20 +22138,16 @@
           <a:bodyPr wrap="square" lIns="0" tIns="0" rIns="0" bIns="0" rtlCol="0" anchor="t"/>
           <a:lstStyle/>
           <a:p>
-            <a:pPr marL="203200" indent="-203200">
+            <a:pPr algn="l" indent="0" marL="0">
               <a:lnSpc>
                 <a:spcPct val="108000"/>
               </a:lnSpc>
-              <a:spcAft>
-                <a:spcPts val="1200"/>
-              </a:spcAft>
-              <a:buSzPct val="100000"/>
-              <a:buChar char="•"/>
-            </a:pPr>
-            <a:r>
-              <a:rPr lang="en-US" sz="1800" dirty="0">
-                <a:solidFill>
-                  <a:srgbClr val="3A3A3A"/>
+              <a:buNone/>
+            </a:pPr>
+            <a:r>
+              <a:rPr lang="en-US" sz="1800" b="1" dirty="0">
+                <a:solidFill>
+                  <a:srgbClr val="1F4E79"/>
                 </a:solidFill>
                 <a:latin typeface="Arial" pitchFamily="34" charset="0"/>
                 <a:ea typeface="Arial" pitchFamily="34" charset="-122"/>
@@ -20625,13 +22157,57 @@
             </a:r>
             <a:endParaRPr lang="en-US" sz="1800" dirty="0"/>
           </a:p>
-          <a:p>
-            <a:pPr marL="203200" indent="-203200">
+        </p:txBody>
+      </p:sp>
+      <p:sp>
+        <p:nvSpPr>
+          <p:cNvPr id="14" name="Shape 12"/>
+          <p:cNvSpPr/>
+          <p:nvPr/>
+        </p:nvSpPr>
+        <p:spPr>
+          <a:xfrm>
+            <a:off x="457200" y="2819400"/>
+            <a:ext cx="8229600" cy="0"/>
+          </a:xfrm>
+          <a:prstGeom prst="line">
+            <a:avLst/>
+          </a:prstGeom>
+          <a:noFill/>
+          <a:ln w="6350">
+            <a:solidFill>
+              <a:srgbClr val="D9D9D9"/>
+            </a:solidFill>
+            <a:prstDash val="solid"/>
+          </a:ln>
+        </p:spPr>
+      </p:sp>
+      <p:sp>
+        <p:nvSpPr>
+          <p:cNvPr id="15" name="Text 13"/>
+          <p:cNvSpPr txBox="1"/>
+          <p:nvPr/>
+        </p:nvSpPr>
+        <p:spPr>
+          <a:xfrm>
+            <a:off x="457200" y="2932176"/>
+            <a:ext cx="8229600" cy="612648"/>
+          </a:xfrm>
+          <a:prstGeom prst="rect">
+            <a:avLst/>
+          </a:prstGeom>
+          <a:noFill/>
+          <a:ln/>
+        </p:spPr>
+        <p:txBody>
+          <a:bodyPr wrap="square" lIns="0" tIns="0" rIns="0" bIns="0" rtlCol="0" anchor="t"/>
+          <a:lstStyle/>
+          <a:p>
+            <a:pPr algn="l" indent="0" marL="0">
               <a:lnSpc>
                 <a:spcPct val="108000"/>
               </a:lnSpc>
-              <a:buSzPct val="100000"/>
-              <a:buChar char="•"/>
+              <a:buNone/>
             </a:pPr>
             <a:r>
               <a:rPr lang="en-US" sz="1800" dirty="0">
@@ -20647,15 +22223,11 @@
             <a:endParaRPr lang="en-US" sz="1800" dirty="0"/>
           </a:p>
           <a:p>
-            <a:pPr marL="203200" indent="-203200">
+            <a:pPr algn="l" indent="0" marL="0">
               <a:lnSpc>
                 <a:spcPct val="108000"/>
               </a:lnSpc>
-              <a:spcAft>
-                <a:spcPts val="1200"/>
-              </a:spcAft>
-              <a:buSzPct val="100000"/>
-              <a:buChar char=" "/>
+              <a:buNone/>
             </a:pPr>
             <a:r>
               <a:rPr lang="en-US" sz="1800" dirty="0">
@@ -20670,16 +22242,57 @@
             </a:r>
             <a:endParaRPr lang="en-US" sz="1800" dirty="0"/>
           </a:p>
-          <a:p>
-            <a:pPr marL="203200" indent="-203200">
+        </p:txBody>
+      </p:sp>
+      <p:sp>
+        <p:nvSpPr>
+          <p:cNvPr id="16" name="Shape 14"/>
+          <p:cNvSpPr/>
+          <p:nvPr/>
+        </p:nvSpPr>
+        <p:spPr>
+          <a:xfrm>
+            <a:off x="457200" y="3657600"/>
+            <a:ext cx="8229600" cy="0"/>
+          </a:xfrm>
+          <a:prstGeom prst="line">
+            <a:avLst/>
+          </a:prstGeom>
+          <a:noFill/>
+          <a:ln w="6350">
+            <a:solidFill>
+              <a:srgbClr val="D9D9D9"/>
+            </a:solidFill>
+            <a:prstDash val="solid"/>
+          </a:ln>
+        </p:spPr>
+      </p:sp>
+      <p:sp>
+        <p:nvSpPr>
+          <p:cNvPr id="17" name="Text 15"/>
+          <p:cNvSpPr txBox="1"/>
+          <p:nvPr/>
+        </p:nvSpPr>
+        <p:spPr>
+          <a:xfrm>
+            <a:off x="457200" y="3770376"/>
+            <a:ext cx="8229600" cy="329184"/>
+          </a:xfrm>
+          <a:prstGeom prst="rect">
+            <a:avLst/>
+          </a:prstGeom>
+          <a:noFill/>
+          <a:ln/>
+        </p:spPr>
+        <p:txBody>
+          <a:bodyPr wrap="square" lIns="0" tIns="0" rIns="0" bIns="0" rtlCol="0" anchor="t"/>
+          <a:lstStyle/>
+          <a:p>
+            <a:pPr algn="l" indent="0" marL="0">
               <a:lnSpc>
                 <a:spcPct val="108000"/>
               </a:lnSpc>
-              <a:spcAft>
-                <a:spcPts val="1200"/>
-              </a:spcAft>
-              <a:buSzPct val="100000"/>
-              <a:buChar char="•"/>
+              <a:buNone/>
             </a:pPr>
             <a:r>
               <a:rPr lang="en-US" sz="1800" dirty="0">
@@ -20775,7 +22388,7 @@
         </p:nvSpPr>
         <p:spPr>
           <a:xfrm>
-            <a:off x="457200" y="292608"/>
+            <a:off x="457200" y="310896"/>
             <a:ext cx="8229600" cy="868680"/>
           </a:xfrm>
           <a:prstGeom prst="rect">
@@ -20895,7 +22508,7 @@
         </p:nvSpPr>
         <p:spPr>
           <a:xfrm>
-            <a:off x="4200754" y="3197648"/>
+            <a:off x="4200754" y="2210096"/>
             <a:ext cx="1005840" cy="219456"/>
           </a:xfrm>
           <a:prstGeom prst="rect">
@@ -20917,7 +22530,7 @@
             <a:r>
               <a:rPr lang="en-US" sz="1100" dirty="0">
                 <a:solidFill>
-                  <a:srgbClr val="FFFFFF"/>
+                  <a:srgbClr val="2E75B6"/>
                 </a:solidFill>
                 <a:latin typeface="Arial" pitchFamily="34" charset="0"/>
                 <a:ea typeface="Arial" pitchFamily="34" charset="-122"/>
@@ -20937,7 +22550,7 @@
         </p:nvSpPr>
         <p:spPr>
           <a:xfrm>
-            <a:off x="4200754" y="3398816"/>
+            <a:off x="4200754" y="2438696"/>
             <a:ext cx="1005840" cy="310896"/>
           </a:xfrm>
           <a:prstGeom prst="rect">
@@ -20959,7 +22572,7 @@
             <a:r>
               <a:rPr lang="en-US" sz="1800" b="1" dirty="0">
                 <a:solidFill>
-                  <a:srgbClr val="FFFFFF"/>
+                  <a:srgbClr val="2E75B6"/>
                 </a:solidFill>
                 <a:latin typeface="Arial" pitchFamily="34" charset="0"/>
                 <a:ea typeface="Arial" pitchFamily="34" charset="-122"/>
@@ -20980,7 +22593,7 @@
         <p:spPr>
           <a:xfrm>
             <a:off x="5715000" y="1371600"/>
-            <a:ext cx="2971800" cy="3017520"/>
+            <a:ext cx="2971800" cy="549656"/>
           </a:xfrm>
           <a:prstGeom prst="rect">
             <a:avLst/>
@@ -20992,12 +22605,11 @@
           <a:bodyPr wrap="square" lIns="0" tIns="0" rIns="0" bIns="0" rtlCol="0" anchor="t"/>
           <a:lstStyle/>
           <a:p>
-            <a:pPr marL="177800" indent="-177800">
+            <a:pPr algn="l" indent="0" marL="0">
               <a:lnSpc>
                 <a:spcPct val="108000"/>
               </a:lnSpc>
-              <a:buSzPct val="100000"/>
-              <a:buChar char="•"/>
+              <a:buNone/>
             </a:pPr>
             <a:r>
               <a:rPr lang="en-US" sz="1600" dirty="0">
@@ -21013,15 +22625,11 @@
             <a:endParaRPr lang="en-US" sz="1600" dirty="0"/>
           </a:p>
           <a:p>
-            <a:pPr marL="177800" indent="-177800">
+            <a:pPr algn="l" indent="0" marL="0">
               <a:lnSpc>
                 <a:spcPct val="108000"/>
               </a:lnSpc>
-              <a:spcAft>
-                <a:spcPts val="1400"/>
-              </a:spcAft>
-              <a:buSzPct val="100000"/>
-              <a:buChar char=" "/>
+              <a:buNone/>
             </a:pPr>
             <a:r>
               <a:rPr lang="en-US" sz="1600" dirty="0">
@@ -21036,13 +22644,57 @@
             </a:r>
             <a:endParaRPr lang="en-US" sz="1600" dirty="0"/>
           </a:p>
-          <a:p>
-            <a:pPr marL="177800" indent="-177800">
+        </p:txBody>
+      </p:sp>
+      <p:sp>
+        <p:nvSpPr>
+          <p:cNvPr id="9" name="Shape 6"/>
+          <p:cNvSpPr/>
+          <p:nvPr/>
+        </p:nvSpPr>
+        <p:spPr>
+          <a:xfrm>
+            <a:off x="5715000" y="2046732"/>
+            <a:ext cx="2971800" cy="0"/>
+          </a:xfrm>
+          <a:prstGeom prst="line">
+            <a:avLst/>
+          </a:prstGeom>
+          <a:noFill/>
+          <a:ln w="6350">
+            <a:solidFill>
+              <a:srgbClr val="D9D9D9"/>
+            </a:solidFill>
+            <a:prstDash val="solid"/>
+          </a:ln>
+        </p:spPr>
+      </p:sp>
+      <p:sp>
+        <p:nvSpPr>
+          <p:cNvPr id="10" name="Text 7"/>
+          <p:cNvSpPr txBox="1"/>
+          <p:nvPr/>
+        </p:nvSpPr>
+        <p:spPr>
+          <a:xfrm>
+            <a:off x="5715000" y="2172208"/>
+            <a:ext cx="2971800" cy="801624"/>
+          </a:xfrm>
+          <a:prstGeom prst="rect">
+            <a:avLst/>
+          </a:prstGeom>
+          <a:noFill/>
+          <a:ln/>
+        </p:spPr>
+        <p:txBody>
+          <a:bodyPr wrap="square" lIns="0" tIns="0" rIns="0" bIns="0" rtlCol="0" anchor="t"/>
+          <a:lstStyle/>
+          <a:p>
+            <a:pPr algn="l" indent="0" marL="0">
               <a:lnSpc>
                 <a:spcPct val="108000"/>
               </a:lnSpc>
-              <a:buSzPct val="100000"/>
-              <a:buChar char="•"/>
+              <a:buNone/>
             </a:pPr>
             <a:r>
               <a:rPr lang="en-US" sz="1600" dirty="0">
@@ -21058,15 +22710,11 @@
             <a:endParaRPr lang="en-US" sz="1600" dirty="0"/>
           </a:p>
           <a:p>
-            <a:pPr marL="177800" indent="-177800">
+            <a:pPr algn="l" indent="0" marL="0">
               <a:lnSpc>
                 <a:spcPct val="108000"/>
               </a:lnSpc>
-              <a:spcAft>
-                <a:spcPts val="1400"/>
-              </a:spcAft>
-              <a:buSzPct val="100000"/>
-              <a:buChar char=" "/>
+              <a:buNone/>
             </a:pPr>
             <a:r>
               <a:rPr lang="en-US" sz="1600" dirty="0">
@@ -21077,20 +22725,16 @@
                 <a:ea typeface="Arial" pitchFamily="34" charset="-122"/>
                 <a:cs typeface="Arial" pitchFamily="34" charset="-120"/>
               </a:rPr>
-              <a:t>持続予測の0.91℃に対して0.37℃</a:t>
+              <a:t>持続予測の0.91℃に対して</a:t>
             </a:r>
             <a:endParaRPr lang="en-US" sz="1600" dirty="0"/>
           </a:p>
           <a:p>
-            <a:pPr marL="177800" indent="-177800">
+            <a:pPr algn="l" indent="0" marL="0">
               <a:lnSpc>
                 <a:spcPct val="108000"/>
               </a:lnSpc>
-              <a:spcAft>
-                <a:spcPts val="1400"/>
-              </a:spcAft>
-              <a:buSzPct val="100000"/>
-              <a:buChar char="•"/>
+              <a:buNone/>
             </a:pPr>
             <a:r>
               <a:rPr lang="en-US" sz="1600" dirty="0">
@@ -21101,7 +22745,7 @@
                 <a:ea typeface="Arial" pitchFamily="34" charset="-122"/>
                 <a:cs typeface="Arial" pitchFamily="34" charset="-120"/>
               </a:rPr>
-              <a:t>24時間先は明確な改善なし（付録B）</a:t>
+              <a:t>0.37℃</a:t>
             </a:r>
             <a:endParaRPr lang="en-US" sz="1600" dirty="0"/>
           </a:p>
@@ -21109,7 +22753,92 @@
       </p:sp>
       <p:sp>
         <p:nvSpPr>
-          <p:cNvPr id="9" name="Text 6"/>
+          <p:cNvPr id="11" name="Shape 8"/>
+          <p:cNvSpPr/>
+          <p:nvPr/>
+        </p:nvSpPr>
+        <p:spPr>
+          <a:xfrm>
+            <a:off x="5715000" y="3099308"/>
+            <a:ext cx="2971800" cy="0"/>
+          </a:xfrm>
+          <a:prstGeom prst="line">
+            <a:avLst/>
+          </a:prstGeom>
+          <a:noFill/>
+          <a:ln w="6350">
+            <a:solidFill>
+              <a:srgbClr val="D9D9D9"/>
+            </a:solidFill>
+            <a:prstDash val="solid"/>
+          </a:ln>
+        </p:spPr>
+      </p:sp>
+      <p:sp>
+        <p:nvSpPr>
+          <p:cNvPr id="12" name="Text 9"/>
+          <p:cNvSpPr txBox="1"/>
+          <p:nvPr/>
+        </p:nvSpPr>
+        <p:spPr>
+          <a:xfrm>
+            <a:off x="5715000" y="3224784"/>
+            <a:ext cx="2971800" cy="549656"/>
+          </a:xfrm>
+          <a:prstGeom prst="rect">
+            <a:avLst/>
+          </a:prstGeom>
+          <a:noFill/>
+          <a:ln/>
+        </p:spPr>
+        <p:txBody>
+          <a:bodyPr wrap="square" lIns="0" tIns="0" rIns="0" bIns="0" rtlCol="0" anchor="t"/>
+          <a:lstStyle/>
+          <a:p>
+            <a:pPr algn="l" indent="0" marL="0">
+              <a:lnSpc>
+                <a:spcPct val="108000"/>
+              </a:lnSpc>
+              <a:buNone/>
+            </a:pPr>
+            <a:r>
+              <a:rPr lang="en-US" sz="1600" dirty="0">
+                <a:solidFill>
+                  <a:srgbClr val="3A3A3A"/>
+                </a:solidFill>
+                <a:latin typeface="Arial" pitchFamily="34" charset="0"/>
+                <a:ea typeface="Arial" pitchFamily="34" charset="-122"/>
+                <a:cs typeface="Arial" pitchFamily="34" charset="-120"/>
+              </a:rPr>
+              <a:t>24時間先は明確な改善なし</a:t>
+            </a:r>
+            <a:endParaRPr lang="en-US" sz="1600" dirty="0"/>
+          </a:p>
+          <a:p>
+            <a:pPr algn="l" indent="0" marL="0">
+              <a:lnSpc>
+                <a:spcPct val="108000"/>
+              </a:lnSpc>
+              <a:buNone/>
+            </a:pPr>
+            <a:r>
+              <a:rPr lang="en-US" sz="1600" dirty="0">
+                <a:solidFill>
+                  <a:srgbClr val="3A3A3A"/>
+                </a:solidFill>
+                <a:latin typeface="Arial" pitchFamily="34" charset="0"/>
+                <a:ea typeface="Arial" pitchFamily="34" charset="-122"/>
+                <a:cs typeface="Arial" pitchFamily="34" charset="-120"/>
+              </a:rPr>
+              <a:t>（付録B）</a:t>
+            </a:r>
+            <a:endParaRPr lang="en-US" sz="1600" dirty="0"/>
+          </a:p>
+        </p:txBody>
+      </p:sp>
+      <p:sp>
+        <p:nvSpPr>
+          <p:cNvPr id="13" name="Text 10"/>
           <p:cNvSpPr txBox="1"/>
           <p:nvPr/>
         </p:nvSpPr>
@@ -21228,7 +22957,7 @@
         </p:nvSpPr>
         <p:spPr>
           <a:xfrm>
-            <a:off x="457200" y="292608"/>
+            <a:off x="457200" y="310896"/>
             <a:ext cx="8229600" cy="868680"/>
           </a:xfrm>
           <a:prstGeom prst="rect">
@@ -21853,7 +23582,7 @@
         <p:spPr>
           <a:xfrm>
             <a:off x="5852160" y="1371600"/>
-            <a:ext cx="2834640" cy="3017520"/>
+            <a:ext cx="2834640" cy="518160"/>
           </a:xfrm>
           <a:prstGeom prst="rect">
             <a:avLst/>
@@ -21865,17 +23594,16 @@
           <a:bodyPr wrap="square" lIns="0" tIns="0" rIns="0" bIns="0" rtlCol="0" anchor="t"/>
           <a:lstStyle/>
           <a:p>
-            <a:pPr marL="177800" indent="-177800">
+            <a:pPr algn="l" indent="0" marL="0">
               <a:lnSpc>
                 <a:spcPct val="108000"/>
               </a:lnSpc>
-              <a:buSzPct val="100000"/>
-              <a:buChar char="•"/>
-            </a:pPr>
-            <a:r>
-              <a:rPr lang="en-US" sz="1500" dirty="0">
-                <a:solidFill>
-                  <a:srgbClr val="3A3A3A"/>
+              <a:buNone/>
+            </a:pPr>
+            <a:r>
+              <a:rPr lang="en-US" sz="1500" b="1" dirty="0">
+                <a:solidFill>
+                  <a:srgbClr val="1F4E79"/>
                 </a:solidFill>
                 <a:latin typeface="Arial" pitchFamily="34" charset="0"/>
                 <a:ea typeface="Arial" pitchFamily="34" charset="-122"/>
@@ -21886,20 +23614,16 @@
             <a:endParaRPr lang="en-US" sz="1500" dirty="0"/>
           </a:p>
           <a:p>
-            <a:pPr marL="177800" indent="-177800">
+            <a:pPr algn="l" indent="0" marL="0">
               <a:lnSpc>
                 <a:spcPct val="108000"/>
               </a:lnSpc>
-              <a:spcAft>
-                <a:spcPts val="1200"/>
-              </a:spcAft>
-              <a:buSzPct val="100000"/>
-              <a:buChar char=" "/>
-            </a:pPr>
-            <a:r>
-              <a:rPr lang="en-US" sz="1500" dirty="0">
-                <a:solidFill>
-                  <a:srgbClr val="3A3A3A"/>
+              <a:buNone/>
+            </a:pPr>
+            <a:r>
+              <a:rPr lang="en-US" sz="1500" b="1" dirty="0">
+                <a:solidFill>
+                  <a:srgbClr val="1F4E79"/>
                 </a:solidFill>
                 <a:latin typeface="Arial" pitchFamily="34" charset="0"/>
                 <a:ea typeface="Arial" pitchFamily="34" charset="-122"/>
@@ -21909,13 +23633,57 @@
             </a:r>
             <a:endParaRPr lang="en-US" sz="1500" dirty="0"/>
           </a:p>
-          <a:p>
-            <a:pPr marL="177800" indent="-177800">
+        </p:txBody>
+      </p:sp>
+      <p:sp>
+        <p:nvSpPr>
+          <p:cNvPr id="19" name="Shape 16"/>
+          <p:cNvSpPr/>
+          <p:nvPr/>
+        </p:nvSpPr>
+        <p:spPr>
+          <a:xfrm>
+            <a:off x="5852160" y="2002536"/>
+            <a:ext cx="2834640" cy="0"/>
+          </a:xfrm>
+          <a:prstGeom prst="line">
+            <a:avLst/>
+          </a:prstGeom>
+          <a:noFill/>
+          <a:ln w="6350">
+            <a:solidFill>
+              <a:srgbClr val="D9D9D9"/>
+            </a:solidFill>
+            <a:prstDash val="solid"/>
+          </a:ln>
+        </p:spPr>
+      </p:sp>
+      <p:sp>
+        <p:nvSpPr>
+          <p:cNvPr id="20" name="Text 17"/>
+          <p:cNvSpPr txBox="1"/>
+          <p:nvPr/>
+        </p:nvSpPr>
+        <p:spPr>
+          <a:xfrm>
+            <a:off x="5852160" y="2115312"/>
+            <a:ext cx="2834640" cy="754380"/>
+          </a:xfrm>
+          <a:prstGeom prst="rect">
+            <a:avLst/>
+          </a:prstGeom>
+          <a:noFill/>
+          <a:ln/>
+        </p:spPr>
+        <p:txBody>
+          <a:bodyPr wrap="square" lIns="0" tIns="0" rIns="0" bIns="0" rtlCol="0" anchor="t"/>
+          <a:lstStyle/>
+          <a:p>
+            <a:pPr algn="l" indent="0" marL="0">
               <a:lnSpc>
                 <a:spcPct val="108000"/>
               </a:lnSpc>
-              <a:buSzPct val="100000"/>
-              <a:buChar char="•"/>
+              <a:buNone/>
             </a:pPr>
             <a:r>
               <a:rPr lang="en-US" sz="1500" dirty="0">
@@ -21931,12 +23699,11 @@
             <a:endParaRPr lang="en-US" sz="1500" dirty="0"/>
           </a:p>
           <a:p>
-            <a:pPr marL="177800" indent="-177800">
+            <a:pPr algn="l" indent="0" marL="0">
               <a:lnSpc>
                 <a:spcPct val="108000"/>
               </a:lnSpc>
-              <a:buSzPct val="100000"/>
-              <a:buChar char=" "/>
+              <a:buNone/>
             </a:pPr>
             <a:r>
               <a:rPr lang="en-US" sz="1500" dirty="0">
@@ -21952,15 +23719,11 @@
             <a:endParaRPr lang="en-US" sz="1500" dirty="0"/>
           </a:p>
           <a:p>
-            <a:pPr marL="177800" indent="-177800">
+            <a:pPr algn="l" indent="0" marL="0">
               <a:lnSpc>
                 <a:spcPct val="108000"/>
               </a:lnSpc>
-              <a:spcAft>
-                <a:spcPts val="1200"/>
-              </a:spcAft>
-              <a:buSzPct val="100000"/>
-              <a:buChar char=" "/>
+              <a:buNone/>
             </a:pPr>
             <a:r>
               <a:rPr lang="en-US" sz="1500" dirty="0">
@@ -21975,13 +23738,57 @@
             </a:r>
             <a:endParaRPr lang="en-US" sz="1500" dirty="0"/>
           </a:p>
-          <a:p>
-            <a:pPr marL="177800" indent="-177800">
+        </p:txBody>
+      </p:sp>
+      <p:sp>
+        <p:nvSpPr>
+          <p:cNvPr id="21" name="Shape 18"/>
+          <p:cNvSpPr/>
+          <p:nvPr/>
+        </p:nvSpPr>
+        <p:spPr>
+          <a:xfrm>
+            <a:off x="5852160" y="2982468"/>
+            <a:ext cx="2834640" cy="0"/>
+          </a:xfrm>
+          <a:prstGeom prst="line">
+            <a:avLst/>
+          </a:prstGeom>
+          <a:noFill/>
+          <a:ln w="6350">
+            <a:solidFill>
+              <a:srgbClr val="D9D9D9"/>
+            </a:solidFill>
+            <a:prstDash val="solid"/>
+          </a:ln>
+        </p:spPr>
+      </p:sp>
+      <p:sp>
+        <p:nvSpPr>
+          <p:cNvPr id="22" name="Text 19"/>
+          <p:cNvSpPr txBox="1"/>
+          <p:nvPr/>
+        </p:nvSpPr>
+        <p:spPr>
+          <a:xfrm>
+            <a:off x="5852160" y="3095244"/>
+            <a:ext cx="2834640" cy="754380"/>
+          </a:xfrm>
+          <a:prstGeom prst="rect">
+            <a:avLst/>
+          </a:prstGeom>
+          <a:noFill/>
+          <a:ln/>
+        </p:spPr>
+        <p:txBody>
+          <a:bodyPr wrap="square" lIns="0" tIns="0" rIns="0" bIns="0" rtlCol="0" anchor="t"/>
+          <a:lstStyle/>
+          <a:p>
+            <a:pPr algn="l" indent="0" marL="0">
               <a:lnSpc>
                 <a:spcPct val="108000"/>
               </a:lnSpc>
-              <a:buSzPct val="100000"/>
-              <a:buChar char="•"/>
+              <a:buNone/>
             </a:pPr>
             <a:r>
               <a:rPr lang="en-US" sz="1500" dirty="0">
@@ -21997,12 +23804,11 @@
             <a:endParaRPr lang="en-US" sz="1500" dirty="0"/>
           </a:p>
           <a:p>
-            <a:pPr marL="177800" indent="-177800">
+            <a:pPr algn="l" indent="0" marL="0">
               <a:lnSpc>
                 <a:spcPct val="108000"/>
               </a:lnSpc>
-              <a:buSzPct val="100000"/>
-              <a:buChar char=" "/>
+              <a:buNone/>
             </a:pPr>
             <a:r>
               <a:rPr lang="en-US" sz="1500" dirty="0">
@@ -22018,15 +23824,11 @@
             <a:endParaRPr lang="en-US" sz="1500" dirty="0"/>
           </a:p>
           <a:p>
-            <a:pPr marL="177800" indent="-177800">
+            <a:pPr algn="l" indent="0" marL="0">
               <a:lnSpc>
                 <a:spcPct val="108000"/>
               </a:lnSpc>
-              <a:spcAft>
-                <a:spcPts val="1200"/>
-              </a:spcAft>
-              <a:buSzPct val="100000"/>
-              <a:buChar char=" "/>
+              <a:buNone/>
             </a:pPr>
             <a:r>
               <a:rPr lang="en-US" sz="1500" dirty="0">
@@ -22045,7 +23847,7 @@
       </p:sp>
       <p:sp>
         <p:nvSpPr>
-          <p:cNvPr id="19" name="Text 16"/>
+          <p:cNvPr id="23" name="Text 20"/>
           <p:cNvSpPr txBox="1"/>
           <p:nvPr/>
         </p:nvSpPr>
